--- a/media/exports/reports/2026-05/cost-to-raise.pptx
+++ b/media/exports/reports/2026-05/cost-to-raise.pptx
@@ -260,7 +260,9 @@
     <a:lstStyle/>
     <a:p>
       <a:pPr>
-        <a:defRPr sz="1800"/>
+        <a:defRPr sz="1800">
+          <a:latin typeface="Roboto"/>
+        </a:defRPr>
       </a:pPr>
       <a:endParaRPr lang="en-US"/>
     </a:p>
@@ -532,7 +534,9 @@
     <a:lstStyle/>
     <a:p>
       <a:pPr>
-        <a:defRPr sz="1800"/>
+        <a:defRPr sz="1800">
+          <a:latin typeface="Roboto"/>
+        </a:defRPr>
       </a:pPr>
       <a:endParaRPr/>
     </a:p>
@@ -3563,11 +3567,17 @@
           <a:bodyPr rtlCol="0" anchor="ctr"/>
           <a:lstStyle/>
           <a:p>
+            <a:pPr>
+              <a:defRPr>
+                <a:latin typeface="Roboto"/>
+              </a:defRPr>
+            </a:pPr>
             <a:r>
               <a:rPr sz="1600" b="1">
                 <a:solidFill>
                   <a:srgbClr val="FFFFFF"/>
                 </a:solidFill>
+                <a:latin typeface="Roboto"/>
               </a:rPr>
               <a:t>4th</a:t>
             </a:r>
@@ -3596,14 +3606,19 @@
           </a:bodyPr>
           <a:lstStyle/>
           <a:p>
+            <a:pPr>
+              <a:defRPr>
+                <a:latin typeface="Roboto"/>
+              </a:defRPr>
+            </a:pPr>
             <a:r>
               <a:rPr sz="1800" b="1">
                 <a:solidFill>
                   <a:srgbClr val="25342A"/>
                 </a:solidFill>
-                <a:latin typeface="Arial"/>
-              </a:rPr>
-              <a:t>The 4th Sheet</a:t>
+                <a:latin typeface="Roboto"/>
+              </a:rPr>
+              <a:t>The Fourth Sheet</a:t>
             </a:r>
           </a:p>
         </p:txBody>
@@ -3630,12 +3645,17 @@
           </a:bodyPr>
           <a:lstStyle/>
           <a:p>
+            <a:pPr>
+              <a:defRPr>
+                <a:latin typeface="Roboto"/>
+              </a:defRPr>
+            </a:pPr>
             <a:r>
               <a:rPr sz="1100" b="1">
                 <a:solidFill>
                   <a:srgbClr val="8A7A52"/>
                 </a:solidFill>
-                <a:latin typeface="Arial"/>
+                <a:latin typeface="Roboto"/>
               </a:rPr>
               <a:t>SAMPLE DATA · invented figures for demonstration</a:t>
             </a:r>
@@ -3664,12 +3684,17 @@
           </a:bodyPr>
           <a:lstStyle/>
           <a:p>
+            <a:pPr>
+              <a:defRPr>
+                <a:latin typeface="Roboto"/>
+              </a:defRPr>
+            </a:pPr>
             <a:r>
               <a:rPr sz="3400" b="1">
                 <a:solidFill>
                   <a:srgbClr val="25342A"/>
                 </a:solidFill>
-                <a:latin typeface="Arial"/>
+                <a:latin typeface="Roboto"/>
               </a:rPr>
               <a:t>What does it cost to raise a dollar?</a:t>
             </a:r>
@@ -3698,12 +3723,17 @@
           </a:bodyPr>
           <a:lstStyle/>
           <a:p>
+            <a:pPr>
+              <a:defRPr>
+                <a:latin typeface="Roboto"/>
+              </a:defRPr>
+            </a:pPr>
             <a:r>
               <a:rPr sz="1600" b="0">
                 <a:solidFill>
                   <a:srgbClr val="5F6F63"/>
                 </a:solidFill>
-                <a:latin typeface="Arial"/>
+                <a:latin typeface="Roboto"/>
               </a:rPr>
               <a:t>Sample Community Services Ltd</a:t>
             </a:r>
@@ -3732,12 +3762,17 @@
           </a:bodyPr>
           <a:lstStyle/>
           <a:p>
+            <a:pPr>
+              <a:defRPr>
+                <a:latin typeface="Roboto"/>
+              </a:defRPr>
+            </a:pPr>
             <a:r>
               <a:rPr sz="1400" b="0">
                 <a:solidFill>
                   <a:srgbClr val="25342A"/>
                 </a:solidFill>
-                <a:latin typeface="Arial"/>
+                <a:latin typeface="Roboto"/>
               </a:rPr>
               <a:t>Period: May 2026. What fundraising costs (grant writing, donor campaigns, events) for every dollar it brings in. Pick a source and every number, chart and note follows it.</a:t>
             </a:r>
@@ -3766,45 +3801,65 @@
           </a:bodyPr>
           <a:lstStyle/>
           <a:p>
+            <a:pPr>
+              <a:defRPr>
+                <a:latin typeface="Roboto"/>
+              </a:defRPr>
+            </a:pPr>
             <a:r>
               <a:rPr sz="1100" b="0">
                 <a:solidFill>
                   <a:srgbClr val="5F6F63"/>
                 </a:solidFill>
-                <a:latin typeface="Arial"/>
+                <a:latin typeface="Roboto"/>
               </a:rPr>
               <a:t>How final is this data?</a:t>
             </a:r>
           </a:p>
           <a:p>
+            <a:pPr>
+              <a:defRPr>
+                <a:latin typeface="Roboto"/>
+              </a:defRPr>
+            </a:pPr>
             <a:r>
               <a:rPr sz="1100" b="0">
                 <a:solidFill>
                   <a:srgbClr val="5F6F63"/>
                 </a:solidFill>
-                <a:latin typeface="Arial"/>
+                <a:latin typeface="Roboto"/>
               </a:rPr>
               <a:t>April 2026: Locked. April 2026 is locked (closed 5 May 2026). These numbers won't change.</a:t>
             </a:r>
           </a:p>
           <a:p>
+            <a:pPr>
+              <a:defRPr>
+                <a:latin typeface="Roboto"/>
+              </a:defRPr>
+            </a:pPr>
             <a:r>
               <a:rPr sz="1100" b="0">
                 <a:solidFill>
                   <a:srgbClr val="5F6F63"/>
                 </a:solidFill>
-                <a:latin typeface="Arial"/>
+                <a:latin typeface="Roboto"/>
               </a:rPr>
               <a:t>May 2026: Locked. May 2026 is locked (closed 2 Jun 2026). These numbers won't change.</a:t>
             </a:r>
           </a:p>
           <a:p>
+            <a:pPr>
+              <a:defRPr>
+                <a:latin typeface="Roboto"/>
+              </a:defRPr>
+            </a:pPr>
             <a:r>
               <a:rPr sz="1100" b="0">
                 <a:solidFill>
                   <a:srgbClr val="5F6F63"/>
                 </a:solidFill>
-                <a:latin typeface="Arial"/>
+                <a:latin typeface="Roboto"/>
               </a:rPr>
               <a:t>October 2026: Incomplete. October 2026 is still in progress: figures to 6 Oct only.</a:t>
             </a:r>
@@ -3833,12 +3888,17 @@
           </a:bodyPr>
           <a:lstStyle/>
           <a:p>
+            <a:pPr>
+              <a:defRPr>
+                <a:latin typeface="Roboto"/>
+              </a:defRPr>
+            </a:pPr>
             <a:r>
               <a:rPr sz="900" b="0">
                 <a:solidFill>
                   <a:srgbClr val="5F6F63"/>
                 </a:solidFill>
-                <a:latin typeface="Arial"/>
+                <a:latin typeface="Roboto"/>
               </a:rPr>
               <a:t>cost-to-raise.pptx</a:t>
             </a:r>
@@ -3867,13 +3927,17 @@
           </a:bodyPr>
           <a:lstStyle/>
           <a:p>
-            <a:pPr algn="ctr"/>
+            <a:pPr algn="ctr">
+              <a:defRPr>
+                <a:latin typeface="Roboto"/>
+              </a:defRPr>
+            </a:pPr>
             <a:r>
               <a:rPr sz="900" b="0">
                 <a:solidFill>
                   <a:srgbClr val="5F6F63"/>
                 </a:solidFill>
-                <a:latin typeface="Arial"/>
+                <a:latin typeface="Roboto"/>
               </a:rPr>
               <a:t>Data retrieved 2pm, Tue 6 Oct 2026 · Sample data</a:t>
             </a:r>
@@ -3902,13 +3966,17 @@
           </a:bodyPr>
           <a:lstStyle/>
           <a:p>
-            <a:pPr algn="r"/>
+            <a:pPr algn="r">
+              <a:defRPr>
+                <a:latin typeface="Roboto"/>
+              </a:defRPr>
+            </a:pPr>
             <a:r>
               <a:rPr sz="900" b="0">
                 <a:solidFill>
                   <a:srgbClr val="5F6F63"/>
                 </a:solidFill>
-                <a:latin typeface="Arial"/>
+                <a:latin typeface="Roboto"/>
               </a:rPr>
               <a:t>Slide 1 of 11</a:t>
             </a:r>
@@ -3972,7 +4040,11 @@
           <a:bodyPr rtlCol="0" anchor="ctr"/>
           <a:lstStyle/>
           <a:p>
-            <a:pPr algn="ctr"/>
+            <a:pPr algn="ctr">
+              <a:defRPr>
+                <a:latin typeface="Roboto"/>
+              </a:defRPr>
+            </a:pPr>
           </a:p>
         </p:txBody>
       </p:sp>
@@ -3998,12 +4070,17 @@
           </a:bodyPr>
           <a:lstStyle/>
           <a:p>
+            <a:pPr>
+              <a:defRPr>
+                <a:latin typeface="Roboto"/>
+              </a:defRPr>
+            </a:pPr>
             <a:r>
               <a:rPr sz="1000" b="0">
                 <a:solidFill>
                   <a:srgbClr val="5F6F63"/>
                 </a:solidFill>
-                <a:latin typeface="Arial"/>
+                <a:latin typeface="Roboto"/>
               </a:rPr>
               <a:t>Sample Community Services Ltd · What does it cost to raise a dollar?</a:t>
             </a:r>
@@ -4032,12 +4109,17 @@
           </a:bodyPr>
           <a:lstStyle/>
           <a:p>
+            <a:pPr>
+              <a:defRPr>
+                <a:latin typeface="Roboto"/>
+              </a:defRPr>
+            </a:pPr>
             <a:r>
               <a:rPr sz="2400" b="1">
                 <a:solidFill>
                   <a:srgbClr val="25342A"/>
                 </a:solidFill>
-                <a:latin typeface="Arial"/>
+                <a:latin typeface="Roboto"/>
               </a:rPr>
               <a:t>What it shows · Source: Fundraising events</a:t>
             </a:r>
@@ -4085,7 +4167,11 @@
           <a:bodyPr rtlCol="0" anchor="ctr"/>
           <a:lstStyle/>
           <a:p>
-            <a:pPr algn="ctr"/>
+            <a:pPr algn="ctr">
+              <a:defRPr>
+                <a:latin typeface="Roboto"/>
+              </a:defRPr>
+            </a:pPr>
           </a:p>
         </p:txBody>
       </p:sp>
@@ -4111,12 +4197,17 @@
           </a:bodyPr>
           <a:lstStyle/>
           <a:p>
+            <a:pPr>
+              <a:defRPr>
+                <a:latin typeface="Roboto"/>
+              </a:defRPr>
+            </a:pPr>
             <a:r>
               <a:rPr sz="1100" b="1">
                 <a:solidFill>
                   <a:srgbClr val="5F6F63"/>
                 </a:solidFill>
-                <a:latin typeface="Arial"/>
+                <a:latin typeface="Roboto"/>
               </a:rPr>
               <a:t>WHAT IT SHOWS</a:t>
             </a:r>
@@ -4145,12 +4236,17 @@
           </a:bodyPr>
           <a:lstStyle/>
           <a:p>
+            <a:pPr>
+              <a:defRPr>
+                <a:latin typeface="Roboto"/>
+              </a:defRPr>
+            </a:pPr>
             <a:r>
               <a:rPr sz="1600" b="0">
                 <a:solidFill>
                   <a:srgbClr val="25342A"/>
                 </a:solidFill>
-                <a:latin typeface="Arial"/>
+                <a:latin typeface="Roboto"/>
               </a:rPr>
               <a:t>Fundraising events cost 41¢ to raise each dollar this financial year to date ($17,800 of event costs for $43,000).</a:t>
             </a:r>
@@ -4198,7 +4294,11 @@
           <a:bodyPr rtlCol="0" anchor="ctr"/>
           <a:lstStyle/>
           <a:p>
-            <a:pPr algn="ctr"/>
+            <a:pPr algn="ctr">
+              <a:defRPr>
+                <a:latin typeface="Roboto"/>
+              </a:defRPr>
+            </a:pPr>
           </a:p>
         </p:txBody>
       </p:sp>
@@ -4224,12 +4324,17 @@
           </a:bodyPr>
           <a:lstStyle/>
           <a:p>
+            <a:pPr>
+              <a:defRPr>
+                <a:latin typeface="Roboto"/>
+              </a:defRPr>
+            </a:pPr>
             <a:r>
               <a:rPr sz="1100" b="1">
                 <a:solidFill>
                   <a:srgbClr val="5F6F63"/>
                 </a:solidFill>
-                <a:latin typeface="Arial"/>
+                <a:latin typeface="Roboto"/>
               </a:rPr>
               <a:t>WHAT YOU'D DO ABOUT IT</a:t>
             </a:r>
@@ -4258,12 +4363,17 @@
           </a:bodyPr>
           <a:lstStyle/>
           <a:p>
+            <a:pPr>
+              <a:defRPr>
+                <a:latin typeface="Roboto"/>
+              </a:defRPr>
+            </a:pPr>
             <a:r>
               <a:rPr sz="1600" b="0">
                 <a:solidFill>
                   <a:srgbClr val="25342A"/>
                 </a:solidFill>
-                <a:latin typeface="Arial"/>
+                <a:latin typeface="Roboto"/>
               </a:rPr>
               <a:t>Usually the dearest money to raise: events are worth counting for what else they bring too (new donors, profile).</a:t>
             </a:r>
@@ -4292,12 +4402,17 @@
           </a:bodyPr>
           <a:lstStyle/>
           <a:p>
+            <a:pPr>
+              <a:defRPr>
+                <a:latin typeface="Roboto"/>
+              </a:defRPr>
+            </a:pPr>
             <a:r>
               <a:rPr sz="900" b="0">
                 <a:solidFill>
                   <a:srgbClr val="5F6F63"/>
                 </a:solidFill>
-                <a:latin typeface="Arial"/>
+                <a:latin typeface="Roboto"/>
               </a:rPr>
               <a:t>cost-to-raise.pptx</a:t>
             </a:r>
@@ -4326,13 +4441,17 @@
           </a:bodyPr>
           <a:lstStyle/>
           <a:p>
-            <a:pPr algn="ctr"/>
+            <a:pPr algn="ctr">
+              <a:defRPr>
+                <a:latin typeface="Roboto"/>
+              </a:defRPr>
+            </a:pPr>
             <a:r>
               <a:rPr sz="900" b="0">
                 <a:solidFill>
                   <a:srgbClr val="5F6F63"/>
                 </a:solidFill>
-                <a:latin typeface="Arial"/>
+                <a:latin typeface="Roboto"/>
               </a:rPr>
               <a:t>Data retrieved 2pm, Tue 6 Oct 2026 · Sample data</a:t>
             </a:r>
@@ -4361,13 +4480,17 @@
           </a:bodyPr>
           <a:lstStyle/>
           <a:p>
-            <a:pPr algn="r"/>
+            <a:pPr algn="r">
+              <a:defRPr>
+                <a:latin typeface="Roboto"/>
+              </a:defRPr>
+            </a:pPr>
             <a:r>
               <a:rPr sz="900" b="0">
                 <a:solidFill>
                   <a:srgbClr val="5F6F63"/>
                 </a:solidFill>
-                <a:latin typeface="Arial"/>
+                <a:latin typeface="Roboto"/>
               </a:rPr>
               <a:t>Slide 10 of 11</a:t>
             </a:r>
@@ -4431,7 +4554,11 @@
           <a:bodyPr rtlCol="0" anchor="ctr"/>
           <a:lstStyle/>
           <a:p>
-            <a:pPr algn="ctr"/>
+            <a:pPr algn="ctr">
+              <a:defRPr>
+                <a:latin typeface="Roboto"/>
+              </a:defRPr>
+            </a:pPr>
           </a:p>
         </p:txBody>
       </p:sp>
@@ -4457,12 +4584,17 @@
           </a:bodyPr>
           <a:lstStyle/>
           <a:p>
+            <a:pPr>
+              <a:defRPr>
+                <a:latin typeface="Roboto"/>
+              </a:defRPr>
+            </a:pPr>
             <a:r>
               <a:rPr sz="1000" b="0">
                 <a:solidFill>
                   <a:srgbClr val="5F6F63"/>
                 </a:solidFill>
-                <a:latin typeface="Arial"/>
+                <a:latin typeface="Roboto"/>
               </a:rPr>
               <a:t>Sample Community Services Ltd · What does it cost to raise a dollar?</a:t>
             </a:r>
@@ -4491,12 +4623,17 @@
           </a:bodyPr>
           <a:lstStyle/>
           <a:p>
+            <a:pPr>
+              <a:defRPr>
+                <a:latin typeface="Roboto"/>
+              </a:defRPr>
+            </a:pPr>
             <a:r>
               <a:rPr sz="2400" b="1">
                 <a:solidFill>
                   <a:srgbClr val="25342A"/>
                 </a:solidFill>
-                <a:latin typeface="Arial"/>
+                <a:latin typeface="Roboto"/>
               </a:rPr>
               <a:t>Cost to raise a dollar, by month (cents) · Cents per $1 · Every source at once</a:t>
             </a:r>
@@ -4525,12 +4662,17 @@
           </a:bodyPr>
           <a:lstStyle/>
           <a:p>
+            <a:pPr>
+              <a:defRPr>
+                <a:latin typeface="Roboto"/>
+              </a:defRPr>
+            </a:pPr>
             <a:r>
               <a:rPr sz="1200" b="0">
                 <a:solidFill>
                   <a:srgbClr val="5F6F63"/>
                 </a:solidFill>
-                <a:latin typeface="Arial"/>
+                <a:latin typeface="Roboto"/>
               </a:rPr>
               <a:t>Months with an event (the gala, the Christmas appeal) jump. A gap means nothing was raised that month.</a:t>
             </a:r>
@@ -4577,12 +4719,17 @@
           </a:bodyPr>
           <a:lstStyle/>
           <a:p>
+            <a:pPr>
+              <a:defRPr>
+                <a:latin typeface="Roboto"/>
+              </a:defRPr>
+            </a:pPr>
             <a:r>
               <a:rPr sz="900" b="0">
                 <a:solidFill>
                   <a:srgbClr val="5F6F63"/>
                 </a:solidFill>
-                <a:latin typeface="Arial"/>
+                <a:latin typeface="Roboto"/>
               </a:rPr>
               <a:t>cost-to-raise.pptx</a:t>
             </a:r>
@@ -4611,13 +4758,17 @@
           </a:bodyPr>
           <a:lstStyle/>
           <a:p>
-            <a:pPr algn="ctr"/>
+            <a:pPr algn="ctr">
+              <a:defRPr>
+                <a:latin typeface="Roboto"/>
+              </a:defRPr>
+            </a:pPr>
             <a:r>
               <a:rPr sz="900" b="0">
                 <a:solidFill>
                   <a:srgbClr val="5F6F63"/>
                 </a:solidFill>
-                <a:latin typeface="Arial"/>
+                <a:latin typeface="Roboto"/>
               </a:rPr>
               <a:t>Data retrieved 2pm, Tue 6 Oct 2026 · Sample data</a:t>
             </a:r>
@@ -4646,13 +4797,17 @@
           </a:bodyPr>
           <a:lstStyle/>
           <a:p>
-            <a:pPr algn="r"/>
+            <a:pPr algn="r">
+              <a:defRPr>
+                <a:latin typeface="Roboto"/>
+              </a:defRPr>
+            </a:pPr>
             <a:r>
               <a:rPr sz="900" b="0">
                 <a:solidFill>
                   <a:srgbClr val="5F6F63"/>
                 </a:solidFill>
-                <a:latin typeface="Arial"/>
+                <a:latin typeface="Roboto"/>
               </a:rPr>
               <a:t>Slide 11 of 11</a:t>
             </a:r>
@@ -4716,7 +4871,11 @@
           <a:bodyPr rtlCol="0" anchor="ctr"/>
           <a:lstStyle/>
           <a:p>
-            <a:pPr algn="ctr"/>
+            <a:pPr algn="ctr">
+              <a:defRPr>
+                <a:latin typeface="Roboto"/>
+              </a:defRPr>
+            </a:pPr>
           </a:p>
         </p:txBody>
       </p:sp>
@@ -4742,12 +4901,17 @@
           </a:bodyPr>
           <a:lstStyle/>
           <a:p>
+            <a:pPr>
+              <a:defRPr>
+                <a:latin typeface="Roboto"/>
+              </a:defRPr>
+            </a:pPr>
             <a:r>
               <a:rPr sz="1000" b="0">
                 <a:solidFill>
                   <a:srgbClr val="5F6F63"/>
                 </a:solidFill>
-                <a:latin typeface="Arial"/>
+                <a:latin typeface="Roboto"/>
               </a:rPr>
               <a:t>Sample Community Services Ltd · What does it cost to raise a dollar?</a:t>
             </a:r>
@@ -4776,12 +4940,17 @@
           </a:bodyPr>
           <a:lstStyle/>
           <a:p>
+            <a:pPr>
+              <a:defRPr>
+                <a:latin typeface="Roboto"/>
+              </a:defRPr>
+            </a:pPr>
             <a:r>
               <a:rPr sz="2400" b="1">
                 <a:solidFill>
                   <a:srgbClr val="25342A"/>
                 </a:solidFill>
-                <a:latin typeface="Arial"/>
+                <a:latin typeface="Roboto"/>
               </a:rPr>
               <a:t>Headline numbers · Source: All fundraising</a:t>
             </a:r>
@@ -4829,7 +4998,11 @@
           <a:bodyPr rtlCol="0" anchor="ctr"/>
           <a:lstStyle/>
           <a:p>
-            <a:pPr algn="ctr"/>
+            <a:pPr algn="ctr">
+              <a:defRPr>
+                <a:latin typeface="Roboto"/>
+              </a:defRPr>
+            </a:pPr>
           </a:p>
         </p:txBody>
       </p:sp>
@@ -4855,12 +5028,17 @@
           </a:bodyPr>
           <a:lstStyle/>
           <a:p>
+            <a:pPr>
+              <a:defRPr>
+                <a:latin typeface="Roboto"/>
+              </a:defRPr>
+            </a:pPr>
             <a:r>
               <a:rPr sz="1200" b="0">
                 <a:solidFill>
                   <a:srgbClr val="5F6F63"/>
                 </a:solidFill>
-                <a:latin typeface="Arial"/>
+                <a:latin typeface="Roboto"/>
               </a:rPr>
               <a:t>May · all fundraising</a:t>
             </a:r>
@@ -4889,12 +5067,17 @@
           </a:bodyPr>
           <a:lstStyle/>
           <a:p>
+            <a:pPr>
+              <a:defRPr>
+                <a:latin typeface="Roboto"/>
+              </a:defRPr>
+            </a:pPr>
             <a:r>
               <a:rPr sz="3000" b="1">
                 <a:solidFill>
                   <a:srgbClr val="2F7A5D"/>
                 </a:solidFill>
-                <a:latin typeface="Arial"/>
+                <a:latin typeface="Roboto"/>
               </a:rPr>
               <a:t>10¢</a:t>
             </a:r>
@@ -4923,12 +5106,17 @@
           </a:bodyPr>
           <a:lstStyle/>
           <a:p>
+            <a:pPr>
+              <a:defRPr>
+                <a:latin typeface="Roboto"/>
+              </a:defRPr>
+            </a:pPr>
             <a:r>
               <a:rPr sz="1100" b="0">
                 <a:solidFill>
                   <a:srgbClr val="5F6F63"/>
                 </a:solidFill>
-                <a:latin typeface="Arial"/>
+                <a:latin typeface="Roboto"/>
               </a:rPr>
               <a:t>April 11¢</a:t>
             </a:r>
@@ -4976,7 +5164,11 @@
           <a:bodyPr rtlCol="0" anchor="ctr"/>
           <a:lstStyle/>
           <a:p>
-            <a:pPr algn="ctr"/>
+            <a:pPr algn="ctr">
+              <a:defRPr>
+                <a:latin typeface="Roboto"/>
+              </a:defRPr>
+            </a:pPr>
           </a:p>
         </p:txBody>
       </p:sp>
@@ -5002,12 +5194,17 @@
           </a:bodyPr>
           <a:lstStyle/>
           <a:p>
+            <a:pPr>
+              <a:defRPr>
+                <a:latin typeface="Roboto"/>
+              </a:defRPr>
+            </a:pPr>
             <a:r>
               <a:rPr sz="1200" b="0">
                 <a:solidFill>
                   <a:srgbClr val="5F6F63"/>
                 </a:solidFill>
-                <a:latin typeface="Arial"/>
+                <a:latin typeface="Roboto"/>
               </a:rPr>
               <a:t>Year to date (Jul to May 2026)</a:t>
             </a:r>
@@ -5036,12 +5233,17 @@
           </a:bodyPr>
           <a:lstStyle/>
           <a:p>
+            <a:pPr>
+              <a:defRPr>
+                <a:latin typeface="Roboto"/>
+              </a:defRPr>
+            </a:pPr>
             <a:r>
               <a:rPr sz="3000" b="1">
                 <a:solidFill>
                   <a:srgbClr val="2F7A5D"/>
                 </a:solidFill>
-                <a:latin typeface="Arial"/>
+                <a:latin typeface="Roboto"/>
               </a:rPr>
               <a:t>13¢</a:t>
             </a:r>
@@ -5070,12 +5272,17 @@
           </a:bodyPr>
           <a:lstStyle/>
           <a:p>
+            <a:pPr>
+              <a:defRPr>
+                <a:latin typeface="Roboto"/>
+              </a:defRPr>
+            </a:pPr>
             <a:r>
               <a:rPr sz="1100" b="0">
                 <a:solidFill>
                   <a:srgbClr val="5F6F63"/>
                 </a:solidFill>
-                <a:latin typeface="Arial"/>
+                <a:latin typeface="Roboto"/>
               </a:rPr>
               <a:t>same period last year: not in the data</a:t>
             </a:r>
@@ -5104,12 +5311,17 @@
           </a:bodyPr>
           <a:lstStyle/>
           <a:p>
+            <a:pPr>
+              <a:defRPr>
+                <a:latin typeface="Roboto"/>
+              </a:defRPr>
+            </a:pPr>
             <a:r>
               <a:rPr sz="900" b="0">
                 <a:solidFill>
                   <a:srgbClr val="5F6F63"/>
                 </a:solidFill>
-                <a:latin typeface="Arial"/>
+                <a:latin typeface="Roboto"/>
               </a:rPr>
               <a:t>cost-to-raise.pptx</a:t>
             </a:r>
@@ -5138,13 +5350,17 @@
           </a:bodyPr>
           <a:lstStyle/>
           <a:p>
-            <a:pPr algn="ctr"/>
+            <a:pPr algn="ctr">
+              <a:defRPr>
+                <a:latin typeface="Roboto"/>
+              </a:defRPr>
+            </a:pPr>
             <a:r>
               <a:rPr sz="900" b="0">
                 <a:solidFill>
                   <a:srgbClr val="5F6F63"/>
                 </a:solidFill>
-                <a:latin typeface="Arial"/>
+                <a:latin typeface="Roboto"/>
               </a:rPr>
               <a:t>Data retrieved 2pm, Tue 6 Oct 2026 · Sample data</a:t>
             </a:r>
@@ -5173,13 +5389,17 @@
           </a:bodyPr>
           <a:lstStyle/>
           <a:p>
-            <a:pPr algn="r"/>
+            <a:pPr algn="r">
+              <a:defRPr>
+                <a:latin typeface="Roboto"/>
+              </a:defRPr>
+            </a:pPr>
             <a:r>
               <a:rPr sz="900" b="0">
                 <a:solidFill>
                   <a:srgbClr val="5F6F63"/>
                 </a:solidFill>
-                <a:latin typeface="Arial"/>
+                <a:latin typeface="Roboto"/>
               </a:rPr>
               <a:t>Slide 2 of 11</a:t>
             </a:r>
@@ -5243,7 +5463,11 @@
           <a:bodyPr rtlCol="0" anchor="ctr"/>
           <a:lstStyle/>
           <a:p>
-            <a:pPr algn="ctr"/>
+            <a:pPr algn="ctr">
+              <a:defRPr>
+                <a:latin typeface="Roboto"/>
+              </a:defRPr>
+            </a:pPr>
           </a:p>
         </p:txBody>
       </p:sp>
@@ -5269,12 +5493,17 @@
           </a:bodyPr>
           <a:lstStyle/>
           <a:p>
+            <a:pPr>
+              <a:defRPr>
+                <a:latin typeface="Roboto"/>
+              </a:defRPr>
+            </a:pPr>
             <a:r>
               <a:rPr sz="1000" b="0">
                 <a:solidFill>
                   <a:srgbClr val="5F6F63"/>
                 </a:solidFill>
-                <a:latin typeface="Arial"/>
+                <a:latin typeface="Roboto"/>
               </a:rPr>
               <a:t>Sample Community Services Ltd · What does it cost to raise a dollar?</a:t>
             </a:r>
@@ -5303,12 +5532,17 @@
           </a:bodyPr>
           <a:lstStyle/>
           <a:p>
+            <a:pPr>
+              <a:defRPr>
+                <a:latin typeface="Roboto"/>
+              </a:defRPr>
+            </a:pPr>
             <a:r>
               <a:rPr sz="2400" b="1">
                 <a:solidFill>
                   <a:srgbClr val="25342A"/>
                 </a:solidFill>
-                <a:latin typeface="Arial"/>
+                <a:latin typeface="Roboto"/>
               </a:rPr>
               <a:t>Cost to raise a dollar, by source, May 2026 (cents) · Source: All fundraising</a:t>
             </a:r>
@@ -5355,12 +5589,17 @@
           </a:bodyPr>
           <a:lstStyle/>
           <a:p>
+            <a:pPr>
+              <a:defRPr>
+                <a:latin typeface="Roboto"/>
+              </a:defRPr>
+            </a:pPr>
             <a:r>
               <a:rPr sz="900" b="0">
                 <a:solidFill>
                   <a:srgbClr val="5F6F63"/>
                 </a:solidFill>
-                <a:latin typeface="Arial"/>
+                <a:latin typeface="Roboto"/>
               </a:rPr>
               <a:t>cost-to-raise.pptx</a:t>
             </a:r>
@@ -5389,13 +5628,17 @@
           </a:bodyPr>
           <a:lstStyle/>
           <a:p>
-            <a:pPr algn="ctr"/>
+            <a:pPr algn="ctr">
+              <a:defRPr>
+                <a:latin typeface="Roboto"/>
+              </a:defRPr>
+            </a:pPr>
             <a:r>
               <a:rPr sz="900" b="0">
                 <a:solidFill>
                   <a:srgbClr val="5F6F63"/>
                 </a:solidFill>
-                <a:latin typeface="Arial"/>
+                <a:latin typeface="Roboto"/>
               </a:rPr>
               <a:t>Data retrieved 2pm, Tue 6 Oct 2026 · Sample data</a:t>
             </a:r>
@@ -5424,13 +5667,17 @@
           </a:bodyPr>
           <a:lstStyle/>
           <a:p>
-            <a:pPr algn="r"/>
+            <a:pPr algn="r">
+              <a:defRPr>
+                <a:latin typeface="Roboto"/>
+              </a:defRPr>
+            </a:pPr>
             <a:r>
               <a:rPr sz="900" b="0">
                 <a:solidFill>
                   <a:srgbClr val="5F6F63"/>
                 </a:solidFill>
-                <a:latin typeface="Arial"/>
+                <a:latin typeface="Roboto"/>
               </a:rPr>
               <a:t>Slide 3 of 11</a:t>
             </a:r>
@@ -5494,7 +5741,11 @@
           <a:bodyPr rtlCol="0" anchor="ctr"/>
           <a:lstStyle/>
           <a:p>
-            <a:pPr algn="ctr"/>
+            <a:pPr algn="ctr">
+              <a:defRPr>
+                <a:latin typeface="Roboto"/>
+              </a:defRPr>
+            </a:pPr>
           </a:p>
         </p:txBody>
       </p:sp>
@@ -5520,12 +5771,17 @@
           </a:bodyPr>
           <a:lstStyle/>
           <a:p>
+            <a:pPr>
+              <a:defRPr>
+                <a:latin typeface="Roboto"/>
+              </a:defRPr>
+            </a:pPr>
             <a:r>
               <a:rPr sz="1000" b="0">
                 <a:solidFill>
                   <a:srgbClr val="5F6F63"/>
                 </a:solidFill>
-                <a:latin typeface="Arial"/>
+                <a:latin typeface="Roboto"/>
               </a:rPr>
               <a:t>Sample Community Services Ltd · What does it cost to raise a dollar?</a:t>
             </a:r>
@@ -5554,12 +5810,17 @@
           </a:bodyPr>
           <a:lstStyle/>
           <a:p>
+            <a:pPr>
+              <a:defRPr>
+                <a:latin typeface="Roboto"/>
+              </a:defRPr>
+            </a:pPr>
             <a:r>
               <a:rPr sz="2400" b="1">
                 <a:solidFill>
                   <a:srgbClr val="25342A"/>
                 </a:solidFill>
-                <a:latin typeface="Arial"/>
+                <a:latin typeface="Roboto"/>
               </a:rPr>
               <a:t>What it shows · Source: All fundraising</a:t>
             </a:r>
@@ -5607,7 +5868,11 @@
           <a:bodyPr rtlCol="0" anchor="ctr"/>
           <a:lstStyle/>
           <a:p>
-            <a:pPr algn="ctr"/>
+            <a:pPr algn="ctr">
+              <a:defRPr>
+                <a:latin typeface="Roboto"/>
+              </a:defRPr>
+            </a:pPr>
           </a:p>
         </p:txBody>
       </p:sp>
@@ -5633,12 +5898,17 @@
           </a:bodyPr>
           <a:lstStyle/>
           <a:p>
+            <a:pPr>
+              <a:defRPr>
+                <a:latin typeface="Roboto"/>
+              </a:defRPr>
+            </a:pPr>
             <a:r>
               <a:rPr sz="1100" b="1">
                 <a:solidFill>
                   <a:srgbClr val="5F6F63"/>
                 </a:solidFill>
-                <a:latin typeface="Arial"/>
+                <a:latin typeface="Roboto"/>
               </a:rPr>
               <a:t>WHAT IT SHOWS</a:t>
             </a:r>
@@ -5667,12 +5937,17 @@
           </a:bodyPr>
           <a:lstStyle/>
           <a:p>
+            <a:pPr>
+              <a:defRPr>
+                <a:latin typeface="Roboto"/>
+              </a:defRPr>
+            </a:pPr>
             <a:r>
               <a:rPr sz="1600" b="0">
                 <a:solidFill>
                   <a:srgbClr val="25342A"/>
                 </a:solidFill>
-                <a:latin typeface="Arial"/>
+                <a:latin typeface="Roboto"/>
               </a:rPr>
               <a:t>May cost 10¢ to raise each dollar, against 11¢ in April. This financial year to date it has cost 13¢ a dollar.</a:t>
             </a:r>
@@ -5720,7 +5995,11 @@
           <a:bodyPr rtlCol="0" anchor="ctr"/>
           <a:lstStyle/>
           <a:p>
-            <a:pPr algn="ctr"/>
+            <a:pPr algn="ctr">
+              <a:defRPr>
+                <a:latin typeface="Roboto"/>
+              </a:defRPr>
+            </a:pPr>
           </a:p>
         </p:txBody>
       </p:sp>
@@ -5746,12 +6025,17 @@
           </a:bodyPr>
           <a:lstStyle/>
           <a:p>
+            <a:pPr>
+              <a:defRPr>
+                <a:latin typeface="Roboto"/>
+              </a:defRPr>
+            </a:pPr>
             <a:r>
               <a:rPr sz="1100" b="1">
                 <a:solidFill>
                   <a:srgbClr val="5F6F63"/>
                 </a:solidFill>
-                <a:latin typeface="Arial"/>
+                <a:latin typeface="Roboto"/>
               </a:rPr>
               <a:t>WHAT YOU'D DO ABOUT IT</a:t>
             </a:r>
@@ -5780,12 +6064,17 @@
           </a:bodyPr>
           <a:lstStyle/>
           <a:p>
+            <a:pPr>
+              <a:defRPr>
+                <a:latin typeface="Roboto"/>
+              </a:defRPr>
+            </a:pPr>
             <a:r>
               <a:rPr sz="1600" b="0">
                 <a:solidFill>
                   <a:srgbClr val="25342A"/>
                 </a:solidFill>
-                <a:latin typeface="Arial"/>
+                <a:latin typeface="Roboto"/>
               </a:rPr>
               <a:t>The year-to-date figure is steadier than single months: events make some months jump. Pick a source above to see which one moves it.</a:t>
             </a:r>
@@ -5814,12 +6103,17 @@
           </a:bodyPr>
           <a:lstStyle/>
           <a:p>
+            <a:pPr>
+              <a:defRPr>
+                <a:latin typeface="Roboto"/>
+              </a:defRPr>
+            </a:pPr>
             <a:r>
               <a:rPr sz="900" b="0">
                 <a:solidFill>
                   <a:srgbClr val="5F6F63"/>
                 </a:solidFill>
-                <a:latin typeface="Arial"/>
+                <a:latin typeface="Roboto"/>
               </a:rPr>
               <a:t>cost-to-raise.pptx</a:t>
             </a:r>
@@ -5848,13 +6142,17 @@
           </a:bodyPr>
           <a:lstStyle/>
           <a:p>
-            <a:pPr algn="ctr"/>
+            <a:pPr algn="ctr">
+              <a:defRPr>
+                <a:latin typeface="Roboto"/>
+              </a:defRPr>
+            </a:pPr>
             <a:r>
               <a:rPr sz="900" b="0">
                 <a:solidFill>
                   <a:srgbClr val="5F6F63"/>
                 </a:solidFill>
-                <a:latin typeface="Arial"/>
+                <a:latin typeface="Roboto"/>
               </a:rPr>
               <a:t>Data retrieved 2pm, Tue 6 Oct 2026 · Sample data</a:t>
             </a:r>
@@ -5883,13 +6181,17 @@
           </a:bodyPr>
           <a:lstStyle/>
           <a:p>
-            <a:pPr algn="r"/>
+            <a:pPr algn="r">
+              <a:defRPr>
+                <a:latin typeface="Roboto"/>
+              </a:defRPr>
+            </a:pPr>
             <a:r>
               <a:rPr sz="900" b="0">
                 <a:solidFill>
                   <a:srgbClr val="5F6F63"/>
                 </a:solidFill>
-                <a:latin typeface="Arial"/>
+                <a:latin typeface="Roboto"/>
               </a:rPr>
               <a:t>Slide 4 of 11</a:t>
             </a:r>
@@ -5953,7 +6255,11 @@
           <a:bodyPr rtlCol="0" anchor="ctr"/>
           <a:lstStyle/>
           <a:p>
-            <a:pPr algn="ctr"/>
+            <a:pPr algn="ctr">
+              <a:defRPr>
+                <a:latin typeface="Roboto"/>
+              </a:defRPr>
+            </a:pPr>
           </a:p>
         </p:txBody>
       </p:sp>
@@ -5979,12 +6285,17 @@
           </a:bodyPr>
           <a:lstStyle/>
           <a:p>
+            <a:pPr>
+              <a:defRPr>
+                <a:latin typeface="Roboto"/>
+              </a:defRPr>
+            </a:pPr>
             <a:r>
               <a:rPr sz="1000" b="0">
                 <a:solidFill>
                   <a:srgbClr val="5F6F63"/>
                 </a:solidFill>
-                <a:latin typeface="Arial"/>
+                <a:latin typeface="Roboto"/>
               </a:rPr>
               <a:t>Sample Community Services Ltd · What does it cost to raise a dollar?</a:t>
             </a:r>
@@ -6013,12 +6324,17 @@
           </a:bodyPr>
           <a:lstStyle/>
           <a:p>
+            <a:pPr>
+              <a:defRPr>
+                <a:latin typeface="Roboto"/>
+              </a:defRPr>
+            </a:pPr>
             <a:r>
               <a:rPr sz="2400" b="1">
                 <a:solidFill>
                   <a:srgbClr val="25342A"/>
                 </a:solidFill>
-                <a:latin typeface="Arial"/>
+                <a:latin typeface="Roboto"/>
               </a:rPr>
               <a:t>Headline numbers · Source: Grants</a:t>
             </a:r>
@@ -6066,7 +6382,11 @@
           <a:bodyPr rtlCol="0" anchor="ctr"/>
           <a:lstStyle/>
           <a:p>
-            <a:pPr algn="ctr"/>
+            <a:pPr algn="ctr">
+              <a:defRPr>
+                <a:latin typeface="Roboto"/>
+              </a:defRPr>
+            </a:pPr>
           </a:p>
         </p:txBody>
       </p:sp>
@@ -6092,12 +6412,17 @@
           </a:bodyPr>
           <a:lstStyle/>
           <a:p>
+            <a:pPr>
+              <a:defRPr>
+                <a:latin typeface="Roboto"/>
+              </a:defRPr>
+            </a:pPr>
             <a:r>
               <a:rPr sz="1200" b="0">
                 <a:solidFill>
                   <a:srgbClr val="5F6F63"/>
                 </a:solidFill>
-                <a:latin typeface="Arial"/>
+                <a:latin typeface="Roboto"/>
               </a:rPr>
               <a:t>May · Grants</a:t>
             </a:r>
@@ -6126,12 +6451,17 @@
           </a:bodyPr>
           <a:lstStyle/>
           <a:p>
+            <a:pPr>
+              <a:defRPr>
+                <a:latin typeface="Roboto"/>
+              </a:defRPr>
+            </a:pPr>
             <a:r>
               <a:rPr sz="3000" b="1">
                 <a:solidFill>
                   <a:srgbClr val="2F7A5D"/>
                 </a:solidFill>
-                <a:latin typeface="Arial"/>
+                <a:latin typeface="Roboto"/>
               </a:rPr>
               <a:t>10¢</a:t>
             </a:r>
@@ -6160,12 +6490,17 @@
           </a:bodyPr>
           <a:lstStyle/>
           <a:p>
+            <a:pPr>
+              <a:defRPr>
+                <a:latin typeface="Roboto"/>
+              </a:defRPr>
+            </a:pPr>
             <a:r>
               <a:rPr sz="1100" b="0">
                 <a:solidFill>
                   <a:srgbClr val="5F6F63"/>
                 </a:solidFill>
-                <a:latin typeface="Arial"/>
+                <a:latin typeface="Roboto"/>
               </a:rPr>
               <a:t>April 11¢</a:t>
             </a:r>
@@ -6213,7 +6548,11 @@
           <a:bodyPr rtlCol="0" anchor="ctr"/>
           <a:lstStyle/>
           <a:p>
-            <a:pPr algn="ctr"/>
+            <a:pPr algn="ctr">
+              <a:defRPr>
+                <a:latin typeface="Roboto"/>
+              </a:defRPr>
+            </a:pPr>
           </a:p>
         </p:txBody>
       </p:sp>
@@ -6239,12 +6578,17 @@
           </a:bodyPr>
           <a:lstStyle/>
           <a:p>
+            <a:pPr>
+              <a:defRPr>
+                <a:latin typeface="Roboto"/>
+              </a:defRPr>
+            </a:pPr>
             <a:r>
               <a:rPr sz="1200" b="0">
                 <a:solidFill>
                   <a:srgbClr val="5F6F63"/>
                 </a:solidFill>
-                <a:latin typeface="Arial"/>
+                <a:latin typeface="Roboto"/>
               </a:rPr>
               <a:t>Year to date (Jul to May 2026)</a:t>
             </a:r>
@@ -6273,12 +6617,17 @@
           </a:bodyPr>
           <a:lstStyle/>
           <a:p>
+            <a:pPr>
+              <a:defRPr>
+                <a:latin typeface="Roboto"/>
+              </a:defRPr>
+            </a:pPr>
             <a:r>
               <a:rPr sz="3000" b="1">
                 <a:solidFill>
                   <a:srgbClr val="2F7A5D"/>
                 </a:solidFill>
-                <a:latin typeface="Arial"/>
+                <a:latin typeface="Roboto"/>
               </a:rPr>
               <a:t>11¢</a:t>
             </a:r>
@@ -6307,12 +6656,17 @@
           </a:bodyPr>
           <a:lstStyle/>
           <a:p>
+            <a:pPr>
+              <a:defRPr>
+                <a:latin typeface="Roboto"/>
+              </a:defRPr>
+            </a:pPr>
             <a:r>
               <a:rPr sz="1100" b="0">
                 <a:solidFill>
                   <a:srgbClr val="5F6F63"/>
                 </a:solidFill>
-                <a:latin typeface="Arial"/>
+                <a:latin typeface="Roboto"/>
               </a:rPr>
               <a:t>same period last year: not in the data</a:t>
             </a:r>
@@ -6341,12 +6695,17 @@
           </a:bodyPr>
           <a:lstStyle/>
           <a:p>
+            <a:pPr>
+              <a:defRPr>
+                <a:latin typeface="Roboto"/>
+              </a:defRPr>
+            </a:pPr>
             <a:r>
               <a:rPr sz="900" b="0">
                 <a:solidFill>
                   <a:srgbClr val="5F6F63"/>
                 </a:solidFill>
-                <a:latin typeface="Arial"/>
+                <a:latin typeface="Roboto"/>
               </a:rPr>
               <a:t>cost-to-raise.pptx</a:t>
             </a:r>
@@ -6375,13 +6734,17 @@
           </a:bodyPr>
           <a:lstStyle/>
           <a:p>
-            <a:pPr algn="ctr"/>
+            <a:pPr algn="ctr">
+              <a:defRPr>
+                <a:latin typeface="Roboto"/>
+              </a:defRPr>
+            </a:pPr>
             <a:r>
               <a:rPr sz="900" b="0">
                 <a:solidFill>
                   <a:srgbClr val="5F6F63"/>
                 </a:solidFill>
-                <a:latin typeface="Arial"/>
+                <a:latin typeface="Roboto"/>
               </a:rPr>
               <a:t>Data retrieved 2pm, Tue 6 Oct 2026 · Sample data</a:t>
             </a:r>
@@ -6410,13 +6773,17 @@
           </a:bodyPr>
           <a:lstStyle/>
           <a:p>
-            <a:pPr algn="r"/>
+            <a:pPr algn="r">
+              <a:defRPr>
+                <a:latin typeface="Roboto"/>
+              </a:defRPr>
+            </a:pPr>
             <a:r>
               <a:rPr sz="900" b="0">
                 <a:solidFill>
                   <a:srgbClr val="5F6F63"/>
                 </a:solidFill>
-                <a:latin typeface="Arial"/>
+                <a:latin typeface="Roboto"/>
               </a:rPr>
               <a:t>Slide 5 of 11</a:t>
             </a:r>
@@ -6480,7 +6847,11 @@
           <a:bodyPr rtlCol="0" anchor="ctr"/>
           <a:lstStyle/>
           <a:p>
-            <a:pPr algn="ctr"/>
+            <a:pPr algn="ctr">
+              <a:defRPr>
+                <a:latin typeface="Roboto"/>
+              </a:defRPr>
+            </a:pPr>
           </a:p>
         </p:txBody>
       </p:sp>
@@ -6506,12 +6877,17 @@
           </a:bodyPr>
           <a:lstStyle/>
           <a:p>
+            <a:pPr>
+              <a:defRPr>
+                <a:latin typeface="Roboto"/>
+              </a:defRPr>
+            </a:pPr>
             <a:r>
               <a:rPr sz="1000" b="0">
                 <a:solidFill>
                   <a:srgbClr val="5F6F63"/>
                 </a:solidFill>
-                <a:latin typeface="Arial"/>
+                <a:latin typeface="Roboto"/>
               </a:rPr>
               <a:t>Sample Community Services Ltd · What does it cost to raise a dollar?</a:t>
             </a:r>
@@ -6540,12 +6916,17 @@
           </a:bodyPr>
           <a:lstStyle/>
           <a:p>
+            <a:pPr>
+              <a:defRPr>
+                <a:latin typeface="Roboto"/>
+              </a:defRPr>
+            </a:pPr>
             <a:r>
               <a:rPr sz="2400" b="1">
                 <a:solidFill>
                   <a:srgbClr val="25342A"/>
                 </a:solidFill>
-                <a:latin typeface="Arial"/>
+                <a:latin typeface="Roboto"/>
               </a:rPr>
               <a:t>What it shows · Source: Grants</a:t>
             </a:r>
@@ -6593,7 +6974,11 @@
           <a:bodyPr rtlCol="0" anchor="ctr"/>
           <a:lstStyle/>
           <a:p>
-            <a:pPr algn="ctr"/>
+            <a:pPr algn="ctr">
+              <a:defRPr>
+                <a:latin typeface="Roboto"/>
+              </a:defRPr>
+            </a:pPr>
           </a:p>
         </p:txBody>
       </p:sp>
@@ -6619,12 +7004,17 @@
           </a:bodyPr>
           <a:lstStyle/>
           <a:p>
+            <a:pPr>
+              <a:defRPr>
+                <a:latin typeface="Roboto"/>
+              </a:defRPr>
+            </a:pPr>
             <a:r>
               <a:rPr sz="1100" b="1">
                 <a:solidFill>
                   <a:srgbClr val="5F6F63"/>
                 </a:solidFill>
-                <a:latin typeface="Arial"/>
+                <a:latin typeface="Roboto"/>
               </a:rPr>
               <a:t>WHAT IT SHOWS</a:t>
             </a:r>
@@ -6653,12 +7043,17 @@
           </a:bodyPr>
           <a:lstStyle/>
           <a:p>
+            <a:pPr>
+              <a:defRPr>
+                <a:latin typeface="Roboto"/>
+              </a:defRPr>
+            </a:pPr>
             <a:r>
               <a:rPr sz="1600" b="0">
                 <a:solidFill>
                   <a:srgbClr val="25342A"/>
                 </a:solidFill>
-                <a:latin typeface="Arial"/>
+                <a:latin typeface="Roboto"/>
               </a:rPr>
               <a:t>Grants cost 11¢ to raise each dollar this financial year to date ($78,100 of grant writing and reporting for $699,210).</a:t>
             </a:r>
@@ -6706,7 +7101,11 @@
           <a:bodyPr rtlCol="0" anchor="ctr"/>
           <a:lstStyle/>
           <a:p>
-            <a:pPr algn="ctr"/>
+            <a:pPr algn="ctr">
+              <a:defRPr>
+                <a:latin typeface="Roboto"/>
+              </a:defRPr>
+            </a:pPr>
           </a:p>
         </p:txBody>
       </p:sp>
@@ -6732,12 +7131,17 @@
           </a:bodyPr>
           <a:lstStyle/>
           <a:p>
+            <a:pPr>
+              <a:defRPr>
+                <a:latin typeface="Roboto"/>
+              </a:defRPr>
+            </a:pPr>
             <a:r>
               <a:rPr sz="1100" b="1">
                 <a:solidFill>
                   <a:srgbClr val="5F6F63"/>
                 </a:solidFill>
-                <a:latin typeface="Arial"/>
+                <a:latin typeface="Roboto"/>
               </a:rPr>
               <a:t>WHAT YOU'D DO ABOUT IT</a:t>
             </a:r>
@@ -6766,12 +7170,17 @@
           </a:bodyPr>
           <a:lstStyle/>
           <a:p>
+            <a:pPr>
+              <a:defRPr>
+                <a:latin typeface="Roboto"/>
+              </a:defRPr>
+            </a:pPr>
             <a:r>
               <a:rPr sz="1600" b="0">
                 <a:solidFill>
                   <a:srgbClr val="25342A"/>
                 </a:solidFill>
-                <a:latin typeface="Arial"/>
+                <a:latin typeface="Roboto"/>
               </a:rPr>
               <a:t>Usually the cheapest money to raise, as long as the time that goes into applications and acquittals is protected.</a:t>
             </a:r>
@@ -6800,12 +7209,17 @@
           </a:bodyPr>
           <a:lstStyle/>
           <a:p>
+            <a:pPr>
+              <a:defRPr>
+                <a:latin typeface="Roboto"/>
+              </a:defRPr>
+            </a:pPr>
             <a:r>
               <a:rPr sz="900" b="0">
                 <a:solidFill>
                   <a:srgbClr val="5F6F63"/>
                 </a:solidFill>
-                <a:latin typeface="Arial"/>
+                <a:latin typeface="Roboto"/>
               </a:rPr>
               <a:t>cost-to-raise.pptx</a:t>
             </a:r>
@@ -6834,13 +7248,17 @@
           </a:bodyPr>
           <a:lstStyle/>
           <a:p>
-            <a:pPr algn="ctr"/>
+            <a:pPr algn="ctr">
+              <a:defRPr>
+                <a:latin typeface="Roboto"/>
+              </a:defRPr>
+            </a:pPr>
             <a:r>
               <a:rPr sz="900" b="0">
                 <a:solidFill>
                   <a:srgbClr val="5F6F63"/>
                 </a:solidFill>
-                <a:latin typeface="Arial"/>
+                <a:latin typeface="Roboto"/>
               </a:rPr>
               <a:t>Data retrieved 2pm, Tue 6 Oct 2026 · Sample data</a:t>
             </a:r>
@@ -6869,13 +7287,17 @@
           </a:bodyPr>
           <a:lstStyle/>
           <a:p>
-            <a:pPr algn="r"/>
+            <a:pPr algn="r">
+              <a:defRPr>
+                <a:latin typeface="Roboto"/>
+              </a:defRPr>
+            </a:pPr>
             <a:r>
               <a:rPr sz="900" b="0">
                 <a:solidFill>
                   <a:srgbClr val="5F6F63"/>
                 </a:solidFill>
-                <a:latin typeface="Arial"/>
+                <a:latin typeface="Roboto"/>
               </a:rPr>
               <a:t>Slide 6 of 11</a:t>
             </a:r>
@@ -6939,7 +7361,11 @@
           <a:bodyPr rtlCol="0" anchor="ctr"/>
           <a:lstStyle/>
           <a:p>
-            <a:pPr algn="ctr"/>
+            <a:pPr algn="ctr">
+              <a:defRPr>
+                <a:latin typeface="Roboto"/>
+              </a:defRPr>
+            </a:pPr>
           </a:p>
         </p:txBody>
       </p:sp>
@@ -6965,12 +7391,17 @@
           </a:bodyPr>
           <a:lstStyle/>
           <a:p>
+            <a:pPr>
+              <a:defRPr>
+                <a:latin typeface="Roboto"/>
+              </a:defRPr>
+            </a:pPr>
             <a:r>
               <a:rPr sz="1000" b="0">
                 <a:solidFill>
                   <a:srgbClr val="5F6F63"/>
                 </a:solidFill>
-                <a:latin typeface="Arial"/>
+                <a:latin typeface="Roboto"/>
               </a:rPr>
               <a:t>Sample Community Services Ltd · What does it cost to raise a dollar?</a:t>
             </a:r>
@@ -6999,12 +7430,17 @@
           </a:bodyPr>
           <a:lstStyle/>
           <a:p>
+            <a:pPr>
+              <a:defRPr>
+                <a:latin typeface="Roboto"/>
+              </a:defRPr>
+            </a:pPr>
             <a:r>
               <a:rPr sz="2400" b="1">
                 <a:solidFill>
                   <a:srgbClr val="25342A"/>
                 </a:solidFill>
-                <a:latin typeface="Arial"/>
+                <a:latin typeface="Roboto"/>
               </a:rPr>
               <a:t>Headline numbers · Source: Donations</a:t>
             </a:r>
@@ -7052,7 +7488,11 @@
           <a:bodyPr rtlCol="0" anchor="ctr"/>
           <a:lstStyle/>
           <a:p>
-            <a:pPr algn="ctr"/>
+            <a:pPr algn="ctr">
+              <a:defRPr>
+                <a:latin typeface="Roboto"/>
+              </a:defRPr>
+            </a:pPr>
           </a:p>
         </p:txBody>
       </p:sp>
@@ -7078,12 +7518,17 @@
           </a:bodyPr>
           <a:lstStyle/>
           <a:p>
+            <a:pPr>
+              <a:defRPr>
+                <a:latin typeface="Roboto"/>
+              </a:defRPr>
+            </a:pPr>
             <a:r>
               <a:rPr sz="1200" b="0">
                 <a:solidFill>
                   <a:srgbClr val="5F6F63"/>
                 </a:solidFill>
-                <a:latin typeface="Arial"/>
+                <a:latin typeface="Roboto"/>
               </a:rPr>
               <a:t>May · Donations</a:t>
             </a:r>
@@ -7112,12 +7557,17 @@
           </a:bodyPr>
           <a:lstStyle/>
           <a:p>
+            <a:pPr>
+              <a:defRPr>
+                <a:latin typeface="Roboto"/>
+              </a:defRPr>
+            </a:pPr>
             <a:r>
               <a:rPr sz="3000" b="1">
                 <a:solidFill>
                   <a:srgbClr val="2F7A5D"/>
                 </a:solidFill>
-                <a:latin typeface="Arial"/>
+                <a:latin typeface="Roboto"/>
               </a:rPr>
               <a:t>13¢</a:t>
             </a:r>
@@ -7146,12 +7596,17 @@
           </a:bodyPr>
           <a:lstStyle/>
           <a:p>
+            <a:pPr>
+              <a:defRPr>
+                <a:latin typeface="Roboto"/>
+              </a:defRPr>
+            </a:pPr>
             <a:r>
               <a:rPr sz="1100" b="0">
                 <a:solidFill>
                   <a:srgbClr val="5F6F63"/>
                 </a:solidFill>
-                <a:latin typeface="Arial"/>
+                <a:latin typeface="Roboto"/>
               </a:rPr>
               <a:t>April 13¢</a:t>
             </a:r>
@@ -7199,7 +7654,11 @@
           <a:bodyPr rtlCol="0" anchor="ctr"/>
           <a:lstStyle/>
           <a:p>
-            <a:pPr algn="ctr"/>
+            <a:pPr algn="ctr">
+              <a:defRPr>
+                <a:latin typeface="Roboto"/>
+              </a:defRPr>
+            </a:pPr>
           </a:p>
         </p:txBody>
       </p:sp>
@@ -7225,12 +7684,17 @@
           </a:bodyPr>
           <a:lstStyle/>
           <a:p>
+            <a:pPr>
+              <a:defRPr>
+                <a:latin typeface="Roboto"/>
+              </a:defRPr>
+            </a:pPr>
             <a:r>
               <a:rPr sz="1200" b="0">
                 <a:solidFill>
                   <a:srgbClr val="5F6F63"/>
                 </a:solidFill>
-                <a:latin typeface="Arial"/>
+                <a:latin typeface="Roboto"/>
               </a:rPr>
               <a:t>Year to date (Jul to May 2026)</a:t>
             </a:r>
@@ -7259,12 +7723,17 @@
           </a:bodyPr>
           <a:lstStyle/>
           <a:p>
+            <a:pPr>
+              <a:defRPr>
+                <a:latin typeface="Roboto"/>
+              </a:defRPr>
+            </a:pPr>
             <a:r>
               <a:rPr sz="3000" b="1">
                 <a:solidFill>
                   <a:srgbClr val="2F7A5D"/>
                 </a:solidFill>
-                <a:latin typeface="Arial"/>
+                <a:latin typeface="Roboto"/>
               </a:rPr>
               <a:t>15¢</a:t>
             </a:r>
@@ -7293,12 +7762,17 @@
           </a:bodyPr>
           <a:lstStyle/>
           <a:p>
+            <a:pPr>
+              <a:defRPr>
+                <a:latin typeface="Roboto"/>
+              </a:defRPr>
+            </a:pPr>
             <a:r>
               <a:rPr sz="1100" b="0">
                 <a:solidFill>
                   <a:srgbClr val="5F6F63"/>
                 </a:solidFill>
-                <a:latin typeface="Arial"/>
+                <a:latin typeface="Roboto"/>
               </a:rPr>
               <a:t>same period last year: not in the data</a:t>
             </a:r>
@@ -7327,12 +7801,17 @@
           </a:bodyPr>
           <a:lstStyle/>
           <a:p>
+            <a:pPr>
+              <a:defRPr>
+                <a:latin typeface="Roboto"/>
+              </a:defRPr>
+            </a:pPr>
             <a:r>
               <a:rPr sz="900" b="0">
                 <a:solidFill>
                   <a:srgbClr val="5F6F63"/>
                 </a:solidFill>
-                <a:latin typeface="Arial"/>
+                <a:latin typeface="Roboto"/>
               </a:rPr>
               <a:t>cost-to-raise.pptx</a:t>
             </a:r>
@@ -7361,13 +7840,17 @@
           </a:bodyPr>
           <a:lstStyle/>
           <a:p>
-            <a:pPr algn="ctr"/>
+            <a:pPr algn="ctr">
+              <a:defRPr>
+                <a:latin typeface="Roboto"/>
+              </a:defRPr>
+            </a:pPr>
             <a:r>
               <a:rPr sz="900" b="0">
                 <a:solidFill>
                   <a:srgbClr val="5F6F63"/>
                 </a:solidFill>
-                <a:latin typeface="Arial"/>
+                <a:latin typeface="Roboto"/>
               </a:rPr>
               <a:t>Data retrieved 2pm, Tue 6 Oct 2026 · Sample data</a:t>
             </a:r>
@@ -7396,13 +7879,17 @@
           </a:bodyPr>
           <a:lstStyle/>
           <a:p>
-            <a:pPr algn="r"/>
+            <a:pPr algn="r">
+              <a:defRPr>
+                <a:latin typeface="Roboto"/>
+              </a:defRPr>
+            </a:pPr>
             <a:r>
               <a:rPr sz="900" b="0">
                 <a:solidFill>
                   <a:srgbClr val="5F6F63"/>
                 </a:solidFill>
-                <a:latin typeface="Arial"/>
+                <a:latin typeface="Roboto"/>
               </a:rPr>
               <a:t>Slide 7 of 11</a:t>
             </a:r>
@@ -7466,7 +7953,11 @@
           <a:bodyPr rtlCol="0" anchor="ctr"/>
           <a:lstStyle/>
           <a:p>
-            <a:pPr algn="ctr"/>
+            <a:pPr algn="ctr">
+              <a:defRPr>
+                <a:latin typeface="Roboto"/>
+              </a:defRPr>
+            </a:pPr>
           </a:p>
         </p:txBody>
       </p:sp>
@@ -7492,12 +7983,17 @@
           </a:bodyPr>
           <a:lstStyle/>
           <a:p>
+            <a:pPr>
+              <a:defRPr>
+                <a:latin typeface="Roboto"/>
+              </a:defRPr>
+            </a:pPr>
             <a:r>
               <a:rPr sz="1000" b="0">
                 <a:solidFill>
                   <a:srgbClr val="5F6F63"/>
                 </a:solidFill>
-                <a:latin typeface="Arial"/>
+                <a:latin typeface="Roboto"/>
               </a:rPr>
               <a:t>Sample Community Services Ltd · What does it cost to raise a dollar?</a:t>
             </a:r>
@@ -7526,12 +8022,17 @@
           </a:bodyPr>
           <a:lstStyle/>
           <a:p>
+            <a:pPr>
+              <a:defRPr>
+                <a:latin typeface="Roboto"/>
+              </a:defRPr>
+            </a:pPr>
             <a:r>
               <a:rPr sz="2400" b="1">
                 <a:solidFill>
                   <a:srgbClr val="25342A"/>
                 </a:solidFill>
-                <a:latin typeface="Arial"/>
+                <a:latin typeface="Roboto"/>
               </a:rPr>
               <a:t>What it shows · Source: Donations</a:t>
             </a:r>
@@ -7579,7 +8080,11 @@
           <a:bodyPr rtlCol="0" anchor="ctr"/>
           <a:lstStyle/>
           <a:p>
-            <a:pPr algn="ctr"/>
+            <a:pPr algn="ctr">
+              <a:defRPr>
+                <a:latin typeface="Roboto"/>
+              </a:defRPr>
+            </a:pPr>
           </a:p>
         </p:txBody>
       </p:sp>
@@ -7605,12 +8110,17 @@
           </a:bodyPr>
           <a:lstStyle/>
           <a:p>
+            <a:pPr>
+              <a:defRPr>
+                <a:latin typeface="Roboto"/>
+              </a:defRPr>
+            </a:pPr>
             <a:r>
               <a:rPr sz="1100" b="1">
                 <a:solidFill>
                   <a:srgbClr val="5F6F63"/>
                 </a:solidFill>
-                <a:latin typeface="Arial"/>
+                <a:latin typeface="Roboto"/>
               </a:rPr>
               <a:t>WHAT IT SHOWS</a:t>
             </a:r>
@@ -7639,12 +8149,17 @@
           </a:bodyPr>
           <a:lstStyle/>
           <a:p>
+            <a:pPr>
+              <a:defRPr>
+                <a:latin typeface="Roboto"/>
+              </a:defRPr>
+            </a:pPr>
             <a:r>
               <a:rPr sz="1600" b="0">
                 <a:solidFill>
                   <a:srgbClr val="25342A"/>
                 </a:solidFill>
-                <a:latin typeface="Arial"/>
+                <a:latin typeface="Roboto"/>
               </a:rPr>
               <a:t>Donations cost 15¢ to raise each dollar this financial year to date ($27,300 of donor campaigns for $185,800).</a:t>
             </a:r>
@@ -7692,7 +8207,11 @@
           <a:bodyPr rtlCol="0" anchor="ctr"/>
           <a:lstStyle/>
           <a:p>
-            <a:pPr algn="ctr"/>
+            <a:pPr algn="ctr">
+              <a:defRPr>
+                <a:latin typeface="Roboto"/>
+              </a:defRPr>
+            </a:pPr>
           </a:p>
         </p:txBody>
       </p:sp>
@@ -7718,12 +8237,17 @@
           </a:bodyPr>
           <a:lstStyle/>
           <a:p>
+            <a:pPr>
+              <a:defRPr>
+                <a:latin typeface="Roboto"/>
+              </a:defRPr>
+            </a:pPr>
             <a:r>
               <a:rPr sz="1100" b="1">
                 <a:solidFill>
                   <a:srgbClr val="5F6F63"/>
                 </a:solidFill>
-                <a:latin typeface="Arial"/>
+                <a:latin typeface="Roboto"/>
               </a:rPr>
               <a:t>WHAT YOU'D DO ABOUT IT</a:t>
             </a:r>
@@ -7752,12 +8276,17 @@
           </a:bodyPr>
           <a:lstStyle/>
           <a:p>
+            <a:pPr>
+              <a:defRPr>
+                <a:latin typeface="Roboto"/>
+              </a:defRPr>
+            </a:pPr>
             <a:r>
               <a:rPr sz="1600" b="0">
                 <a:solidFill>
                   <a:srgbClr val="25342A"/>
                 </a:solidFill>
-                <a:latin typeface="Arial"/>
+                <a:latin typeface="Roboto"/>
               </a:rPr>
               <a:t>Steady and cheap, and untied: the money that builds reserves.</a:t>
             </a:r>
@@ -7786,12 +8315,17 @@
           </a:bodyPr>
           <a:lstStyle/>
           <a:p>
+            <a:pPr>
+              <a:defRPr>
+                <a:latin typeface="Roboto"/>
+              </a:defRPr>
+            </a:pPr>
             <a:r>
               <a:rPr sz="900" b="0">
                 <a:solidFill>
                   <a:srgbClr val="5F6F63"/>
                 </a:solidFill>
-                <a:latin typeface="Arial"/>
+                <a:latin typeface="Roboto"/>
               </a:rPr>
               <a:t>cost-to-raise.pptx</a:t>
             </a:r>
@@ -7820,13 +8354,17 @@
           </a:bodyPr>
           <a:lstStyle/>
           <a:p>
-            <a:pPr algn="ctr"/>
+            <a:pPr algn="ctr">
+              <a:defRPr>
+                <a:latin typeface="Roboto"/>
+              </a:defRPr>
+            </a:pPr>
             <a:r>
               <a:rPr sz="900" b="0">
                 <a:solidFill>
                   <a:srgbClr val="5F6F63"/>
                 </a:solidFill>
-                <a:latin typeface="Arial"/>
+                <a:latin typeface="Roboto"/>
               </a:rPr>
               <a:t>Data retrieved 2pm, Tue 6 Oct 2026 · Sample data</a:t>
             </a:r>
@@ -7855,13 +8393,17 @@
           </a:bodyPr>
           <a:lstStyle/>
           <a:p>
-            <a:pPr algn="r"/>
+            <a:pPr algn="r">
+              <a:defRPr>
+                <a:latin typeface="Roboto"/>
+              </a:defRPr>
+            </a:pPr>
             <a:r>
               <a:rPr sz="900" b="0">
                 <a:solidFill>
                   <a:srgbClr val="5F6F63"/>
                 </a:solidFill>
-                <a:latin typeface="Arial"/>
+                <a:latin typeface="Roboto"/>
               </a:rPr>
               <a:t>Slide 8 of 11</a:t>
             </a:r>
@@ -7925,7 +8467,11 @@
           <a:bodyPr rtlCol="0" anchor="ctr"/>
           <a:lstStyle/>
           <a:p>
-            <a:pPr algn="ctr"/>
+            <a:pPr algn="ctr">
+              <a:defRPr>
+                <a:latin typeface="Roboto"/>
+              </a:defRPr>
+            </a:pPr>
           </a:p>
         </p:txBody>
       </p:sp>
@@ -7951,12 +8497,17 @@
           </a:bodyPr>
           <a:lstStyle/>
           <a:p>
+            <a:pPr>
+              <a:defRPr>
+                <a:latin typeface="Roboto"/>
+              </a:defRPr>
+            </a:pPr>
             <a:r>
               <a:rPr sz="1000" b="0">
                 <a:solidFill>
                   <a:srgbClr val="5F6F63"/>
                 </a:solidFill>
-                <a:latin typeface="Arial"/>
+                <a:latin typeface="Roboto"/>
               </a:rPr>
               <a:t>Sample Community Services Ltd · What does it cost to raise a dollar?</a:t>
             </a:r>
@@ -7985,12 +8536,17 @@
           </a:bodyPr>
           <a:lstStyle/>
           <a:p>
+            <a:pPr>
+              <a:defRPr>
+                <a:latin typeface="Roboto"/>
+              </a:defRPr>
+            </a:pPr>
             <a:r>
               <a:rPr sz="2400" b="1">
                 <a:solidFill>
                   <a:srgbClr val="25342A"/>
                 </a:solidFill>
-                <a:latin typeface="Arial"/>
+                <a:latin typeface="Roboto"/>
               </a:rPr>
               <a:t>Headline numbers · Source: Fundraising events</a:t>
             </a:r>
@@ -8038,7 +8594,11 @@
           <a:bodyPr rtlCol="0" anchor="ctr"/>
           <a:lstStyle/>
           <a:p>
-            <a:pPr algn="ctr"/>
+            <a:pPr algn="ctr">
+              <a:defRPr>
+                <a:latin typeface="Roboto"/>
+              </a:defRPr>
+            </a:pPr>
           </a:p>
         </p:txBody>
       </p:sp>
@@ -8064,12 +8624,17 @@
           </a:bodyPr>
           <a:lstStyle/>
           <a:p>
+            <a:pPr>
+              <a:defRPr>
+                <a:latin typeface="Roboto"/>
+              </a:defRPr>
+            </a:pPr>
             <a:r>
               <a:rPr sz="1200" b="0">
                 <a:solidFill>
                   <a:srgbClr val="5F6F63"/>
                 </a:solidFill>
-                <a:latin typeface="Arial"/>
+                <a:latin typeface="Roboto"/>
               </a:rPr>
               <a:t>May · Fundraising events</a:t>
             </a:r>
@@ -8098,12 +8663,17 @@
           </a:bodyPr>
           <a:lstStyle/>
           <a:p>
+            <a:pPr>
+              <a:defRPr>
+                <a:latin typeface="Roboto"/>
+              </a:defRPr>
+            </a:pPr>
             <a:r>
               <a:rPr sz="3000" b="1">
                 <a:solidFill>
                   <a:srgbClr val="2F7A5D"/>
                 </a:solidFill>
-                <a:latin typeface="Arial"/>
+                <a:latin typeface="Roboto"/>
               </a:rPr>
               <a:t>–</a:t>
             </a:r>
@@ -8132,12 +8702,17 @@
           </a:bodyPr>
           <a:lstStyle/>
           <a:p>
+            <a:pPr>
+              <a:defRPr>
+                <a:latin typeface="Roboto"/>
+              </a:defRPr>
+            </a:pPr>
             <a:r>
               <a:rPr sz="1100" b="0">
                 <a:solidFill>
                   <a:srgbClr val="5F6F63"/>
                 </a:solidFill>
-                <a:latin typeface="Arial"/>
+                <a:latin typeface="Roboto"/>
               </a:rPr>
               <a:t>April none raised</a:t>
             </a:r>
@@ -8185,7 +8760,11 @@
           <a:bodyPr rtlCol="0" anchor="ctr"/>
           <a:lstStyle/>
           <a:p>
-            <a:pPr algn="ctr"/>
+            <a:pPr algn="ctr">
+              <a:defRPr>
+                <a:latin typeface="Roboto"/>
+              </a:defRPr>
+            </a:pPr>
           </a:p>
         </p:txBody>
       </p:sp>
@@ -8211,12 +8790,17 @@
           </a:bodyPr>
           <a:lstStyle/>
           <a:p>
+            <a:pPr>
+              <a:defRPr>
+                <a:latin typeface="Roboto"/>
+              </a:defRPr>
+            </a:pPr>
             <a:r>
               <a:rPr sz="1200" b="0">
                 <a:solidFill>
                   <a:srgbClr val="5F6F63"/>
                 </a:solidFill>
-                <a:latin typeface="Arial"/>
+                <a:latin typeface="Roboto"/>
               </a:rPr>
               <a:t>Year to date (Jul to May 2026)</a:t>
             </a:r>
@@ -8245,12 +8829,17 @@
           </a:bodyPr>
           <a:lstStyle/>
           <a:p>
+            <a:pPr>
+              <a:defRPr>
+                <a:latin typeface="Roboto"/>
+              </a:defRPr>
+            </a:pPr>
             <a:r>
               <a:rPr sz="3000" b="1">
                 <a:solidFill>
                   <a:srgbClr val="2F7A5D"/>
                 </a:solidFill>
-                <a:latin typeface="Arial"/>
+                <a:latin typeface="Roboto"/>
               </a:rPr>
               <a:t>41¢</a:t>
             </a:r>
@@ -8279,12 +8868,17 @@
           </a:bodyPr>
           <a:lstStyle/>
           <a:p>
+            <a:pPr>
+              <a:defRPr>
+                <a:latin typeface="Roboto"/>
+              </a:defRPr>
+            </a:pPr>
             <a:r>
               <a:rPr sz="1100" b="0">
                 <a:solidFill>
                   <a:srgbClr val="5F6F63"/>
                 </a:solidFill>
-                <a:latin typeface="Arial"/>
+                <a:latin typeface="Roboto"/>
               </a:rPr>
               <a:t>same period last year: not in the data</a:t>
             </a:r>
@@ -8313,12 +8907,17 @@
           </a:bodyPr>
           <a:lstStyle/>
           <a:p>
+            <a:pPr>
+              <a:defRPr>
+                <a:latin typeface="Roboto"/>
+              </a:defRPr>
+            </a:pPr>
             <a:r>
               <a:rPr sz="900" b="0">
                 <a:solidFill>
                   <a:srgbClr val="5F6F63"/>
                 </a:solidFill>
-                <a:latin typeface="Arial"/>
+                <a:latin typeface="Roboto"/>
               </a:rPr>
               <a:t>cost-to-raise.pptx</a:t>
             </a:r>
@@ -8347,13 +8946,17 @@
           </a:bodyPr>
           <a:lstStyle/>
           <a:p>
-            <a:pPr algn="ctr"/>
+            <a:pPr algn="ctr">
+              <a:defRPr>
+                <a:latin typeface="Roboto"/>
+              </a:defRPr>
+            </a:pPr>
             <a:r>
               <a:rPr sz="900" b="0">
                 <a:solidFill>
                   <a:srgbClr val="5F6F63"/>
                 </a:solidFill>
-                <a:latin typeface="Arial"/>
+                <a:latin typeface="Roboto"/>
               </a:rPr>
               <a:t>Data retrieved 2pm, Tue 6 Oct 2026 · Sample data</a:t>
             </a:r>
@@ -8382,13 +8985,17 @@
           </a:bodyPr>
           <a:lstStyle/>
           <a:p>
-            <a:pPr algn="r"/>
+            <a:pPr algn="r">
+              <a:defRPr>
+                <a:latin typeface="Roboto"/>
+              </a:defRPr>
+            </a:pPr>
             <a:r>
               <a:rPr sz="900" b="0">
                 <a:solidFill>
                   <a:srgbClr val="5F6F63"/>
                 </a:solidFill>
-                <a:latin typeface="Arial"/>
+                <a:latin typeface="Roboto"/>
               </a:rPr>
               <a:t>Slide 9 of 11</a:t>
             </a:r>

--- a/media/exports/reports/2026-05/cost-to-raise.pptx
+++ b/media/exports/reports/2026-05/cost-to-raise.pptx
@@ -6,16 +6,10 @@
   </p:sldMasterIdLst>
   <p:sldIdLst>
     <p:sldId id="256" r:id="rId7"/>
-    <p:sldId id="257" r:id="rId8"/>
-    <p:sldId id="258" r:id="rId9"/>
-    <p:sldId id="259" r:id="rId10"/>
-    <p:sldId id="260" r:id="rId11"/>
-    <p:sldId id="261" r:id="rId12"/>
-    <p:sldId id="262" r:id="rId13"/>
-    <p:sldId id="263" r:id="rId14"/>
-    <p:sldId id="264" r:id="rId15"/>
-    <p:sldId id="265" r:id="rId16"/>
-    <p:sldId id="266" r:id="rId17"/>
+    <p:sldId id="257" r:id="rId9"/>
+    <p:sldId id="258" r:id="rId10"/>
+    <p:sldId id="259" r:id="rId11"/>
+    <p:sldId id="260" r:id="rId12"/>
   </p:sldIdLst>
   <p:sldSz cx="12191695" cy="6858000" type="screen4x3"/>
   <p:notesSz cx="6858000" cy="9144000"/>
@@ -121,8 +115,19 @@
 <c:chartSpace xmlns:c="http://schemas.openxmlformats.org/drawingml/2006/chart" xmlns:a="http://schemas.openxmlformats.org/drawingml/2006/main" xmlns:r="http://schemas.openxmlformats.org/officeDocument/2006/relationships">
   <c:date1904 val="0"/>
   <c:chart>
-    <c:autoTitleDeleted val="0"/>
+    <c:autoTitleDeleted val="1"/>
     <c:plotArea>
+      <c:layout>
+        <c:manualLayout>
+          <c:layoutTarget val="inner"/>
+          <c:xMode val="edge"/>
+          <c:yMode val="edge"/>
+          <c:x val="0.3"/>
+          <c:y val="0.03"/>
+          <c:w val="0.58"/>
+          <c:h val="0.88"/>
+        </c:manualLayout>
+      </c:layout>
       <c:barChart>
         <c:barDir val="bar"/>
         <c:grouping val="clustered"/>
@@ -135,7 +140,7 @@
               <c:strCache>
                 <c:ptCount val="1"/>
                 <c:pt idx="0">
-                  <c:v>Value</c:v>
+                  <c:v>Cost to raise a dollar</c:v>
                 </c:pt>
               </c:strCache>
             </c:strRef>
@@ -193,7 +198,7 @@
             <a:lstStyle/>
             <a:p>
               <a:pPr>
-                <a:defRPr sz="1100"/>
+                <a:defRPr sz="1000"/>
               </a:pPr>
             </a:p>
           </c:txPr>
@@ -230,7 +235,7 @@
           <a:lstStyle/>
           <a:p>
             <a:pPr>
-              <a:defRPr sz="1200"/>
+              <a:defRPr sz="1100"/>
             </a:pPr>
           </a:p>
         </c:txPr>
@@ -243,7 +248,10 @@
       </c:catAx>
       <c:valAx>
         <c:axId val="-2113994440"/>
-        <c:scaling/>
+        <c:scaling>
+          <c:max val="14.95"/>
+          <c:min val="0.0"/>
+        </c:scaling>
         <c:delete/>
         <c:axPos val="b"/>
         <c:majorTickMark val="out"/>
@@ -278,9 +286,19 @@
   <c:date1904 val="0"/>
   <c:roundedCorners val="0"/>
   <c:chart>
-    <c:autoTitleDeleted val="0"/>
+    <c:autoTitleDeleted val="1"/>
     <c:plotArea>
-      <c:layout/>
+      <c:layout>
+        <c:manualLayout>
+          <c:layoutTarget val="inner"/>
+          <c:xMode val="edge"/>
+          <c:yMode val="edge"/>
+          <c:x val="0.11"/>
+          <c:y val="0.05"/>
+          <c:w val="0.86"/>
+          <c:h val="0.8"/>
+        </c:manualLayout>
+      </c:layout>
       <c:areaChart>
         <c:grouping val="standard"/>
         <c:varyColors val="0"/>
@@ -293,7 +311,7 @@
               <c:strCache>
                 <c:ptCount val="1"/>
                 <c:pt idx="0">
-                  <c:v>Value</c:v>
+                  <c:v>Cents per $1</c:v>
                 </c:pt>
               </c:strCache>
             </c:strRef>
@@ -385,16 +403,16 @@
                 <c:formatCode>0"¢";[Red](0"¢")</c:formatCode>
                 <c:ptCount val="20"/>
                 <c:pt idx="0">
-                  <c:v>21</c:v>
+                  <c:v>24</c:v>
                 </c:pt>
                 <c:pt idx="1">
-                  <c:v>19</c:v>
+                  <c:v>20</c:v>
                 </c:pt>
                 <c:pt idx="2">
                   <c:v>22</c:v>
                 </c:pt>
                 <c:pt idx="3">
-                  <c:v>12</c:v>
+                  <c:v>10</c:v>
                 </c:pt>
                 <c:pt idx="4">
                   <c:v>11</c:v>
@@ -409,28 +427,28 @@
                   <c:v>11</c:v>
                 </c:pt>
                 <c:pt idx="8">
-                  <c:v>13</c:v>
+                  <c:v>12</c:v>
                 </c:pt>
                 <c:pt idx="9">
-                  <c:v>13</c:v>
+                  <c:v>12</c:v>
                 </c:pt>
                 <c:pt idx="10">
                   <c:v>12</c:v>
                 </c:pt>
                 <c:pt idx="11">
-                  <c:v>21</c:v>
+                  <c:v>11</c:v>
                 </c:pt>
                 <c:pt idx="12">
-                  <c:v>11</c:v>
+                  <c:v>10</c:v>
                 </c:pt>
                 <c:pt idx="13">
-                  <c:v>11</c:v>
+                  <c:v>10</c:v>
                 </c:pt>
                 <c:pt idx="14">
-                  <c:v>14</c:v>
+                  <c:v>10</c:v>
                 </c:pt>
                 <c:pt idx="15">
-                  <c:v>13</c:v>
+                  <c:v>12</c:v>
                 </c:pt>
                 <c:pt idx="16">
                   <c:v>13</c:v>
@@ -484,12 +502,15 @@
         <c:auto val="1"/>
         <c:lblAlgn val="ctr"/>
         <c:lblOffset val="100"/>
+        <c:tickLblSkip val="3"/>
         <c:noMultiLvlLbl val="0"/>
       </c:catAx>
       <c:valAx>
         <c:axId val="-2100718248"/>
         <c:scaling>
           <c:orientation val="minMax"/>
+          <c:max val="25.0"/>
+          <c:min val="0.0"/>
         </c:scaling>
         <c:delete val="0"/>
         <c:axPos val="l"/>
@@ -523,6 +544,7 @@
         <c:crossAx val="-2101159928"/>
         <c:crosses val="autoZero"/>
         <c:crossBetween val="midCat"/>
+        <c:majorUnit val="5.0"/>
       </c:valAx>
     </c:plotArea>
     <c:plotVisOnly val="1"/>
@@ -545,6 +567,1180 @@
     <c:autoUpdate val="0"/>
   </c:externalData>
 </c:chartSpace>
+</file>
+
+<file path=ppt/charts/chart3.xml><?xml version="1.0" encoding="utf-8"?>
+<c:chartSpace xmlns:c="http://schemas.openxmlformats.org/drawingml/2006/chart" xmlns:a="http://schemas.openxmlformats.org/drawingml/2006/main" xmlns:r="http://schemas.openxmlformats.org/officeDocument/2006/relationships">
+  <c:date1904 val="0"/>
+  <c:roundedCorners val="0"/>
+  <c:chart>
+    <c:autoTitleDeleted val="1"/>
+    <c:plotArea>
+      <c:layout>
+        <c:manualLayout>
+          <c:layoutTarget val="inner"/>
+          <c:xMode val="edge"/>
+          <c:yMode val="edge"/>
+          <c:x val="0.11"/>
+          <c:y val="0.05"/>
+          <c:w val="0.86"/>
+          <c:h val="0.8"/>
+        </c:manualLayout>
+      </c:layout>
+      <c:areaChart>
+        <c:grouping val="standard"/>
+        <c:varyColors val="0"/>
+        <c:ser>
+          <c:idx val="0"/>
+          <c:order val="0"/>
+          <c:tx>
+            <c:strRef>
+              <c:f>Sheet1!$B$1</c:f>
+              <c:strCache>
+                <c:ptCount val="1"/>
+                <c:pt idx="0">
+                  <c:v>Cents per $1</c:v>
+                </c:pt>
+              </c:strCache>
+            </c:strRef>
+          </c:tx>
+          <c:spPr>
+            <a:solidFill>
+              <a:srgbClr val="0E9F6E">
+                <a:alpha val="25000"/>
+              </a:srgbClr>
+            </a:solidFill>
+            <a:ln w="31750">
+              <a:solidFill>
+                <a:srgbClr val="0E9F6E"/>
+              </a:solidFill>
+            </a:ln>
+          </c:spPr>
+          <c:cat>
+            <c:strRef>
+              <c:f>Sheet1!$A$2:$A$21</c:f>
+              <c:strCache>
+                <c:ptCount val="20"/>
+                <c:pt idx="0">
+                  <c:v>Oct 24</c:v>
+                </c:pt>
+                <c:pt idx="1">
+                  <c:v>Nov 24</c:v>
+                </c:pt>
+                <c:pt idx="2">
+                  <c:v>Dec 24</c:v>
+                </c:pt>
+                <c:pt idx="3">
+                  <c:v>Jan 25</c:v>
+                </c:pt>
+                <c:pt idx="4">
+                  <c:v>Feb 25</c:v>
+                </c:pt>
+                <c:pt idx="5">
+                  <c:v>Mar 25</c:v>
+                </c:pt>
+                <c:pt idx="6">
+                  <c:v>Apr 25</c:v>
+                </c:pt>
+                <c:pt idx="7">
+                  <c:v>May 25</c:v>
+                </c:pt>
+                <c:pt idx="8">
+                  <c:v>Jun 25</c:v>
+                </c:pt>
+                <c:pt idx="9">
+                  <c:v>Jul 25</c:v>
+                </c:pt>
+                <c:pt idx="10">
+                  <c:v>Aug 25</c:v>
+                </c:pt>
+                <c:pt idx="11">
+                  <c:v>Sep 25</c:v>
+                </c:pt>
+                <c:pt idx="12">
+                  <c:v>Oct 25</c:v>
+                </c:pt>
+                <c:pt idx="13">
+                  <c:v>Nov 25</c:v>
+                </c:pt>
+                <c:pt idx="14">
+                  <c:v>Dec 25</c:v>
+                </c:pt>
+                <c:pt idx="15">
+                  <c:v>Jan 26</c:v>
+                </c:pt>
+                <c:pt idx="16">
+                  <c:v>Feb 26</c:v>
+                </c:pt>
+                <c:pt idx="17">
+                  <c:v>Mar 26</c:v>
+                </c:pt>
+                <c:pt idx="18">
+                  <c:v>Apr 26</c:v>
+                </c:pt>
+                <c:pt idx="19">
+                  <c:v>May 26</c:v>
+                </c:pt>
+              </c:strCache>
+            </c:strRef>
+          </c:cat>
+          <c:val>
+            <c:numRef>
+              <c:f>Sheet1!$B$2:$B$21</c:f>
+              <c:numCache>
+                <c:formatCode>0"¢";[Red](0"¢")</c:formatCode>
+                <c:ptCount val="20"/>
+                <c:pt idx="0">
+                  <c:v>14</c:v>
+                </c:pt>
+                <c:pt idx="1">
+                  <c:v>18</c:v>
+                </c:pt>
+                <c:pt idx="2">
+                  <c:v>18</c:v>
+                </c:pt>
+                <c:pt idx="3">
+                  <c:v>18</c:v>
+                </c:pt>
+                <c:pt idx="4">
+                  <c:v>14</c:v>
+                </c:pt>
+                <c:pt idx="5">
+                  <c:v>14</c:v>
+                </c:pt>
+                <c:pt idx="6">
+                  <c:v>14</c:v>
+                </c:pt>
+                <c:pt idx="7">
+                  <c:v>14</c:v>
+                </c:pt>
+                <c:pt idx="8">
+                  <c:v>14</c:v>
+                </c:pt>
+                <c:pt idx="9">
+                  <c:v>16</c:v>
+                </c:pt>
+                <c:pt idx="10">
+                  <c:v>14</c:v>
+                </c:pt>
+                <c:pt idx="11">
+                  <c:v>14</c:v>
+                </c:pt>
+                <c:pt idx="12">
+                  <c:v>14</c:v>
+                </c:pt>
+                <c:pt idx="13">
+                  <c:v>17</c:v>
+                </c:pt>
+                <c:pt idx="14">
+                  <c:v>17</c:v>
+                </c:pt>
+                <c:pt idx="15">
+                  <c:v>17</c:v>
+                </c:pt>
+                <c:pt idx="16">
+                  <c:v>13</c:v>
+                </c:pt>
+                <c:pt idx="17">
+                  <c:v>13</c:v>
+                </c:pt>
+                <c:pt idx="18">
+                  <c:v>13</c:v>
+                </c:pt>
+                <c:pt idx="19">
+                  <c:v>13</c:v>
+                </c:pt>
+              </c:numCache>
+            </c:numRef>
+          </c:val>
+        </c:ser>
+        <c:dLbls>
+          <c:showLegendKey val="0"/>
+          <c:showVal val="0"/>
+          <c:showCatName val="0"/>
+          <c:showSerName val="0"/>
+          <c:showPercent val="0"/>
+          <c:showBubbleSize val="0"/>
+        </c:dLbls>
+        <c:axId val="-2101159928"/>
+        <c:axId val="-2100718248"/>
+      </c:areaChart>
+      <c:catAx>
+        <c:axId val="-2101159928"/>
+        <c:scaling>
+          <c:orientation val="minMax"/>
+        </c:scaling>
+        <c:delete val="0"/>
+        <c:axPos val="b"/>
+        <c:numFmt formatCode="General" sourceLinked="1"/>
+        <c:majorTickMark val="out"/>
+        <c:minorTickMark val="none"/>
+        <c:tickLblPos val="nextTo"/>
+        <c:txPr>
+          <a:bodyPr/>
+          <a:lstStyle/>
+          <a:p>
+            <a:pPr>
+              <a:defRPr sz="1000"/>
+            </a:pPr>
+          </a:p>
+        </c:txPr>
+        <c:crossAx val="-2100718248"/>
+        <c:crosses val="autoZero"/>
+        <c:auto val="1"/>
+        <c:lblAlgn val="ctr"/>
+        <c:lblOffset val="100"/>
+        <c:tickLblSkip val="3"/>
+        <c:noMultiLvlLbl val="0"/>
+      </c:catAx>
+      <c:valAx>
+        <c:axId val="-2100718248"/>
+        <c:scaling>
+          <c:orientation val="minMax"/>
+          <c:max val="20.0"/>
+          <c:min val="0.0"/>
+        </c:scaling>
+        <c:delete val="0"/>
+        <c:axPos val="l"/>
+        <c:majorGridlines>
+          <c:spPr>
+            <a:ln>
+              <a:solidFill>
+                <a:srgbClr val="E6EAE7"/>
+              </a:solidFill>
+            </a:ln>
+          </c:spPr>
+        </c:majorGridlines>
+        <c:numFmt formatCode="0&quot;¢&quot;;[Red](0&quot;¢&quot;)" sourceLinked="0"/>
+        <c:majorTickMark val="out"/>
+        <c:minorTickMark val="none"/>
+        <c:tickLblPos val="nextTo"/>
+        <c:spPr>
+          <a:ln>
+            <a:noFill/>
+          </a:ln>
+        </c:spPr>
+        <c:txPr>
+          <a:bodyPr/>
+          <a:lstStyle/>
+          <a:p>
+            <a:pPr>
+              <a:defRPr sz="1000"/>
+            </a:pPr>
+          </a:p>
+        </c:txPr>
+        <c:crossAx val="-2101159928"/>
+        <c:crosses val="autoZero"/>
+        <c:crossBetween val="midCat"/>
+        <c:majorUnit val="5.0"/>
+      </c:valAx>
+    </c:plotArea>
+    <c:plotVisOnly val="1"/>
+    <c:dispBlanksAs val="zero"/>
+    <c:showDLblsOverMax val="0"/>
+  </c:chart>
+  <c:txPr>
+    <a:bodyPr/>
+    <a:lstStyle/>
+    <a:p>
+      <a:pPr>
+        <a:defRPr sz="1800">
+          <a:latin typeface="Roboto"/>
+        </a:defRPr>
+      </a:pPr>
+      <a:endParaRPr/>
+    </a:p>
+  </c:txPr>
+  <c:externalData r:id="rId1">
+    <c:autoUpdate val="0"/>
+  </c:externalData>
+</c:chartSpace>
+</file>
+
+<file path=ppt/charts/chart4.xml><?xml version="1.0" encoding="utf-8"?>
+<c:chartSpace xmlns:c="http://schemas.openxmlformats.org/drawingml/2006/chart" xmlns:a="http://schemas.openxmlformats.org/drawingml/2006/main" xmlns:r="http://schemas.openxmlformats.org/officeDocument/2006/relationships">
+  <c:date1904 val="0"/>
+  <c:roundedCorners val="0"/>
+  <c:chart>
+    <c:autoTitleDeleted val="1"/>
+    <c:plotArea>
+      <c:layout>
+        <c:manualLayout>
+          <c:layoutTarget val="inner"/>
+          <c:xMode val="edge"/>
+          <c:yMode val="edge"/>
+          <c:x val="0.11"/>
+          <c:y val="0.05"/>
+          <c:w val="0.86"/>
+          <c:h val="0.8"/>
+        </c:manualLayout>
+      </c:layout>
+      <c:areaChart>
+        <c:grouping val="standard"/>
+        <c:varyColors val="0"/>
+        <c:ser>
+          <c:idx val="0"/>
+          <c:order val="0"/>
+          <c:tx>
+            <c:strRef>
+              <c:f>Sheet1!$B$1</c:f>
+              <c:strCache>
+                <c:ptCount val="1"/>
+                <c:pt idx="0">
+                  <c:v>Cents per $1</c:v>
+                </c:pt>
+              </c:strCache>
+            </c:strRef>
+          </c:tx>
+          <c:spPr>
+            <a:solidFill>
+              <a:srgbClr val="0E9F6E">
+                <a:alpha val="25000"/>
+              </a:srgbClr>
+            </a:solidFill>
+            <a:ln w="31750">
+              <a:solidFill>
+                <a:srgbClr val="0E9F6E"/>
+              </a:solidFill>
+            </a:ln>
+          </c:spPr>
+          <c:cat>
+            <c:strRef>
+              <c:f>Sheet1!$A$2:$A$4</c:f>
+              <c:strCache>
+                <c:ptCount val="3"/>
+                <c:pt idx="0">
+                  <c:v>Dec 24</c:v>
+                </c:pt>
+                <c:pt idx="1">
+                  <c:v>Sep 25</c:v>
+                </c:pt>
+                <c:pt idx="2">
+                  <c:v>Dec 25</c:v>
+                </c:pt>
+              </c:strCache>
+            </c:strRef>
+          </c:cat>
+          <c:val>
+            <c:numRef>
+              <c:f>Sheet1!$B$2:$B$4</c:f>
+              <c:numCache>
+                <c:formatCode>0"¢";[Red](0"¢")</c:formatCode>
+                <c:ptCount val="3"/>
+                <c:pt idx="0">
+                  <c:v>42</c:v>
+                </c:pt>
+                <c:pt idx="1">
+                  <c:v>41</c:v>
+                </c:pt>
+                <c:pt idx="2">
+                  <c:v>42</c:v>
+                </c:pt>
+              </c:numCache>
+            </c:numRef>
+          </c:val>
+        </c:ser>
+        <c:dLbls>
+          <c:showLegendKey val="0"/>
+          <c:showVal val="0"/>
+          <c:showCatName val="0"/>
+          <c:showSerName val="0"/>
+          <c:showPercent val="0"/>
+          <c:showBubbleSize val="0"/>
+        </c:dLbls>
+        <c:axId val="-2101159928"/>
+        <c:axId val="-2100718248"/>
+      </c:areaChart>
+      <c:catAx>
+        <c:axId val="-2101159928"/>
+        <c:scaling>
+          <c:orientation val="minMax"/>
+        </c:scaling>
+        <c:delete val="0"/>
+        <c:axPos val="b"/>
+        <c:numFmt formatCode="General" sourceLinked="1"/>
+        <c:majorTickMark val="out"/>
+        <c:minorTickMark val="none"/>
+        <c:tickLblPos val="nextTo"/>
+        <c:txPr>
+          <a:bodyPr/>
+          <a:lstStyle/>
+          <a:p>
+            <a:pPr>
+              <a:defRPr sz="1000"/>
+            </a:pPr>
+          </a:p>
+        </c:txPr>
+        <c:crossAx val="-2100718248"/>
+        <c:crosses val="autoZero"/>
+        <c:auto val="1"/>
+        <c:lblAlgn val="ctr"/>
+        <c:lblOffset val="100"/>
+        <c:tickLblSkip val="1"/>
+        <c:noMultiLvlLbl val="0"/>
+      </c:catAx>
+      <c:valAx>
+        <c:axId val="-2100718248"/>
+        <c:scaling>
+          <c:orientation val="minMax"/>
+          <c:max val="50.0"/>
+          <c:min val="0.0"/>
+        </c:scaling>
+        <c:delete val="0"/>
+        <c:axPos val="l"/>
+        <c:majorGridlines>
+          <c:spPr>
+            <a:ln>
+              <a:solidFill>
+                <a:srgbClr val="E6EAE7"/>
+              </a:solidFill>
+            </a:ln>
+          </c:spPr>
+        </c:majorGridlines>
+        <c:numFmt formatCode="0&quot;¢&quot;;[Red](0&quot;¢&quot;)" sourceLinked="0"/>
+        <c:majorTickMark val="out"/>
+        <c:minorTickMark val="none"/>
+        <c:tickLblPos val="nextTo"/>
+        <c:spPr>
+          <a:ln>
+            <a:noFill/>
+          </a:ln>
+        </c:spPr>
+        <c:txPr>
+          <a:bodyPr/>
+          <a:lstStyle/>
+          <a:p>
+            <a:pPr>
+              <a:defRPr sz="1000"/>
+            </a:pPr>
+          </a:p>
+        </c:txPr>
+        <c:crossAx val="-2101159928"/>
+        <c:crosses val="autoZero"/>
+        <c:crossBetween val="midCat"/>
+        <c:majorUnit val="10.0"/>
+      </c:valAx>
+    </c:plotArea>
+    <c:plotVisOnly val="1"/>
+    <c:dispBlanksAs val="zero"/>
+    <c:showDLblsOverMax val="0"/>
+  </c:chart>
+  <c:txPr>
+    <a:bodyPr/>
+    <a:lstStyle/>
+    <a:p>
+      <a:pPr>
+        <a:defRPr sz="1800">
+          <a:latin typeface="Roboto"/>
+        </a:defRPr>
+      </a:pPr>
+      <a:endParaRPr/>
+    </a:p>
+  </c:txPr>
+  <c:externalData r:id="rId1">
+    <c:autoUpdate val="0"/>
+  </c:externalData>
+</c:chartSpace>
+</file>
+
+<file path=ppt/notesMasters/notesMaster1.xml><?xml version="1.0" encoding="utf-8"?>
+<p:notesMaster xmlns:a="http://schemas.openxmlformats.org/drawingml/2006/main" xmlns:p="http://schemas.openxmlformats.org/presentationml/2006/main" xmlns:r="http://schemas.openxmlformats.org/officeDocument/2006/relationships">
+  <p:cSld>
+    <p:bg>
+      <p:bgRef idx="1001">
+        <a:schemeClr val="bg1"/>
+      </p:bgRef>
+    </p:bg>
+    <p:spTree>
+      <p:nvGrpSpPr>
+        <p:cNvPr id="1" name=""/>
+        <p:cNvGrpSpPr/>
+        <p:nvPr/>
+      </p:nvGrpSpPr>
+      <p:grpSpPr>
+        <a:xfrm>
+          <a:off x="0" y="0"/>
+          <a:ext cx="0" cy="0"/>
+          <a:chOff x="0" y="0"/>
+          <a:chExt cx="0" cy="0"/>
+        </a:xfrm>
+      </p:grpSpPr>
+      <p:sp>
+        <p:nvSpPr>
+          <p:cNvPr id="2" name="Header Placeholder 1"/>
+          <p:cNvSpPr>
+            <a:spLocks noGrp="1"/>
+          </p:cNvSpPr>
+          <p:nvPr>
+            <p:ph type="hdr" sz="quarter"/>
+          </p:nvPr>
+        </p:nvSpPr>
+        <p:spPr>
+          <a:xfrm>
+            <a:off x="0" y="0"/>
+            <a:ext cx="2971800" cy="457200"/>
+          </a:xfrm>
+          <a:prstGeom prst="rect">
+            <a:avLst/>
+          </a:prstGeom>
+        </p:spPr>
+        <p:txBody>
+          <a:bodyPr vert="horz" lIns="91440" tIns="45720" rIns="91440" bIns="45720" rtlCol="0"/>
+          <a:lstStyle>
+            <a:lvl1pPr algn="l">
+              <a:defRPr sz="1200"/>
+            </a:lvl1pPr>
+          </a:lstStyle>
+          <a:p>
+            <a:endParaRPr lang="en-US"/>
+          </a:p>
+        </p:txBody>
+      </p:sp>
+      <p:sp>
+        <p:nvSpPr>
+          <p:cNvPr id="3" name="Date Placeholder 2"/>
+          <p:cNvSpPr>
+            <a:spLocks noGrp="1"/>
+          </p:cNvSpPr>
+          <p:nvPr>
+            <p:ph type="dt" idx="1"/>
+          </p:nvPr>
+        </p:nvSpPr>
+        <p:spPr>
+          <a:xfrm>
+            <a:off x="3884613" y="0"/>
+            <a:ext cx="2971800" cy="457200"/>
+          </a:xfrm>
+          <a:prstGeom prst="rect">
+            <a:avLst/>
+          </a:prstGeom>
+        </p:spPr>
+        <p:txBody>
+          <a:bodyPr vert="horz" lIns="91440" tIns="45720" rIns="91440" bIns="45720" rtlCol="0"/>
+          <a:lstStyle>
+            <a:lvl1pPr algn="r">
+              <a:defRPr sz="1200"/>
+            </a:lvl1pPr>
+          </a:lstStyle>
+          <a:p>
+            <a:fld id="{0F89C1C7-3DCD-1040-A9CF-14679D8B5DDD}" type="datetimeFigureOut">
+              <a:rPr lang="en-US" smtClean="0"/>
+              <a:t>10/17/16</a:t>
+            </a:fld>
+            <a:endParaRPr lang="en-US"/>
+          </a:p>
+        </p:txBody>
+      </p:sp>
+      <p:sp>
+        <p:nvSpPr>
+          <p:cNvPr id="4" name="Slide Image Placeholder 3"/>
+          <p:cNvSpPr>
+            <a:spLocks noGrp="1" noRot="1" noChangeAspect="1"/>
+          </p:cNvSpPr>
+          <p:nvPr>
+            <p:ph type="sldImg" idx="2"/>
+          </p:nvPr>
+        </p:nvSpPr>
+        <p:spPr>
+          <a:xfrm>
+            <a:off x="1143000" y="685800"/>
+            <a:ext cx="4572000" cy="3429000"/>
+          </a:xfrm>
+          <a:prstGeom prst="rect">
+            <a:avLst/>
+          </a:prstGeom>
+          <a:noFill/>
+          <a:ln w="12700">
+            <a:solidFill>
+              <a:prstClr val="black"/>
+            </a:solidFill>
+          </a:ln>
+        </p:spPr>
+        <p:txBody>
+          <a:bodyPr vert="horz" lIns="91440" tIns="45720" rIns="91440" bIns="45720" rtlCol="0" anchor="ctr"/>
+          <a:lstStyle/>
+          <a:p>
+            <a:endParaRPr lang="en-US"/>
+          </a:p>
+        </p:txBody>
+      </p:sp>
+      <p:sp>
+        <p:nvSpPr>
+          <p:cNvPr id="5" name="Notes Placeholder 4"/>
+          <p:cNvSpPr>
+            <a:spLocks noGrp="1"/>
+          </p:cNvSpPr>
+          <p:nvPr>
+            <p:ph type="body" sz="quarter" idx="3"/>
+          </p:nvPr>
+        </p:nvSpPr>
+        <p:spPr>
+          <a:xfrm>
+            <a:off x="685800" y="4343400"/>
+            <a:ext cx="5486400" cy="4114800"/>
+          </a:xfrm>
+          <a:prstGeom prst="rect">
+            <a:avLst/>
+          </a:prstGeom>
+        </p:spPr>
+        <p:txBody>
+          <a:bodyPr vert="horz" lIns="91440" tIns="45720" rIns="91440" bIns="45720" rtlCol="0"/>
+          <a:lstStyle/>
+          <a:p>
+            <a:pPr lvl="0"/>
+            <a:r>
+              <a:rPr lang="en-US" smtClean="0"/>
+              <a:t>Click to edit Master text styles</a:t>
+            </a:r>
+          </a:p>
+          <a:p>
+            <a:pPr lvl="1"/>
+            <a:r>
+              <a:rPr lang="en-US" smtClean="0"/>
+              <a:t>Second level</a:t>
+            </a:r>
+          </a:p>
+          <a:p>
+            <a:pPr lvl="2"/>
+            <a:r>
+              <a:rPr lang="en-US" smtClean="0"/>
+              <a:t>Third level</a:t>
+            </a:r>
+          </a:p>
+          <a:p>
+            <a:pPr lvl="3"/>
+            <a:r>
+              <a:rPr lang="en-US" smtClean="0"/>
+              <a:t>Fourth level</a:t>
+            </a:r>
+          </a:p>
+          <a:p>
+            <a:pPr lvl="4"/>
+            <a:r>
+              <a:rPr lang="en-US" smtClean="0"/>
+              <a:t>Fifth level</a:t>
+            </a:r>
+            <a:endParaRPr lang="en-US"/>
+          </a:p>
+        </p:txBody>
+      </p:sp>
+      <p:sp>
+        <p:nvSpPr>
+          <p:cNvPr id="6" name="Footer Placeholder 5"/>
+          <p:cNvSpPr>
+            <a:spLocks noGrp="1"/>
+          </p:cNvSpPr>
+          <p:nvPr>
+            <p:ph type="ftr" sz="quarter" idx="4"/>
+          </p:nvPr>
+        </p:nvSpPr>
+        <p:spPr>
+          <a:xfrm>
+            <a:off x="0" y="8685213"/>
+            <a:ext cx="2971800" cy="457200"/>
+          </a:xfrm>
+          <a:prstGeom prst="rect">
+            <a:avLst/>
+          </a:prstGeom>
+        </p:spPr>
+        <p:txBody>
+          <a:bodyPr vert="horz" lIns="91440" tIns="45720" rIns="91440" bIns="45720" rtlCol="0" anchor="b"/>
+          <a:lstStyle>
+            <a:lvl1pPr algn="l">
+              <a:defRPr sz="1200"/>
+            </a:lvl1pPr>
+          </a:lstStyle>
+          <a:p>
+            <a:endParaRPr lang="en-US"/>
+          </a:p>
+        </p:txBody>
+      </p:sp>
+      <p:sp>
+        <p:nvSpPr>
+          <p:cNvPr id="7" name="Slide Number Placeholder 6"/>
+          <p:cNvSpPr>
+            <a:spLocks noGrp="1"/>
+          </p:cNvSpPr>
+          <p:nvPr>
+            <p:ph type="sldNum" sz="quarter" idx="5"/>
+          </p:nvPr>
+        </p:nvSpPr>
+        <p:spPr>
+          <a:xfrm>
+            <a:off x="3884613" y="8685213"/>
+            <a:ext cx="2971800" cy="457200"/>
+          </a:xfrm>
+          <a:prstGeom prst="rect">
+            <a:avLst/>
+          </a:prstGeom>
+        </p:spPr>
+        <p:txBody>
+          <a:bodyPr vert="horz" lIns="91440" tIns="45720" rIns="91440" bIns="45720" rtlCol="0" anchor="b"/>
+          <a:lstStyle>
+            <a:lvl1pPr algn="r">
+              <a:defRPr sz="1200"/>
+            </a:lvl1pPr>
+          </a:lstStyle>
+          <a:p>
+            <a:fld id="{BB5E49A5-4136-284D-997B-48E1D791AD67}" type="slidenum">
+              <a:rPr lang="en-US" smtClean="0"/>
+              <a:t>‹#›</a:t>
+            </a:fld>
+            <a:endParaRPr lang="en-US"/>
+          </a:p>
+        </p:txBody>
+      </p:sp>
+    </p:spTree>
+    <p:extLst>
+      <p:ext uri="{BB962C8B-B14F-4D97-AF65-F5344CB8AC3E}">
+        <p14:creationId xmlns:p14="http://schemas.microsoft.com/office/powerpoint/2010/main" val="2623252185"/>
+      </p:ext>
+    </p:extLst>
+  </p:cSld>
+  <p:clrMap bg1="lt1" tx1="dk1" bg2="lt2" tx2="dk2" accent1="accent1" accent2="accent2" accent3="accent3" accent4="accent4" accent5="accent5" accent6="accent6" hlink="hlink" folHlink="folHlink"/>
+  <p:notesStyle>
+    <a:lvl1pPr marL="0" algn="l" defTabSz="457200" rtl="0" eaLnBrk="1" latinLnBrk="0" hangingPunct="1">
+      <a:defRPr sz="1200" kern="1200">
+        <a:solidFill>
+          <a:schemeClr val="tx1"/>
+        </a:solidFill>
+        <a:latin typeface="+mn-lt"/>
+        <a:ea typeface="+mn-ea"/>
+        <a:cs typeface="+mn-cs"/>
+      </a:defRPr>
+    </a:lvl1pPr>
+    <a:lvl2pPr marL="457200" algn="l" defTabSz="457200" rtl="0" eaLnBrk="1" latinLnBrk="0" hangingPunct="1">
+      <a:defRPr sz="1200" kern="1200">
+        <a:solidFill>
+          <a:schemeClr val="tx1"/>
+        </a:solidFill>
+        <a:latin typeface="+mn-lt"/>
+        <a:ea typeface="+mn-ea"/>
+        <a:cs typeface="+mn-cs"/>
+      </a:defRPr>
+    </a:lvl2pPr>
+    <a:lvl3pPr marL="914400" algn="l" defTabSz="457200" rtl="0" eaLnBrk="1" latinLnBrk="0" hangingPunct="1">
+      <a:defRPr sz="1200" kern="1200">
+        <a:solidFill>
+          <a:schemeClr val="tx1"/>
+        </a:solidFill>
+        <a:latin typeface="+mn-lt"/>
+        <a:ea typeface="+mn-ea"/>
+        <a:cs typeface="+mn-cs"/>
+      </a:defRPr>
+    </a:lvl3pPr>
+    <a:lvl4pPr marL="1371600" algn="l" defTabSz="457200" rtl="0" eaLnBrk="1" latinLnBrk="0" hangingPunct="1">
+      <a:defRPr sz="1200" kern="1200">
+        <a:solidFill>
+          <a:schemeClr val="tx1"/>
+        </a:solidFill>
+        <a:latin typeface="+mn-lt"/>
+        <a:ea typeface="+mn-ea"/>
+        <a:cs typeface="+mn-cs"/>
+      </a:defRPr>
+    </a:lvl4pPr>
+    <a:lvl5pPr marL="1828800" algn="l" defTabSz="457200" rtl="0" eaLnBrk="1" latinLnBrk="0" hangingPunct="1">
+      <a:defRPr sz="1200" kern="1200">
+        <a:solidFill>
+          <a:schemeClr val="tx1"/>
+        </a:solidFill>
+        <a:latin typeface="+mn-lt"/>
+        <a:ea typeface="+mn-ea"/>
+        <a:cs typeface="+mn-cs"/>
+      </a:defRPr>
+    </a:lvl5pPr>
+    <a:lvl6pPr marL="2286000" algn="l" defTabSz="457200" rtl="0" eaLnBrk="1" latinLnBrk="0" hangingPunct="1">
+      <a:defRPr sz="1200" kern="1200">
+        <a:solidFill>
+          <a:schemeClr val="tx1"/>
+        </a:solidFill>
+        <a:latin typeface="+mn-lt"/>
+        <a:ea typeface="+mn-ea"/>
+        <a:cs typeface="+mn-cs"/>
+      </a:defRPr>
+    </a:lvl6pPr>
+    <a:lvl7pPr marL="2743200" algn="l" defTabSz="457200" rtl="0" eaLnBrk="1" latinLnBrk="0" hangingPunct="1">
+      <a:defRPr sz="1200" kern="1200">
+        <a:solidFill>
+          <a:schemeClr val="tx1"/>
+        </a:solidFill>
+        <a:latin typeface="+mn-lt"/>
+        <a:ea typeface="+mn-ea"/>
+        <a:cs typeface="+mn-cs"/>
+      </a:defRPr>
+    </a:lvl7pPr>
+    <a:lvl8pPr marL="3200400" algn="l" defTabSz="457200" rtl="0" eaLnBrk="1" latinLnBrk="0" hangingPunct="1">
+      <a:defRPr sz="1200" kern="1200">
+        <a:solidFill>
+          <a:schemeClr val="tx1"/>
+        </a:solidFill>
+        <a:latin typeface="+mn-lt"/>
+        <a:ea typeface="+mn-ea"/>
+        <a:cs typeface="+mn-cs"/>
+      </a:defRPr>
+    </a:lvl8pPr>
+    <a:lvl9pPr marL="3657600" algn="l" defTabSz="457200" rtl="0" eaLnBrk="1" latinLnBrk="0" hangingPunct="1">
+      <a:defRPr sz="1200" kern="1200">
+        <a:solidFill>
+          <a:schemeClr val="tx1"/>
+        </a:solidFill>
+        <a:latin typeface="+mn-lt"/>
+        <a:ea typeface="+mn-ea"/>
+        <a:cs typeface="+mn-cs"/>
+      </a:defRPr>
+    </a:lvl9pPr>
+  </p:notesStyle>
+</p:notesMaster>
+</file>
+
+<file path=ppt/notesSlides/notesSlide1.xml><?xml version="1.0" encoding="utf-8"?>
+<p:notes xmlns:a="http://schemas.openxmlformats.org/drawingml/2006/main" xmlns:p="http://schemas.openxmlformats.org/presentationml/2006/main" xmlns:r="http://schemas.openxmlformats.org/officeDocument/2006/relationships">
+  <p:cSld>
+    <p:spTree>
+      <p:nvGrpSpPr>
+        <p:cNvPr id="1" name=""/>
+        <p:cNvGrpSpPr/>
+        <p:nvPr/>
+      </p:nvGrpSpPr>
+      <p:grpSpPr>
+        <a:xfrm>
+          <a:off x="0" y="0"/>
+          <a:ext cx="0" cy="0"/>
+          <a:chOff x="0" y="0"/>
+          <a:chExt cx="0" cy="0"/>
+        </a:xfrm>
+      </p:grpSpPr>
+      <p:sp>
+        <p:nvSpPr>
+          <p:cNvPr id="2" name="Slide Image Placeholder 1"/>
+          <p:cNvSpPr>
+            <a:spLocks noGrp="1"/>
+          </p:cNvSpPr>
+          <p:nvPr>
+            <p:ph type="sldImg" idx="2"/>
+          </p:nvPr>
+        </p:nvSpPr>
+        <p:spPr/>
+      </p:sp>
+      <p:sp>
+        <p:nvSpPr>
+          <p:cNvPr id="3" name="Notes Placeholder 2"/>
+          <p:cNvSpPr>
+            <a:spLocks noGrp="1"/>
+          </p:cNvSpPr>
+          <p:nvPr>
+            <p:ph type="body" idx="3" sz="quarter"/>
+          </p:nvPr>
+        </p:nvSpPr>
+        <p:spPr/>
+        <p:txBody>
+          <a:bodyPr/>
+          <a:lstStyle/>
+          <a:p>
+            <a:r>
+              <a:t>What does it cost to raise a dollar?. Sample Community Services Ltd. Period: May 2026. What fundraising costs (grant writing, donor campaigns, events) for every dollar it brings in. Pick a source and every number, chart and note follows it.</a:t>
+            </a:r>
+          </a:p>
+        </p:txBody>
+      </p:sp>
+      <p:sp>
+        <p:nvSpPr>
+          <p:cNvPr id="4" name="Slide Number Placeholder 3"/>
+          <p:cNvSpPr>
+            <a:spLocks noGrp="1"/>
+          </p:cNvSpPr>
+          <p:nvPr>
+            <p:ph type="sldNum" idx="5" sz="quarter"/>
+          </p:nvPr>
+        </p:nvSpPr>
+        <p:spPr/>
+      </p:sp>
+    </p:spTree>
+  </p:cSld>
+  <p:clrMapOvr>
+    <a:masterClrMapping/>
+  </p:clrMapOvr>
+</p:notes>
+</file>
+
+<file path=ppt/notesSlides/notesSlide2.xml><?xml version="1.0" encoding="utf-8"?>
+<p:notes xmlns:a="http://schemas.openxmlformats.org/drawingml/2006/main" xmlns:p="http://schemas.openxmlformats.org/presentationml/2006/main" xmlns:r="http://schemas.openxmlformats.org/officeDocument/2006/relationships">
+  <p:cSld>
+    <p:spTree>
+      <p:nvGrpSpPr>
+        <p:cNvPr id="1" name=""/>
+        <p:cNvGrpSpPr/>
+        <p:nvPr/>
+      </p:nvGrpSpPr>
+      <p:grpSpPr>
+        <a:xfrm>
+          <a:off x="0" y="0"/>
+          <a:ext cx="0" cy="0"/>
+          <a:chOff x="0" y="0"/>
+          <a:chExt cx="0" cy="0"/>
+        </a:xfrm>
+      </p:grpSpPr>
+      <p:sp>
+        <p:nvSpPr>
+          <p:cNvPr id="2" name="Slide Image Placeholder 1"/>
+          <p:cNvSpPr>
+            <a:spLocks noGrp="1"/>
+          </p:cNvSpPr>
+          <p:nvPr>
+            <p:ph type="sldImg" idx="2"/>
+          </p:nvPr>
+        </p:nvSpPr>
+        <p:spPr/>
+      </p:sp>
+      <p:sp>
+        <p:nvSpPr>
+          <p:cNvPr id="3" name="Notes Placeholder 2"/>
+          <p:cNvSpPr>
+            <a:spLocks noGrp="1"/>
+          </p:cNvSpPr>
+          <p:nvPr>
+            <p:ph type="body" idx="3" sz="quarter"/>
+          </p:nvPr>
+        </p:nvSpPr>
+        <p:spPr/>
+        <p:txBody>
+          <a:bodyPr/>
+          <a:lstStyle/>
+          <a:p>
+            <a:r>
+              <a:t>All fundraising. May · all fundraising: 10¢; Year to date (Jul to May 2026): 13¢. May cost 10¢ to raise each dollar, against 11¢ in April. This financial year to date it has cost 13¢ a dollar. The year-to-date figure is steadier than single months: events make some months jump. Pick a source above to see which one moves it.</a:t>
+            </a:r>
+          </a:p>
+        </p:txBody>
+      </p:sp>
+      <p:sp>
+        <p:nvSpPr>
+          <p:cNvPr id="4" name="Slide Number Placeholder 3"/>
+          <p:cNvSpPr>
+            <a:spLocks noGrp="1"/>
+          </p:cNvSpPr>
+          <p:nvPr>
+            <p:ph type="sldNum" idx="5" sz="quarter"/>
+          </p:nvPr>
+        </p:nvSpPr>
+        <p:spPr/>
+      </p:sp>
+    </p:spTree>
+  </p:cSld>
+  <p:clrMapOvr>
+    <a:masterClrMapping/>
+  </p:clrMapOvr>
+</p:notes>
+</file>
+
+<file path=ppt/notesSlides/notesSlide3.xml><?xml version="1.0" encoding="utf-8"?>
+<p:notes xmlns:a="http://schemas.openxmlformats.org/drawingml/2006/main" xmlns:p="http://schemas.openxmlformats.org/presentationml/2006/main" xmlns:r="http://schemas.openxmlformats.org/officeDocument/2006/relationships">
+  <p:cSld>
+    <p:spTree>
+      <p:nvGrpSpPr>
+        <p:cNvPr id="1" name=""/>
+        <p:cNvGrpSpPr/>
+        <p:nvPr/>
+      </p:nvGrpSpPr>
+      <p:grpSpPr>
+        <a:xfrm>
+          <a:off x="0" y="0"/>
+          <a:ext cx="0" cy="0"/>
+          <a:chOff x="0" y="0"/>
+          <a:chExt cx="0" cy="0"/>
+        </a:xfrm>
+      </p:grpSpPr>
+      <p:sp>
+        <p:nvSpPr>
+          <p:cNvPr id="2" name="Slide Image Placeholder 1"/>
+          <p:cNvSpPr>
+            <a:spLocks noGrp="1"/>
+          </p:cNvSpPr>
+          <p:nvPr>
+            <p:ph type="sldImg" idx="2"/>
+          </p:nvPr>
+        </p:nvSpPr>
+        <p:spPr/>
+      </p:sp>
+      <p:sp>
+        <p:nvSpPr>
+          <p:cNvPr id="3" name="Notes Placeholder 2"/>
+          <p:cNvSpPr>
+            <a:spLocks noGrp="1"/>
+          </p:cNvSpPr>
+          <p:nvPr>
+            <p:ph type="body" idx="3" sz="quarter"/>
+          </p:nvPr>
+        </p:nvSpPr>
+        <p:spPr/>
+        <p:txBody>
+          <a:bodyPr/>
+          <a:lstStyle/>
+          <a:p>
+            <a:r>
+              <a:t>Grants. May · Grants: 10¢; Year to date (Jul to May 2026): 11¢. Grants cost 11¢ to raise each dollar this financial year to date ($78,100 of grant writing and reporting for $699,210). Usually the cheapest money to raise, as long as the time that goes into applications and acquittals is protected.</a:t>
+            </a:r>
+          </a:p>
+        </p:txBody>
+      </p:sp>
+      <p:sp>
+        <p:nvSpPr>
+          <p:cNvPr id="4" name="Slide Number Placeholder 3"/>
+          <p:cNvSpPr>
+            <a:spLocks noGrp="1"/>
+          </p:cNvSpPr>
+          <p:nvPr>
+            <p:ph type="sldNum" idx="5" sz="quarter"/>
+          </p:nvPr>
+        </p:nvSpPr>
+        <p:spPr/>
+      </p:sp>
+    </p:spTree>
+  </p:cSld>
+  <p:clrMapOvr>
+    <a:masterClrMapping/>
+  </p:clrMapOvr>
+</p:notes>
+</file>
+
+<file path=ppt/notesSlides/notesSlide4.xml><?xml version="1.0" encoding="utf-8"?>
+<p:notes xmlns:a="http://schemas.openxmlformats.org/drawingml/2006/main" xmlns:p="http://schemas.openxmlformats.org/presentationml/2006/main" xmlns:r="http://schemas.openxmlformats.org/officeDocument/2006/relationships">
+  <p:cSld>
+    <p:spTree>
+      <p:nvGrpSpPr>
+        <p:cNvPr id="1" name=""/>
+        <p:cNvGrpSpPr/>
+        <p:nvPr/>
+      </p:nvGrpSpPr>
+      <p:grpSpPr>
+        <a:xfrm>
+          <a:off x="0" y="0"/>
+          <a:ext cx="0" cy="0"/>
+          <a:chOff x="0" y="0"/>
+          <a:chExt cx="0" cy="0"/>
+        </a:xfrm>
+      </p:grpSpPr>
+      <p:sp>
+        <p:nvSpPr>
+          <p:cNvPr id="2" name="Slide Image Placeholder 1"/>
+          <p:cNvSpPr>
+            <a:spLocks noGrp="1"/>
+          </p:cNvSpPr>
+          <p:nvPr>
+            <p:ph type="sldImg" idx="2"/>
+          </p:nvPr>
+        </p:nvSpPr>
+        <p:spPr/>
+      </p:sp>
+      <p:sp>
+        <p:nvSpPr>
+          <p:cNvPr id="3" name="Notes Placeholder 2"/>
+          <p:cNvSpPr>
+            <a:spLocks noGrp="1"/>
+          </p:cNvSpPr>
+          <p:nvPr>
+            <p:ph type="body" idx="3" sz="quarter"/>
+          </p:nvPr>
+        </p:nvSpPr>
+        <p:spPr/>
+        <p:txBody>
+          <a:bodyPr/>
+          <a:lstStyle/>
+          <a:p>
+            <a:r>
+              <a:t>Donations. May · Donations: 13¢; Year to date (Jul to May 2026): 15¢. Donations cost 15¢ to raise each dollar this financial year to date ($27,300 of donor campaigns for $185,800). Steady and cheap, and untied: the money that builds reserves.</a:t>
+            </a:r>
+          </a:p>
+        </p:txBody>
+      </p:sp>
+      <p:sp>
+        <p:nvSpPr>
+          <p:cNvPr id="4" name="Slide Number Placeholder 3"/>
+          <p:cNvSpPr>
+            <a:spLocks noGrp="1"/>
+          </p:cNvSpPr>
+          <p:nvPr>
+            <p:ph type="sldNum" idx="5" sz="quarter"/>
+          </p:nvPr>
+        </p:nvSpPr>
+        <p:spPr/>
+      </p:sp>
+    </p:spTree>
+  </p:cSld>
+  <p:clrMapOvr>
+    <a:masterClrMapping/>
+  </p:clrMapOvr>
+</p:notes>
+</file>
+
+<file path=ppt/notesSlides/notesSlide5.xml><?xml version="1.0" encoding="utf-8"?>
+<p:notes xmlns:a="http://schemas.openxmlformats.org/drawingml/2006/main" xmlns:p="http://schemas.openxmlformats.org/presentationml/2006/main" xmlns:r="http://schemas.openxmlformats.org/officeDocument/2006/relationships">
+  <p:cSld>
+    <p:spTree>
+      <p:nvGrpSpPr>
+        <p:cNvPr id="1" name=""/>
+        <p:cNvGrpSpPr/>
+        <p:nvPr/>
+      </p:nvGrpSpPr>
+      <p:grpSpPr>
+        <a:xfrm>
+          <a:off x="0" y="0"/>
+          <a:ext cx="0" cy="0"/>
+          <a:chOff x="0" y="0"/>
+          <a:chExt cx="0" cy="0"/>
+        </a:xfrm>
+      </p:grpSpPr>
+      <p:sp>
+        <p:nvSpPr>
+          <p:cNvPr id="2" name="Slide Image Placeholder 1"/>
+          <p:cNvSpPr>
+            <a:spLocks noGrp="1"/>
+          </p:cNvSpPr>
+          <p:nvPr>
+            <p:ph type="sldImg" idx="2"/>
+          </p:nvPr>
+        </p:nvSpPr>
+        <p:spPr/>
+      </p:sp>
+      <p:sp>
+        <p:nvSpPr>
+          <p:cNvPr id="3" name="Notes Placeholder 2"/>
+          <p:cNvSpPr>
+            <a:spLocks noGrp="1"/>
+          </p:cNvSpPr>
+          <p:nvPr>
+            <p:ph type="body" idx="3" sz="quarter"/>
+          </p:nvPr>
+        </p:nvSpPr>
+        <p:spPr/>
+        <p:txBody>
+          <a:bodyPr/>
+          <a:lstStyle/>
+          <a:p>
+            <a:r>
+              <a:t>Fundraising events. May · Fundraising events: –; Year to date (Jul to May 2026): 41¢. Fundraising events cost 41¢ to raise each dollar this financial year to date ($17,800 of event costs for $43,000). Usually the dearest money to raise: events are worth counting for what else they bring too (new donors, profile).</a:t>
+            </a:r>
+          </a:p>
+        </p:txBody>
+      </p:sp>
+      <p:sp>
+        <p:nvSpPr>
+          <p:cNvPr id="4" name="Slide Number Placeholder 3"/>
+          <p:cNvSpPr>
+            <a:spLocks noGrp="1"/>
+          </p:cNvSpPr>
+          <p:nvPr>
+            <p:ph type="sldNum" idx="5" sz="quarter"/>
+          </p:nvPr>
+        </p:nvSpPr>
+        <p:spPr/>
+      </p:sp>
+    </p:spTree>
+  </p:cSld>
+  <p:clrMapOvr>
+    <a:masterClrMapping/>
+  </p:clrMapOvr>
+</p:notes>
 </file>
 
 <file path=ppt/slideLayouts/slideLayout1.xml><?xml version="1.0" encoding="utf-8"?>
@@ -3530,7 +4726,44 @@
       <p:grpSpPr/>
       <p:sp>
         <p:nvSpPr>
-          <p:cNvPr id="2" name="Rectangle 1"/>
+          <p:cNvPr id="2" name="Title 1"/>
+          <p:cNvSpPr>
+            <a:spLocks noGrp="1"/>
+          </p:cNvSpPr>
+          <p:nvPr>
+            <p:ph type="ctrTitle"/>
+          </p:nvPr>
+        </p:nvSpPr>
+        <p:spPr>
+          <a:xfrm>
+            <a:off x="457200" y="1965960"/>
+            <a:ext cx="11277295" cy="1097280"/>
+          </a:xfrm>
+        </p:spPr>
+        <p:txBody>
+          <a:bodyPr wrap="square"/>
+          <a:lstStyle/>
+          <a:p>
+            <a:pPr algn="l">
+              <a:defRPr>
+                <a:latin typeface="Roboto"/>
+              </a:defRPr>
+            </a:pPr>
+            <a:r>
+              <a:rPr sz="3400" b="1">
+                <a:solidFill>
+                  <a:srgbClr val="25342A"/>
+                </a:solidFill>
+                <a:latin typeface="Roboto"/>
+              </a:rPr>
+              <a:t>What does it cost to raise a dollar?</a:t>
+            </a:r>
+          </a:p>
+        </p:txBody>
+      </p:sp>
+      <p:sp>
+        <p:nvSpPr>
+          <p:cNvPr id="3" name="Rectangle 2"/>
           <p:cNvSpPr/>
           <p:nvPr/>
         </p:nvSpPr>
@@ -3586,53 +4819,14 @@
       </p:sp>
       <p:sp>
         <p:nvSpPr>
-          <p:cNvPr id="3" name="TextBox 2"/>
-          <p:cNvSpPr txBox="1"/>
-          <p:nvPr/>
-        </p:nvSpPr>
-        <p:spPr>
-          <a:xfrm>
-            <a:off x="1234440" y="658368"/>
-            <a:ext cx="5486400" cy="457200"/>
-          </a:xfrm>
-          <a:prstGeom prst="rect">
-            <a:avLst/>
-          </a:prstGeom>
-          <a:noFill/>
-        </p:spPr>
-        <p:txBody>
-          <a:bodyPr wrap="square">
-            <a:spAutoFit/>
-          </a:bodyPr>
-          <a:lstStyle/>
-          <a:p>
-            <a:pPr>
-              <a:defRPr>
-                <a:latin typeface="Roboto"/>
-              </a:defRPr>
-            </a:pPr>
-            <a:r>
-              <a:rPr sz="1800" b="1">
-                <a:solidFill>
-                  <a:srgbClr val="25342A"/>
-                </a:solidFill>
-                <a:latin typeface="Roboto"/>
-              </a:rPr>
-              <a:t>The Fourth Sheet</a:t>
-            </a:r>
-          </a:p>
-        </p:txBody>
-      </p:sp>
-      <p:sp>
-        <p:nvSpPr>
           <p:cNvPr id="4" name="TextBox 3"/>
           <p:cNvSpPr txBox="1"/>
           <p:nvPr/>
         </p:nvSpPr>
         <p:spPr>
           <a:xfrm>
-            <a:off x="457200" y="1554480"/>
-            <a:ext cx="10972800" cy="365760"/>
+            <a:off x="1234440" y="658368"/>
+            <a:ext cx="5486400" cy="457200"/>
           </a:xfrm>
           <a:prstGeom prst="rect">
             <a:avLst/>
@@ -3640,7 +4834,7 @@
           <a:noFill/>
         </p:spPr>
         <p:txBody>
-          <a:bodyPr wrap="square">
+          <a:bodyPr wrap="square" lIns="45720" rIns="45720">
             <a:spAutoFit/>
           </a:bodyPr>
           <a:lstStyle/>
@@ -3651,13 +4845,13 @@
               </a:defRPr>
             </a:pPr>
             <a:r>
-              <a:rPr sz="1100" b="1">
-                <a:solidFill>
-                  <a:srgbClr val="8A7A52"/>
+              <a:rPr sz="1800" b="1">
+                <a:solidFill>
+                  <a:srgbClr val="25342A"/>
                 </a:solidFill>
                 <a:latin typeface="Roboto"/>
               </a:rPr>
-              <a:t>SAMPLE DATA · invented figures for demonstration</a:t>
+              <a:t>The Fourth Sheet</a:t>
             </a:r>
           </a:p>
         </p:txBody>
@@ -3670,8 +4864,8 @@
         </p:nvSpPr>
         <p:spPr>
           <a:xfrm>
-            <a:off x="457200" y="2011680"/>
-            <a:ext cx="11247120" cy="1097280"/>
+            <a:off x="457200" y="1554480"/>
+            <a:ext cx="10972800" cy="365760"/>
           </a:xfrm>
           <a:prstGeom prst="rect">
             <a:avLst/>
@@ -3679,7 +4873,7 @@
           <a:noFill/>
         </p:spPr>
         <p:txBody>
-          <a:bodyPr wrap="square">
+          <a:bodyPr wrap="square" lIns="45720" rIns="45720">
             <a:spAutoFit/>
           </a:bodyPr>
           <a:lstStyle/>
@@ -3690,13 +4884,13 @@
               </a:defRPr>
             </a:pPr>
             <a:r>
-              <a:rPr sz="3400" b="1">
-                <a:solidFill>
-                  <a:srgbClr val="25342A"/>
+              <a:rPr sz="1100" b="1">
+                <a:solidFill>
+                  <a:srgbClr val="8A7A52"/>
                 </a:solidFill>
                 <a:latin typeface="Roboto"/>
               </a:rPr>
-              <a:t>What does it cost to raise a dollar?</a:t>
+              <a:t>SAMPLE DATA · invented figures for demonstration</a:t>
             </a:r>
           </a:p>
         </p:txBody>
@@ -3710,7 +4904,7 @@
         <p:spPr>
           <a:xfrm>
             <a:off x="457200" y="3154680"/>
-            <a:ext cx="11247120" cy="457200"/>
+            <a:ext cx="11277295" cy="457200"/>
           </a:xfrm>
           <a:prstGeom prst="rect">
             <a:avLst/>
@@ -3718,7 +4912,7 @@
           <a:noFill/>
         </p:spPr>
         <p:txBody>
-          <a:bodyPr wrap="square">
+          <a:bodyPr wrap="square" lIns="45720" rIns="45720">
             <a:spAutoFit/>
           </a:bodyPr>
           <a:lstStyle/>
@@ -3749,7 +4943,7 @@
         <p:spPr>
           <a:xfrm>
             <a:off x="457200" y="3703320"/>
-            <a:ext cx="11247120" cy="1097280"/>
+            <a:ext cx="11277295" cy="535940"/>
           </a:xfrm>
           <a:prstGeom prst="rect">
             <a:avLst/>
@@ -3757,7 +4951,7 @@
           <a:noFill/>
         </p:spPr>
         <p:txBody>
-          <a:bodyPr wrap="square">
+          <a:bodyPr wrap="square" lIns="45720" rIns="45720">
             <a:spAutoFit/>
           </a:bodyPr>
           <a:lstStyle/>
@@ -3787,8 +4981,8 @@
         </p:nvSpPr>
         <p:spPr>
           <a:xfrm>
-            <a:off x="457200" y="4937760"/>
-            <a:ext cx="11247120" cy="1097280"/>
+            <a:off x="457200" y="4330700"/>
+            <a:ext cx="11277295" cy="1097280"/>
           </a:xfrm>
           <a:prstGeom prst="rect">
             <a:avLst/>
@@ -3796,7 +4990,7 @@
           <a:noFill/>
         </p:spPr>
         <p:txBody>
-          <a:bodyPr wrap="square">
+          <a:bodyPr wrap="square" lIns="45720" rIns="45720">
             <a:spAutoFit/>
           </a:bodyPr>
           <a:lstStyle/>
@@ -3875,7 +5069,7 @@
         <p:spPr>
           <a:xfrm>
             <a:off x="457200" y="6492240"/>
-            <a:ext cx="3657600" cy="274320"/>
+            <a:ext cx="2926080" cy="274320"/>
           </a:xfrm>
           <a:prstGeom prst="rect">
             <a:avLst/>
@@ -3883,7 +5077,7 @@
           <a:noFill/>
         </p:spPr>
         <p:txBody>
-          <a:bodyPr wrap="square">
+          <a:bodyPr wrap="square" lIns="45720" rIns="45720">
             <a:spAutoFit/>
           </a:bodyPr>
           <a:lstStyle/>
@@ -3913,8 +5107,8 @@
         </p:nvSpPr>
         <p:spPr>
           <a:xfrm>
-            <a:off x="4297680" y="6492240"/>
-            <a:ext cx="3657600" cy="274320"/>
+            <a:off x="3108960" y="6492240"/>
+            <a:ext cx="5943600" cy="274320"/>
           </a:xfrm>
           <a:prstGeom prst="rect">
             <a:avLst/>
@@ -3922,7 +5116,7 @@
           <a:noFill/>
         </p:spPr>
         <p:txBody>
-          <a:bodyPr wrap="square">
+          <a:bodyPr wrap="square" lIns="45720" rIns="45720">
             <a:spAutoFit/>
           </a:bodyPr>
           <a:lstStyle/>
@@ -3939,7 +5133,7 @@
                 </a:solidFill>
                 <a:latin typeface="Roboto"/>
               </a:rPr>
-              <a:t>Data retrieved 2pm, Tue 6 Oct 2026 · Sample data</a:t>
+              <a:t>Data retrieved 2pm, Tue 6 Oct 2026 · Generated 8 Oct 2026, 9:35am · Sample data · Made with Python (python-pptx)</a:t>
             </a:r>
           </a:p>
         </p:txBody>
@@ -3961,7 +5155,7 @@
           <a:noFill/>
         </p:spPr>
         <p:txBody>
-          <a:bodyPr wrap="square">
+          <a:bodyPr wrap="square" lIns="45720" rIns="45720">
             <a:spAutoFit/>
           </a:bodyPr>
           <a:lstStyle/>
@@ -3978,838 +5172,7 @@
                 </a:solidFill>
                 <a:latin typeface="Roboto"/>
               </a:rPr>
-              <a:t>Slide 1 of 11</a:t>
-            </a:r>
-          </a:p>
-        </p:txBody>
-      </p:sp>
-    </p:spTree>
-  </p:cSld>
-  <p:clrMapOvr>
-    <a:masterClrMapping/>
-  </p:clrMapOvr>
-</p:sld>
-</file>
-
-<file path=ppt/slides/slide10.xml><?xml version="1.0" encoding="utf-8"?>
-<p:sld xmlns:a="http://schemas.openxmlformats.org/drawingml/2006/main" xmlns:p="http://schemas.openxmlformats.org/presentationml/2006/main" xmlns:r="http://schemas.openxmlformats.org/officeDocument/2006/relationships">
-  <p:cSld>
-    <p:spTree>
-      <p:nvGrpSpPr>
-        <p:cNvPr id="1" name=""/>
-        <p:cNvGrpSpPr/>
-        <p:nvPr/>
-      </p:nvGrpSpPr>
-      <p:grpSpPr/>
-      <p:sp>
-        <p:nvSpPr>
-          <p:cNvPr id="2" name="Rectangle 1"/>
-          <p:cNvSpPr/>
-          <p:nvPr/>
-        </p:nvSpPr>
-        <p:spPr>
-          <a:xfrm>
-            <a:off x="0" y="0"/>
-            <a:ext cx="12191695" cy="73152"/>
-          </a:xfrm>
-          <a:prstGeom prst="rect">
-            <a:avLst/>
-          </a:prstGeom>
-          <a:solidFill>
-            <a:srgbClr val="2F7A5D"/>
-          </a:solidFill>
-          <a:ln>
-            <a:noFill/>
-          </a:ln>
-        </p:spPr>
-        <p:style>
-          <a:lnRef idx="1">
-            <a:schemeClr val="accent1"/>
-          </a:lnRef>
-          <a:fillRef idx="3">
-            <a:schemeClr val="accent1"/>
-          </a:fillRef>
-          <a:effectRef idx="2">
-            <a:schemeClr val="accent1"/>
-          </a:effectRef>
-          <a:fontRef idx="minor">
-            <a:schemeClr val="lt1"/>
-          </a:fontRef>
-        </p:style>
-        <p:txBody>
-          <a:bodyPr rtlCol="0" anchor="ctr"/>
-          <a:lstStyle/>
-          <a:p>
-            <a:pPr algn="ctr">
-              <a:defRPr>
-                <a:latin typeface="Roboto"/>
-              </a:defRPr>
-            </a:pPr>
-          </a:p>
-        </p:txBody>
-      </p:sp>
-      <p:sp>
-        <p:nvSpPr>
-          <p:cNvPr id="3" name="TextBox 2"/>
-          <p:cNvSpPr txBox="1"/>
-          <p:nvPr/>
-        </p:nvSpPr>
-        <p:spPr>
-          <a:xfrm>
-            <a:off x="457200" y="164592"/>
-            <a:ext cx="7315200" cy="274320"/>
-          </a:xfrm>
-          <a:prstGeom prst="rect">
-            <a:avLst/>
-          </a:prstGeom>
-          <a:noFill/>
-        </p:spPr>
-        <p:txBody>
-          <a:bodyPr wrap="square">
-            <a:spAutoFit/>
-          </a:bodyPr>
-          <a:lstStyle/>
-          <a:p>
-            <a:pPr>
-              <a:defRPr>
-                <a:latin typeface="Roboto"/>
-              </a:defRPr>
-            </a:pPr>
-            <a:r>
-              <a:rPr sz="1000" b="0">
-                <a:solidFill>
-                  <a:srgbClr val="5F6F63"/>
-                </a:solidFill>
-                <a:latin typeface="Roboto"/>
-              </a:rPr>
-              <a:t>Sample Community Services Ltd · What does it cost to raise a dollar?</a:t>
-            </a:r>
-          </a:p>
-        </p:txBody>
-      </p:sp>
-      <p:sp>
-        <p:nvSpPr>
-          <p:cNvPr id="4" name="TextBox 3"/>
-          <p:cNvSpPr txBox="1"/>
-          <p:nvPr/>
-        </p:nvSpPr>
-        <p:spPr>
-          <a:xfrm>
-            <a:off x="457200" y="411480"/>
-            <a:ext cx="11247120" cy="548640"/>
-          </a:xfrm>
-          <a:prstGeom prst="rect">
-            <a:avLst/>
-          </a:prstGeom>
-          <a:noFill/>
-        </p:spPr>
-        <p:txBody>
-          <a:bodyPr wrap="square">
-            <a:spAutoFit/>
-          </a:bodyPr>
-          <a:lstStyle/>
-          <a:p>
-            <a:pPr>
-              <a:defRPr>
-                <a:latin typeface="Roboto"/>
-              </a:defRPr>
-            </a:pPr>
-            <a:r>
-              <a:rPr sz="2400" b="1">
-                <a:solidFill>
-                  <a:srgbClr val="25342A"/>
-                </a:solidFill>
-                <a:latin typeface="Roboto"/>
-              </a:rPr>
-              <a:t>What it shows · Source: Fundraising events</a:t>
-            </a:r>
-          </a:p>
-        </p:txBody>
-      </p:sp>
-      <p:sp>
-        <p:nvSpPr>
-          <p:cNvPr id="5" name="Rectangle 4"/>
-          <p:cNvSpPr/>
-          <p:nvPr/>
-        </p:nvSpPr>
-        <p:spPr>
-          <a:xfrm>
-            <a:off x="457200" y="1554480"/>
-            <a:ext cx="5501487" cy="4389120"/>
-          </a:xfrm>
-          <a:prstGeom prst="rect">
-            <a:avLst/>
-          </a:prstGeom>
-          <a:solidFill>
-            <a:srgbClr val="FFFFFF"/>
-          </a:solidFill>
-          <a:ln>
-            <a:solidFill>
-              <a:srgbClr val="DCE8DC"/>
-            </a:solidFill>
-          </a:ln>
-        </p:spPr>
-        <p:style>
-          <a:lnRef idx="1">
-            <a:schemeClr val="accent1"/>
-          </a:lnRef>
-          <a:fillRef idx="3">
-            <a:schemeClr val="accent1"/>
-          </a:fillRef>
-          <a:effectRef idx="2">
-            <a:schemeClr val="accent1"/>
-          </a:effectRef>
-          <a:fontRef idx="minor">
-            <a:schemeClr val="lt1"/>
-          </a:fontRef>
-        </p:style>
-        <p:txBody>
-          <a:bodyPr rtlCol="0" anchor="ctr"/>
-          <a:lstStyle/>
-          <a:p>
-            <a:pPr algn="ctr">
-              <a:defRPr>
-                <a:latin typeface="Roboto"/>
-              </a:defRPr>
-            </a:pPr>
-          </a:p>
-        </p:txBody>
-      </p:sp>
-      <p:sp>
-        <p:nvSpPr>
-          <p:cNvPr id="6" name="TextBox 5"/>
-          <p:cNvSpPr txBox="1"/>
-          <p:nvPr/>
-        </p:nvSpPr>
-        <p:spPr>
-          <a:xfrm>
-            <a:off x="685800" y="1691640"/>
-            <a:ext cx="5044287" cy="365760"/>
-          </a:xfrm>
-          <a:prstGeom prst="rect">
-            <a:avLst/>
-          </a:prstGeom>
-          <a:noFill/>
-        </p:spPr>
-        <p:txBody>
-          <a:bodyPr wrap="square">
-            <a:spAutoFit/>
-          </a:bodyPr>
-          <a:lstStyle/>
-          <a:p>
-            <a:pPr>
-              <a:defRPr>
-                <a:latin typeface="Roboto"/>
-              </a:defRPr>
-            </a:pPr>
-            <a:r>
-              <a:rPr sz="1100" b="1">
-                <a:solidFill>
-                  <a:srgbClr val="5F6F63"/>
-                </a:solidFill>
-                <a:latin typeface="Roboto"/>
-              </a:rPr>
-              <a:t>WHAT IT SHOWS</a:t>
-            </a:r>
-          </a:p>
-        </p:txBody>
-      </p:sp>
-      <p:sp>
-        <p:nvSpPr>
-          <p:cNvPr id="7" name="TextBox 6"/>
-          <p:cNvSpPr txBox="1"/>
-          <p:nvPr/>
-        </p:nvSpPr>
-        <p:spPr>
-          <a:xfrm>
-            <a:off x="685800" y="2103120"/>
-            <a:ext cx="5044287" cy="3749039"/>
-          </a:xfrm>
-          <a:prstGeom prst="rect">
-            <a:avLst/>
-          </a:prstGeom>
-          <a:noFill/>
-        </p:spPr>
-        <p:txBody>
-          <a:bodyPr wrap="square">
-            <a:spAutoFit/>
-          </a:bodyPr>
-          <a:lstStyle/>
-          <a:p>
-            <a:pPr>
-              <a:defRPr>
-                <a:latin typeface="Roboto"/>
-              </a:defRPr>
-            </a:pPr>
-            <a:r>
-              <a:rPr sz="1600" b="0">
-                <a:solidFill>
-                  <a:srgbClr val="25342A"/>
-                </a:solidFill>
-                <a:latin typeface="Roboto"/>
-              </a:rPr>
-              <a:t>Fundraising events cost 41¢ to raise each dollar this financial year to date ($17,800 of event costs for $43,000).</a:t>
-            </a:r>
-          </a:p>
-        </p:txBody>
-      </p:sp>
-      <p:sp>
-        <p:nvSpPr>
-          <p:cNvPr id="8" name="Rectangle 7"/>
-          <p:cNvSpPr/>
-          <p:nvPr/>
-        </p:nvSpPr>
-        <p:spPr>
-          <a:xfrm>
-            <a:off x="6233007" y="1554480"/>
-            <a:ext cx="5501487" cy="4389120"/>
-          </a:xfrm>
-          <a:prstGeom prst="rect">
-            <a:avLst/>
-          </a:prstGeom>
-          <a:solidFill>
-            <a:srgbClr val="EEF5F0"/>
-          </a:solidFill>
-          <a:ln>
-            <a:solidFill>
-              <a:srgbClr val="DCE8DC"/>
-            </a:solidFill>
-          </a:ln>
-        </p:spPr>
-        <p:style>
-          <a:lnRef idx="1">
-            <a:schemeClr val="accent1"/>
-          </a:lnRef>
-          <a:fillRef idx="3">
-            <a:schemeClr val="accent1"/>
-          </a:fillRef>
-          <a:effectRef idx="2">
-            <a:schemeClr val="accent1"/>
-          </a:effectRef>
-          <a:fontRef idx="minor">
-            <a:schemeClr val="lt1"/>
-          </a:fontRef>
-        </p:style>
-        <p:txBody>
-          <a:bodyPr rtlCol="0" anchor="ctr"/>
-          <a:lstStyle/>
-          <a:p>
-            <a:pPr algn="ctr">
-              <a:defRPr>
-                <a:latin typeface="Roboto"/>
-              </a:defRPr>
-            </a:pPr>
-          </a:p>
-        </p:txBody>
-      </p:sp>
-      <p:sp>
-        <p:nvSpPr>
-          <p:cNvPr id="9" name="TextBox 8"/>
-          <p:cNvSpPr txBox="1"/>
-          <p:nvPr/>
-        </p:nvSpPr>
-        <p:spPr>
-          <a:xfrm>
-            <a:off x="6461607" y="1691640"/>
-            <a:ext cx="5044287" cy="365760"/>
-          </a:xfrm>
-          <a:prstGeom prst="rect">
-            <a:avLst/>
-          </a:prstGeom>
-          <a:noFill/>
-        </p:spPr>
-        <p:txBody>
-          <a:bodyPr wrap="square">
-            <a:spAutoFit/>
-          </a:bodyPr>
-          <a:lstStyle/>
-          <a:p>
-            <a:pPr>
-              <a:defRPr>
-                <a:latin typeface="Roboto"/>
-              </a:defRPr>
-            </a:pPr>
-            <a:r>
-              <a:rPr sz="1100" b="1">
-                <a:solidFill>
-                  <a:srgbClr val="5F6F63"/>
-                </a:solidFill>
-                <a:latin typeface="Roboto"/>
-              </a:rPr>
-              <a:t>WHAT YOU'D DO ABOUT IT</a:t>
-            </a:r>
-          </a:p>
-        </p:txBody>
-      </p:sp>
-      <p:sp>
-        <p:nvSpPr>
-          <p:cNvPr id="10" name="TextBox 9"/>
-          <p:cNvSpPr txBox="1"/>
-          <p:nvPr/>
-        </p:nvSpPr>
-        <p:spPr>
-          <a:xfrm>
-            <a:off x="6461607" y="2103120"/>
-            <a:ext cx="5044287" cy="3749039"/>
-          </a:xfrm>
-          <a:prstGeom prst="rect">
-            <a:avLst/>
-          </a:prstGeom>
-          <a:noFill/>
-        </p:spPr>
-        <p:txBody>
-          <a:bodyPr wrap="square">
-            <a:spAutoFit/>
-          </a:bodyPr>
-          <a:lstStyle/>
-          <a:p>
-            <a:pPr>
-              <a:defRPr>
-                <a:latin typeface="Roboto"/>
-              </a:defRPr>
-            </a:pPr>
-            <a:r>
-              <a:rPr sz="1600" b="0">
-                <a:solidFill>
-                  <a:srgbClr val="25342A"/>
-                </a:solidFill>
-                <a:latin typeface="Roboto"/>
-              </a:rPr>
-              <a:t>Usually the dearest money to raise: events are worth counting for what else they bring too (new donors, profile).</a:t>
-            </a:r>
-          </a:p>
-        </p:txBody>
-      </p:sp>
-      <p:sp>
-        <p:nvSpPr>
-          <p:cNvPr id="11" name="TextBox 10"/>
-          <p:cNvSpPr txBox="1"/>
-          <p:nvPr/>
-        </p:nvSpPr>
-        <p:spPr>
-          <a:xfrm>
-            <a:off x="457200" y="6492240"/>
-            <a:ext cx="3657600" cy="274320"/>
-          </a:xfrm>
-          <a:prstGeom prst="rect">
-            <a:avLst/>
-          </a:prstGeom>
-          <a:noFill/>
-        </p:spPr>
-        <p:txBody>
-          <a:bodyPr wrap="square">
-            <a:spAutoFit/>
-          </a:bodyPr>
-          <a:lstStyle/>
-          <a:p>
-            <a:pPr>
-              <a:defRPr>
-                <a:latin typeface="Roboto"/>
-              </a:defRPr>
-            </a:pPr>
-            <a:r>
-              <a:rPr sz="900" b="0">
-                <a:solidFill>
-                  <a:srgbClr val="5F6F63"/>
-                </a:solidFill>
-                <a:latin typeface="Roboto"/>
-              </a:rPr>
-              <a:t>cost-to-raise.pptx</a:t>
-            </a:r>
-          </a:p>
-        </p:txBody>
-      </p:sp>
-      <p:sp>
-        <p:nvSpPr>
-          <p:cNvPr id="12" name="TextBox 11"/>
-          <p:cNvSpPr txBox="1"/>
-          <p:nvPr/>
-        </p:nvSpPr>
-        <p:spPr>
-          <a:xfrm>
-            <a:off x="4297680" y="6492240"/>
-            <a:ext cx="3657600" cy="274320"/>
-          </a:xfrm>
-          <a:prstGeom prst="rect">
-            <a:avLst/>
-          </a:prstGeom>
-          <a:noFill/>
-        </p:spPr>
-        <p:txBody>
-          <a:bodyPr wrap="square">
-            <a:spAutoFit/>
-          </a:bodyPr>
-          <a:lstStyle/>
-          <a:p>
-            <a:pPr algn="ctr">
-              <a:defRPr>
-                <a:latin typeface="Roboto"/>
-              </a:defRPr>
-            </a:pPr>
-            <a:r>
-              <a:rPr sz="900" b="0">
-                <a:solidFill>
-                  <a:srgbClr val="5F6F63"/>
-                </a:solidFill>
-                <a:latin typeface="Roboto"/>
-              </a:rPr>
-              <a:t>Data retrieved 2pm, Tue 6 Oct 2026 · Sample data</a:t>
-            </a:r>
-          </a:p>
-        </p:txBody>
-      </p:sp>
-      <p:sp>
-        <p:nvSpPr>
-          <p:cNvPr id="13" name="TextBox 12"/>
-          <p:cNvSpPr txBox="1"/>
-          <p:nvPr/>
-        </p:nvSpPr>
-        <p:spPr>
-          <a:xfrm>
-            <a:off x="8503920" y="6492240"/>
-            <a:ext cx="3200400" cy="274320"/>
-          </a:xfrm>
-          <a:prstGeom prst="rect">
-            <a:avLst/>
-          </a:prstGeom>
-          <a:noFill/>
-        </p:spPr>
-        <p:txBody>
-          <a:bodyPr wrap="square">
-            <a:spAutoFit/>
-          </a:bodyPr>
-          <a:lstStyle/>
-          <a:p>
-            <a:pPr algn="r">
-              <a:defRPr>
-                <a:latin typeface="Roboto"/>
-              </a:defRPr>
-            </a:pPr>
-            <a:r>
-              <a:rPr sz="900" b="0">
-                <a:solidFill>
-                  <a:srgbClr val="5F6F63"/>
-                </a:solidFill>
-                <a:latin typeface="Roboto"/>
-              </a:rPr>
-              <a:t>Slide 10 of 11</a:t>
-            </a:r>
-          </a:p>
-        </p:txBody>
-      </p:sp>
-    </p:spTree>
-  </p:cSld>
-  <p:clrMapOvr>
-    <a:masterClrMapping/>
-  </p:clrMapOvr>
-</p:sld>
-</file>
-
-<file path=ppt/slides/slide11.xml><?xml version="1.0" encoding="utf-8"?>
-<p:sld xmlns:a="http://schemas.openxmlformats.org/drawingml/2006/main" xmlns:p="http://schemas.openxmlformats.org/presentationml/2006/main" xmlns:r="http://schemas.openxmlformats.org/officeDocument/2006/relationships">
-  <p:cSld>
-    <p:spTree>
-      <p:nvGrpSpPr>
-        <p:cNvPr id="1" name=""/>
-        <p:cNvGrpSpPr/>
-        <p:nvPr/>
-      </p:nvGrpSpPr>
-      <p:grpSpPr/>
-      <p:sp>
-        <p:nvSpPr>
-          <p:cNvPr id="2" name="Rectangle 1"/>
-          <p:cNvSpPr/>
-          <p:nvPr/>
-        </p:nvSpPr>
-        <p:spPr>
-          <a:xfrm>
-            <a:off x="0" y="0"/>
-            <a:ext cx="12191695" cy="73152"/>
-          </a:xfrm>
-          <a:prstGeom prst="rect">
-            <a:avLst/>
-          </a:prstGeom>
-          <a:solidFill>
-            <a:srgbClr val="2F7A5D"/>
-          </a:solidFill>
-          <a:ln>
-            <a:noFill/>
-          </a:ln>
-        </p:spPr>
-        <p:style>
-          <a:lnRef idx="1">
-            <a:schemeClr val="accent1"/>
-          </a:lnRef>
-          <a:fillRef idx="3">
-            <a:schemeClr val="accent1"/>
-          </a:fillRef>
-          <a:effectRef idx="2">
-            <a:schemeClr val="accent1"/>
-          </a:effectRef>
-          <a:fontRef idx="minor">
-            <a:schemeClr val="lt1"/>
-          </a:fontRef>
-        </p:style>
-        <p:txBody>
-          <a:bodyPr rtlCol="0" anchor="ctr"/>
-          <a:lstStyle/>
-          <a:p>
-            <a:pPr algn="ctr">
-              <a:defRPr>
-                <a:latin typeface="Roboto"/>
-              </a:defRPr>
-            </a:pPr>
-          </a:p>
-        </p:txBody>
-      </p:sp>
-      <p:sp>
-        <p:nvSpPr>
-          <p:cNvPr id="3" name="TextBox 2"/>
-          <p:cNvSpPr txBox="1"/>
-          <p:nvPr/>
-        </p:nvSpPr>
-        <p:spPr>
-          <a:xfrm>
-            <a:off x="457200" y="164592"/>
-            <a:ext cx="7315200" cy="274320"/>
-          </a:xfrm>
-          <a:prstGeom prst="rect">
-            <a:avLst/>
-          </a:prstGeom>
-          <a:noFill/>
-        </p:spPr>
-        <p:txBody>
-          <a:bodyPr wrap="square">
-            <a:spAutoFit/>
-          </a:bodyPr>
-          <a:lstStyle/>
-          <a:p>
-            <a:pPr>
-              <a:defRPr>
-                <a:latin typeface="Roboto"/>
-              </a:defRPr>
-            </a:pPr>
-            <a:r>
-              <a:rPr sz="1000" b="0">
-                <a:solidFill>
-                  <a:srgbClr val="5F6F63"/>
-                </a:solidFill>
-                <a:latin typeface="Roboto"/>
-              </a:rPr>
-              <a:t>Sample Community Services Ltd · What does it cost to raise a dollar?</a:t>
-            </a:r>
-          </a:p>
-        </p:txBody>
-      </p:sp>
-      <p:sp>
-        <p:nvSpPr>
-          <p:cNvPr id="4" name="TextBox 3"/>
-          <p:cNvSpPr txBox="1"/>
-          <p:nvPr/>
-        </p:nvSpPr>
-        <p:spPr>
-          <a:xfrm>
-            <a:off x="457200" y="411480"/>
-            <a:ext cx="11247120" cy="548640"/>
-          </a:xfrm>
-          <a:prstGeom prst="rect">
-            <a:avLst/>
-          </a:prstGeom>
-          <a:noFill/>
-        </p:spPr>
-        <p:txBody>
-          <a:bodyPr wrap="square">
-            <a:spAutoFit/>
-          </a:bodyPr>
-          <a:lstStyle/>
-          <a:p>
-            <a:pPr>
-              <a:defRPr>
-                <a:latin typeface="Roboto"/>
-              </a:defRPr>
-            </a:pPr>
-            <a:r>
-              <a:rPr sz="2400" b="1">
-                <a:solidFill>
-                  <a:srgbClr val="25342A"/>
-                </a:solidFill>
-                <a:latin typeface="Roboto"/>
-              </a:rPr>
-              <a:t>Cost to raise a dollar, by month (cents) · Cents per $1 · Every source at once</a:t>
-            </a:r>
-          </a:p>
-        </p:txBody>
-      </p:sp>
-      <p:sp>
-        <p:nvSpPr>
-          <p:cNvPr id="5" name="TextBox 4"/>
-          <p:cNvSpPr txBox="1"/>
-          <p:nvPr/>
-        </p:nvSpPr>
-        <p:spPr>
-          <a:xfrm>
-            <a:off x="457200" y="960120"/>
-            <a:ext cx="11247120" cy="457200"/>
-          </a:xfrm>
-          <a:prstGeom prst="rect">
-            <a:avLst/>
-          </a:prstGeom>
-          <a:noFill/>
-        </p:spPr>
-        <p:txBody>
-          <a:bodyPr wrap="square">
-            <a:spAutoFit/>
-          </a:bodyPr>
-          <a:lstStyle/>
-          <a:p>
-            <a:pPr>
-              <a:defRPr>
-                <a:latin typeface="Roboto"/>
-              </a:defRPr>
-            </a:pPr>
-            <a:r>
-              <a:rPr sz="1200" b="0">
-                <a:solidFill>
-                  <a:srgbClr val="5F6F63"/>
-                </a:solidFill>
-                <a:latin typeface="Roboto"/>
-              </a:rPr>
-              <a:t>Months with an event (the gala, the Christmas appeal) jump. A gap means nothing was raised that month.</a:t>
-            </a:r>
-          </a:p>
-        </p:txBody>
-      </p:sp>
-      <p:graphicFrame>
-        <p:nvGraphicFramePr>
-          <p:cNvPr id="6" name="Chart 5"/>
-          <p:cNvGraphicFramePr>
-            <a:graphicFrameLocks noGrp="1"/>
-          </p:cNvGraphicFramePr>
-          <p:nvPr/>
-        </p:nvGraphicFramePr>
-        <p:xfrm>
-          <a:off x="457200" y="1463040"/>
-          <a:ext cx="11247120" cy="4754880"/>
-        </p:xfrm>
-        <a:graphic>
-          <a:graphicData uri="http://schemas.openxmlformats.org/drawingml/2006/chart">
-            <c:chart xmlns:c="http://schemas.openxmlformats.org/drawingml/2006/chart" r:id="rId2"/>
-          </a:graphicData>
-        </a:graphic>
-      </p:graphicFrame>
-      <p:sp>
-        <p:nvSpPr>
-          <p:cNvPr id="7" name="TextBox 6"/>
-          <p:cNvSpPr txBox="1"/>
-          <p:nvPr/>
-        </p:nvSpPr>
-        <p:spPr>
-          <a:xfrm>
-            <a:off x="457200" y="6492240"/>
-            <a:ext cx="3657600" cy="274320"/>
-          </a:xfrm>
-          <a:prstGeom prst="rect">
-            <a:avLst/>
-          </a:prstGeom>
-          <a:noFill/>
-        </p:spPr>
-        <p:txBody>
-          <a:bodyPr wrap="square">
-            <a:spAutoFit/>
-          </a:bodyPr>
-          <a:lstStyle/>
-          <a:p>
-            <a:pPr>
-              <a:defRPr>
-                <a:latin typeface="Roboto"/>
-              </a:defRPr>
-            </a:pPr>
-            <a:r>
-              <a:rPr sz="900" b="0">
-                <a:solidFill>
-                  <a:srgbClr val="5F6F63"/>
-                </a:solidFill>
-                <a:latin typeface="Roboto"/>
-              </a:rPr>
-              <a:t>cost-to-raise.pptx</a:t>
-            </a:r>
-          </a:p>
-        </p:txBody>
-      </p:sp>
-      <p:sp>
-        <p:nvSpPr>
-          <p:cNvPr id="8" name="TextBox 7"/>
-          <p:cNvSpPr txBox="1"/>
-          <p:nvPr/>
-        </p:nvSpPr>
-        <p:spPr>
-          <a:xfrm>
-            <a:off x="4297680" y="6492240"/>
-            <a:ext cx="3657600" cy="274320"/>
-          </a:xfrm>
-          <a:prstGeom prst="rect">
-            <a:avLst/>
-          </a:prstGeom>
-          <a:noFill/>
-        </p:spPr>
-        <p:txBody>
-          <a:bodyPr wrap="square">
-            <a:spAutoFit/>
-          </a:bodyPr>
-          <a:lstStyle/>
-          <a:p>
-            <a:pPr algn="ctr">
-              <a:defRPr>
-                <a:latin typeface="Roboto"/>
-              </a:defRPr>
-            </a:pPr>
-            <a:r>
-              <a:rPr sz="900" b="0">
-                <a:solidFill>
-                  <a:srgbClr val="5F6F63"/>
-                </a:solidFill>
-                <a:latin typeface="Roboto"/>
-              </a:rPr>
-              <a:t>Data retrieved 2pm, Tue 6 Oct 2026 · Sample data</a:t>
-            </a:r>
-          </a:p>
-        </p:txBody>
-      </p:sp>
-      <p:sp>
-        <p:nvSpPr>
-          <p:cNvPr id="9" name="TextBox 8"/>
-          <p:cNvSpPr txBox="1"/>
-          <p:nvPr/>
-        </p:nvSpPr>
-        <p:spPr>
-          <a:xfrm>
-            <a:off x="8503920" y="6492240"/>
-            <a:ext cx="3200400" cy="274320"/>
-          </a:xfrm>
-          <a:prstGeom prst="rect">
-            <a:avLst/>
-          </a:prstGeom>
-          <a:noFill/>
-        </p:spPr>
-        <p:txBody>
-          <a:bodyPr wrap="square">
-            <a:spAutoFit/>
-          </a:bodyPr>
-          <a:lstStyle/>
-          <a:p>
-            <a:pPr algn="r">
-              <a:defRPr>
-                <a:latin typeface="Roboto"/>
-              </a:defRPr>
-            </a:pPr>
-            <a:r>
-              <a:rPr sz="900" b="0">
-                <a:solidFill>
-                  <a:srgbClr val="5F6F63"/>
-                </a:solidFill>
-                <a:latin typeface="Roboto"/>
-              </a:rPr>
-              <a:t>Slide 11 of 11</a:t>
+              <a:t>Slide 1 of 5</a:t>
             </a:r>
           </a:p>
         </p:txBody>
@@ -4834,7 +5197,44 @@
       <p:grpSpPr/>
       <p:sp>
         <p:nvSpPr>
-          <p:cNvPr id="2" name="Rectangle 1"/>
+          <p:cNvPr id="2" name="Title 1"/>
+          <p:cNvSpPr>
+            <a:spLocks noGrp="1"/>
+          </p:cNvSpPr>
+          <p:nvPr>
+            <p:ph type="title"/>
+          </p:nvPr>
+        </p:nvSpPr>
+        <p:spPr>
+          <a:xfrm>
+            <a:off x="457200" y="384048"/>
+            <a:ext cx="11277295" cy="475488"/>
+          </a:xfrm>
+        </p:spPr>
+        <p:txBody>
+          <a:bodyPr wrap="square" lIns="45720" rIns="45720" tIns="0" bIns="0" anchor="t"/>
+          <a:lstStyle/>
+          <a:p>
+            <a:pPr algn="l">
+              <a:defRPr>
+                <a:latin typeface="Roboto"/>
+              </a:defRPr>
+            </a:pPr>
+            <a:r>
+              <a:rPr sz="2400" b="1">
+                <a:solidFill>
+                  <a:srgbClr val="25342A"/>
+                </a:solidFill>
+                <a:latin typeface="Roboto"/>
+              </a:rPr>
+              <a:t>All fundraising</a:t>
+            </a:r>
+          </a:p>
+        </p:txBody>
+      </p:sp>
+      <p:sp>
+        <p:nvSpPr>
+          <p:cNvPr id="3" name="Rectangle 2"/>
           <p:cNvSpPr/>
           <p:nvPr/>
         </p:nvSpPr>
@@ -4881,53 +5281,14 @@
       </p:sp>
       <p:sp>
         <p:nvSpPr>
-          <p:cNvPr id="3" name="TextBox 2"/>
-          <p:cNvSpPr txBox="1"/>
-          <p:nvPr/>
-        </p:nvSpPr>
-        <p:spPr>
-          <a:xfrm>
-            <a:off x="457200" y="164592"/>
-            <a:ext cx="7315200" cy="274320"/>
-          </a:xfrm>
-          <a:prstGeom prst="rect">
-            <a:avLst/>
-          </a:prstGeom>
-          <a:noFill/>
-        </p:spPr>
-        <p:txBody>
-          <a:bodyPr wrap="square">
-            <a:spAutoFit/>
-          </a:bodyPr>
-          <a:lstStyle/>
-          <a:p>
-            <a:pPr>
-              <a:defRPr>
-                <a:latin typeface="Roboto"/>
-              </a:defRPr>
-            </a:pPr>
-            <a:r>
-              <a:rPr sz="1000" b="0">
-                <a:solidFill>
-                  <a:srgbClr val="5F6F63"/>
-                </a:solidFill>
-                <a:latin typeface="Roboto"/>
-              </a:rPr>
-              <a:t>Sample Community Services Ltd · What does it cost to raise a dollar?</a:t>
-            </a:r>
-          </a:p>
-        </p:txBody>
-      </p:sp>
-      <p:sp>
-        <p:nvSpPr>
           <p:cNvPr id="4" name="TextBox 3"/>
           <p:cNvSpPr txBox="1"/>
           <p:nvPr/>
         </p:nvSpPr>
         <p:spPr>
           <a:xfrm>
-            <a:off x="457200" y="411480"/>
-            <a:ext cx="11247120" cy="548640"/>
+            <a:off x="457200" y="146304"/>
+            <a:ext cx="8229600" cy="256032"/>
           </a:xfrm>
           <a:prstGeom prst="rect">
             <a:avLst/>
@@ -4935,7 +5296,7 @@
           <a:noFill/>
         </p:spPr>
         <p:txBody>
-          <a:bodyPr wrap="square">
+          <a:bodyPr wrap="square" lIns="45720" rIns="45720">
             <a:spAutoFit/>
           </a:bodyPr>
           <a:lstStyle/>
@@ -4946,27 +5307,66 @@
               </a:defRPr>
             </a:pPr>
             <a:r>
-              <a:rPr sz="2400" b="1">
-                <a:solidFill>
-                  <a:srgbClr val="25342A"/>
+              <a:rPr sz="1000" b="0">
+                <a:solidFill>
+                  <a:srgbClr val="5F6F63"/>
                 </a:solidFill>
                 <a:latin typeface="Roboto"/>
               </a:rPr>
-              <a:t>Headline numbers · Source: All fundraising</a:t>
-            </a:r>
-          </a:p>
-        </p:txBody>
-      </p:sp>
-      <p:sp>
-        <p:nvSpPr>
-          <p:cNvPr id="5" name="Rectangle 4"/>
+              <a:t>Sample Community Services Ltd · What does it cost to raise a dollar?</a:t>
+            </a:r>
+          </a:p>
+        </p:txBody>
+      </p:sp>
+      <p:sp>
+        <p:nvSpPr>
+          <p:cNvPr id="5" name="TextBox 4"/>
+          <p:cNvSpPr txBox="1"/>
+          <p:nvPr/>
+        </p:nvSpPr>
+        <p:spPr>
+          <a:xfrm>
+            <a:off x="457200" y="914400"/>
+            <a:ext cx="11277295" cy="263652"/>
+          </a:xfrm>
+          <a:prstGeom prst="rect">
+            <a:avLst/>
+          </a:prstGeom>
+          <a:noFill/>
+        </p:spPr>
+        <p:txBody>
+          <a:bodyPr wrap="square" lIns="45720" rIns="45720">
+            <a:spAutoFit/>
+          </a:bodyPr>
+          <a:lstStyle/>
+          <a:p>
+            <a:pPr>
+              <a:defRPr>
+                <a:latin typeface="Roboto"/>
+              </a:defRPr>
+            </a:pPr>
+            <a:r>
+              <a:rPr sz="1200" b="0">
+                <a:solidFill>
+                  <a:srgbClr val="5F6F63"/>
+                </a:solidFill>
+                <a:latin typeface="Roboto"/>
+              </a:rPr>
+              <a:t>Cost to raise a dollar, by source, May 2026 (cents)</a:t>
+            </a:r>
+          </a:p>
+        </p:txBody>
+      </p:sp>
+      <p:sp>
+        <p:nvSpPr>
+          <p:cNvPr id="6" name="Rectangle 5"/>
           <p:cNvSpPr/>
           <p:nvPr/>
         </p:nvSpPr>
         <p:spPr>
           <a:xfrm>
-            <a:off x="457200" y="1645920"/>
-            <a:ext cx="5501487" cy="2011680"/>
+            <a:off x="457200" y="1278636"/>
+            <a:ext cx="5524347" cy="1188720"/>
           </a:xfrm>
           <a:prstGeom prst="rect">
             <a:avLst/>
@@ -5008,53 +5408,14 @@
       </p:sp>
       <p:sp>
         <p:nvSpPr>
-          <p:cNvPr id="6" name="TextBox 5"/>
-          <p:cNvSpPr txBox="1"/>
-          <p:nvPr/>
-        </p:nvSpPr>
-        <p:spPr>
-          <a:xfrm>
-            <a:off x="640080" y="1783080"/>
-            <a:ext cx="5135727" cy="457200"/>
-          </a:xfrm>
-          <a:prstGeom prst="rect">
-            <a:avLst/>
-          </a:prstGeom>
-          <a:noFill/>
-        </p:spPr>
-        <p:txBody>
-          <a:bodyPr wrap="square">
-            <a:spAutoFit/>
-          </a:bodyPr>
-          <a:lstStyle/>
-          <a:p>
-            <a:pPr>
-              <a:defRPr>
-                <a:latin typeface="Roboto"/>
-              </a:defRPr>
-            </a:pPr>
-            <a:r>
-              <a:rPr sz="1200" b="0">
-                <a:solidFill>
-                  <a:srgbClr val="5F6F63"/>
-                </a:solidFill>
-                <a:latin typeface="Roboto"/>
-              </a:rPr>
-              <a:t>May · all fundraising</a:t>
-            </a:r>
-          </a:p>
-        </p:txBody>
-      </p:sp>
-      <p:sp>
-        <p:nvSpPr>
           <p:cNvPr id="7" name="TextBox 6"/>
           <p:cNvSpPr txBox="1"/>
           <p:nvPr/>
         </p:nvSpPr>
         <p:spPr>
           <a:xfrm>
-            <a:off x="640080" y="2240280"/>
-            <a:ext cx="5135727" cy="731520"/>
+            <a:off x="594360" y="1351788"/>
+            <a:ext cx="5250027" cy="384048"/>
           </a:xfrm>
           <a:prstGeom prst="rect">
             <a:avLst/>
@@ -5062,7 +5423,7 @@
           <a:noFill/>
         </p:spPr>
         <p:txBody>
-          <a:bodyPr wrap="square">
+          <a:bodyPr wrap="square" lIns="45720" rIns="45720">
             <a:spAutoFit/>
           </a:bodyPr>
           <a:lstStyle/>
@@ -5073,13 +5434,13 @@
               </a:defRPr>
             </a:pPr>
             <a:r>
-              <a:rPr sz="3000" b="1">
-                <a:solidFill>
-                  <a:srgbClr val="2F7A5D"/>
+              <a:rPr sz="1100" b="0">
+                <a:solidFill>
+                  <a:srgbClr val="5F6F63"/>
                 </a:solidFill>
                 <a:latin typeface="Roboto"/>
               </a:rPr>
-              <a:t>10¢</a:t>
+              <a:t>May · all fundraising</a:t>
             </a:r>
           </a:p>
         </p:txBody>
@@ -5092,8 +5453,8 @@
         </p:nvSpPr>
         <p:spPr>
           <a:xfrm>
-            <a:off x="640080" y="3017520"/>
-            <a:ext cx="5135727" cy="548640"/>
+            <a:off x="594360" y="1717548"/>
+            <a:ext cx="5250027" cy="502920"/>
           </a:xfrm>
           <a:prstGeom prst="rect">
             <a:avLst/>
@@ -5101,7 +5462,7 @@
           <a:noFill/>
         </p:spPr>
         <p:txBody>
-          <a:bodyPr wrap="square">
+          <a:bodyPr wrap="square" lIns="45720" rIns="45720">
             <a:spAutoFit/>
           </a:bodyPr>
           <a:lstStyle/>
@@ -5112,7 +5473,46 @@
               </a:defRPr>
             </a:pPr>
             <a:r>
-              <a:rPr sz="1100" b="0">
+              <a:rPr sz="2200" b="1">
+                <a:solidFill>
+                  <a:srgbClr val="2F7A5D"/>
+                </a:solidFill>
+                <a:latin typeface="Roboto"/>
+              </a:rPr>
+              <a:t>10¢</a:t>
+            </a:r>
+          </a:p>
+        </p:txBody>
+      </p:sp>
+      <p:sp>
+        <p:nvSpPr>
+          <p:cNvPr id="9" name="TextBox 8"/>
+          <p:cNvSpPr txBox="1"/>
+          <p:nvPr/>
+        </p:nvSpPr>
+        <p:spPr>
+          <a:xfrm>
+            <a:off x="594360" y="2083308"/>
+            <a:ext cx="5250027" cy="329184"/>
+          </a:xfrm>
+          <a:prstGeom prst="rect">
+            <a:avLst/>
+          </a:prstGeom>
+          <a:noFill/>
+        </p:spPr>
+        <p:txBody>
+          <a:bodyPr wrap="square" lIns="45720" rIns="45720">
+            <a:spAutoFit/>
+          </a:bodyPr>
+          <a:lstStyle/>
+          <a:p>
+            <a:pPr>
+              <a:defRPr>
+                <a:latin typeface="Roboto"/>
+              </a:defRPr>
+            </a:pPr>
+            <a:r>
+              <a:rPr sz="1000" b="0">
                 <a:solidFill>
                   <a:srgbClr val="5F6F63"/>
                 </a:solidFill>
@@ -5125,14 +5525,14 @@
       </p:sp>
       <p:sp>
         <p:nvSpPr>
-          <p:cNvPr id="9" name="Rectangle 8"/>
+          <p:cNvPr id="10" name="Rectangle 9"/>
           <p:cNvSpPr/>
           <p:nvPr/>
         </p:nvSpPr>
         <p:spPr>
           <a:xfrm>
-            <a:off x="6233007" y="1645920"/>
-            <a:ext cx="5501487" cy="2011680"/>
+            <a:off x="6210147" y="1278636"/>
+            <a:ext cx="5524347" cy="1188720"/>
           </a:xfrm>
           <a:prstGeom prst="rect">
             <a:avLst/>
@@ -5174,53 +5574,14 @@
       </p:sp>
       <p:sp>
         <p:nvSpPr>
-          <p:cNvPr id="10" name="TextBox 9"/>
-          <p:cNvSpPr txBox="1"/>
-          <p:nvPr/>
-        </p:nvSpPr>
-        <p:spPr>
-          <a:xfrm>
-            <a:off x="6415887" y="1783080"/>
-            <a:ext cx="5135727" cy="457200"/>
-          </a:xfrm>
-          <a:prstGeom prst="rect">
-            <a:avLst/>
-          </a:prstGeom>
-          <a:noFill/>
-        </p:spPr>
-        <p:txBody>
-          <a:bodyPr wrap="square">
-            <a:spAutoFit/>
-          </a:bodyPr>
-          <a:lstStyle/>
-          <a:p>
-            <a:pPr>
-              <a:defRPr>
-                <a:latin typeface="Roboto"/>
-              </a:defRPr>
-            </a:pPr>
-            <a:r>
-              <a:rPr sz="1200" b="0">
-                <a:solidFill>
-                  <a:srgbClr val="5F6F63"/>
-                </a:solidFill>
-                <a:latin typeface="Roboto"/>
-              </a:rPr>
-              <a:t>Year to date (Jul to May 2026)</a:t>
-            </a:r>
-          </a:p>
-        </p:txBody>
-      </p:sp>
-      <p:sp>
-        <p:nvSpPr>
           <p:cNvPr id="11" name="TextBox 10"/>
           <p:cNvSpPr txBox="1"/>
           <p:nvPr/>
         </p:nvSpPr>
         <p:spPr>
           <a:xfrm>
-            <a:off x="6415887" y="2240280"/>
-            <a:ext cx="5135727" cy="731520"/>
+            <a:off x="6347307" y="1351788"/>
+            <a:ext cx="5250027" cy="384048"/>
           </a:xfrm>
           <a:prstGeom prst="rect">
             <a:avLst/>
@@ -5228,7 +5589,7 @@
           <a:noFill/>
         </p:spPr>
         <p:txBody>
-          <a:bodyPr wrap="square">
+          <a:bodyPr wrap="square" lIns="45720" rIns="45720">
             <a:spAutoFit/>
           </a:bodyPr>
           <a:lstStyle/>
@@ -5239,13 +5600,13 @@
               </a:defRPr>
             </a:pPr>
             <a:r>
-              <a:rPr sz="3000" b="1">
-                <a:solidFill>
-                  <a:srgbClr val="2F7A5D"/>
+              <a:rPr sz="1100" b="0">
+                <a:solidFill>
+                  <a:srgbClr val="5F6F63"/>
                 </a:solidFill>
                 <a:latin typeface="Roboto"/>
               </a:rPr>
-              <a:t>13¢</a:t>
+              <a:t>Year to date (Jul to May 2026)</a:t>
             </a:r>
           </a:p>
         </p:txBody>
@@ -5258,8 +5619,8 @@
         </p:nvSpPr>
         <p:spPr>
           <a:xfrm>
-            <a:off x="6415887" y="3017520"/>
-            <a:ext cx="5135727" cy="548640"/>
+            <a:off x="6347307" y="1717548"/>
+            <a:ext cx="5250027" cy="502920"/>
           </a:xfrm>
           <a:prstGeom prst="rect">
             <a:avLst/>
@@ -5267,7 +5628,7 @@
           <a:noFill/>
         </p:spPr>
         <p:txBody>
-          <a:bodyPr wrap="square">
+          <a:bodyPr wrap="square" lIns="45720" rIns="45720">
             <a:spAutoFit/>
           </a:bodyPr>
           <a:lstStyle/>
@@ -5278,13 +5639,13 @@
               </a:defRPr>
             </a:pPr>
             <a:r>
-              <a:rPr sz="1100" b="0">
-                <a:solidFill>
-                  <a:srgbClr val="5F6F63"/>
+              <a:rPr sz="2200" b="1">
+                <a:solidFill>
+                  <a:srgbClr val="2F7A5D"/>
                 </a:solidFill>
                 <a:latin typeface="Roboto"/>
               </a:rPr>
-              <a:t>same period last year: not in the data</a:t>
+              <a:t>13¢</a:t>
             </a:r>
           </a:p>
         </p:txBody>
@@ -5297,8 +5658,8 @@
         </p:nvSpPr>
         <p:spPr>
           <a:xfrm>
-            <a:off x="457200" y="6492240"/>
-            <a:ext cx="3657600" cy="274320"/>
+            <a:off x="6347307" y="2083308"/>
+            <a:ext cx="5250027" cy="329184"/>
           </a:xfrm>
           <a:prstGeom prst="rect">
             <a:avLst/>
@@ -5306,7 +5667,7 @@
           <a:noFill/>
         </p:spPr>
         <p:txBody>
-          <a:bodyPr wrap="square">
+          <a:bodyPr wrap="square" lIns="45720" rIns="45720">
             <a:spAutoFit/>
           </a:bodyPr>
           <a:lstStyle/>
@@ -5317,6 +5678,317 @@
               </a:defRPr>
             </a:pPr>
             <a:r>
+              <a:rPr sz="1000" b="0">
+                <a:solidFill>
+                  <a:srgbClr val="5F6F63"/>
+                </a:solidFill>
+                <a:latin typeface="Roboto"/>
+              </a:rPr>
+              <a:t>same period last year: not in the data</a:t>
+            </a:r>
+          </a:p>
+        </p:txBody>
+      </p:sp>
+      <p:graphicFrame>
+        <p:nvGraphicFramePr>
+          <p:cNvPr id="14" name="Chart 13"/>
+          <p:cNvGraphicFramePr>
+            <a:graphicFrameLocks noGrp="1"/>
+          </p:cNvGraphicFramePr>
+          <p:nvPr/>
+        </p:nvGraphicFramePr>
+        <p:xfrm>
+          <a:off x="457200" y="2604516"/>
+          <a:ext cx="11277295" cy="1499616"/>
+        </p:xfrm>
+        <a:graphic>
+          <a:graphicData uri="http://schemas.openxmlformats.org/drawingml/2006/chart">
+            <c:chart xmlns:c="http://schemas.openxmlformats.org/drawingml/2006/chart" r:id="rId3"/>
+          </a:graphicData>
+        </a:graphic>
+      </p:graphicFrame>
+      <p:sp>
+        <p:nvSpPr>
+          <p:cNvPr id="15" name="Rectangle 14"/>
+          <p:cNvSpPr/>
+          <p:nvPr/>
+        </p:nvSpPr>
+        <p:spPr>
+          <a:xfrm>
+            <a:off x="457200" y="4195572"/>
+            <a:ext cx="5501487" cy="899160"/>
+          </a:xfrm>
+          <a:prstGeom prst="rect">
+            <a:avLst/>
+          </a:prstGeom>
+          <a:solidFill>
+            <a:srgbClr val="FFFFFF"/>
+          </a:solidFill>
+          <a:ln>
+            <a:solidFill>
+              <a:srgbClr val="DCE8DC"/>
+            </a:solidFill>
+          </a:ln>
+        </p:spPr>
+        <p:style>
+          <a:lnRef idx="1">
+            <a:schemeClr val="accent1"/>
+          </a:lnRef>
+          <a:fillRef idx="3">
+            <a:schemeClr val="accent1"/>
+          </a:fillRef>
+          <a:effectRef idx="2">
+            <a:schemeClr val="accent1"/>
+          </a:effectRef>
+          <a:fontRef idx="minor">
+            <a:schemeClr val="lt1"/>
+          </a:fontRef>
+        </p:style>
+        <p:txBody>
+          <a:bodyPr rtlCol="0" anchor="ctr"/>
+          <a:lstStyle/>
+          <a:p>
+            <a:pPr algn="ctr">
+              <a:defRPr>
+                <a:latin typeface="Roboto"/>
+              </a:defRPr>
+            </a:pPr>
+          </a:p>
+        </p:txBody>
+      </p:sp>
+      <p:sp>
+        <p:nvSpPr>
+          <p:cNvPr id="16" name="TextBox 15"/>
+          <p:cNvSpPr txBox="1"/>
+          <p:nvPr/>
+        </p:nvSpPr>
+        <p:spPr>
+          <a:xfrm>
+            <a:off x="594360" y="4250436"/>
+            <a:ext cx="5227167" cy="274320"/>
+          </a:xfrm>
+          <a:prstGeom prst="rect">
+            <a:avLst/>
+          </a:prstGeom>
+          <a:noFill/>
+        </p:spPr>
+        <p:txBody>
+          <a:bodyPr wrap="square" lIns="45720" rIns="45720">
+            <a:spAutoFit/>
+          </a:bodyPr>
+          <a:lstStyle/>
+          <a:p>
+            <a:pPr>
+              <a:defRPr>
+                <a:latin typeface="Roboto"/>
+              </a:defRPr>
+            </a:pPr>
+            <a:r>
+              <a:rPr sz="1000" b="1">
+                <a:solidFill>
+                  <a:srgbClr val="5F6F63"/>
+                </a:solidFill>
+                <a:latin typeface="Roboto"/>
+              </a:rPr>
+              <a:t>WHAT IT SHOWS</a:t>
+            </a:r>
+          </a:p>
+        </p:txBody>
+      </p:sp>
+      <p:sp>
+        <p:nvSpPr>
+          <p:cNvPr id="17" name="TextBox 16"/>
+          <p:cNvSpPr txBox="1"/>
+          <p:nvPr/>
+        </p:nvSpPr>
+        <p:spPr>
+          <a:xfrm>
+            <a:off x="594360" y="4524756"/>
+            <a:ext cx="5227167" cy="533400"/>
+          </a:xfrm>
+          <a:prstGeom prst="rect">
+            <a:avLst/>
+          </a:prstGeom>
+          <a:noFill/>
+        </p:spPr>
+        <p:txBody>
+          <a:bodyPr wrap="square" lIns="45720" rIns="45720">
+            <a:spAutoFit/>
+          </a:bodyPr>
+          <a:lstStyle/>
+          <a:p>
+            <a:pPr>
+              <a:defRPr>
+                <a:latin typeface="Roboto"/>
+              </a:defRPr>
+            </a:pPr>
+            <a:r>
+              <a:rPr sz="1200" b="0">
+                <a:solidFill>
+                  <a:srgbClr val="25342A"/>
+                </a:solidFill>
+                <a:latin typeface="Roboto"/>
+              </a:rPr>
+              <a:t>May cost 10¢ to raise each dollar, against 11¢ in April. This financial year to date it has cost 13¢ a dollar.</a:t>
+            </a:r>
+          </a:p>
+        </p:txBody>
+      </p:sp>
+      <p:sp>
+        <p:nvSpPr>
+          <p:cNvPr id="18" name="Rectangle 17"/>
+          <p:cNvSpPr/>
+          <p:nvPr/>
+        </p:nvSpPr>
+        <p:spPr>
+          <a:xfrm>
+            <a:off x="6233007" y="4195572"/>
+            <a:ext cx="5501487" cy="899160"/>
+          </a:xfrm>
+          <a:prstGeom prst="rect">
+            <a:avLst/>
+          </a:prstGeom>
+          <a:solidFill>
+            <a:srgbClr val="EEF5F0"/>
+          </a:solidFill>
+          <a:ln>
+            <a:solidFill>
+              <a:srgbClr val="DCE8DC"/>
+            </a:solidFill>
+          </a:ln>
+        </p:spPr>
+        <p:style>
+          <a:lnRef idx="1">
+            <a:schemeClr val="accent1"/>
+          </a:lnRef>
+          <a:fillRef idx="3">
+            <a:schemeClr val="accent1"/>
+          </a:fillRef>
+          <a:effectRef idx="2">
+            <a:schemeClr val="accent1"/>
+          </a:effectRef>
+          <a:fontRef idx="minor">
+            <a:schemeClr val="lt1"/>
+          </a:fontRef>
+        </p:style>
+        <p:txBody>
+          <a:bodyPr rtlCol="0" anchor="ctr"/>
+          <a:lstStyle/>
+          <a:p>
+            <a:pPr algn="ctr">
+              <a:defRPr>
+                <a:latin typeface="Roboto"/>
+              </a:defRPr>
+            </a:pPr>
+          </a:p>
+        </p:txBody>
+      </p:sp>
+      <p:sp>
+        <p:nvSpPr>
+          <p:cNvPr id="19" name="TextBox 18"/>
+          <p:cNvSpPr txBox="1"/>
+          <p:nvPr/>
+        </p:nvSpPr>
+        <p:spPr>
+          <a:xfrm>
+            <a:off x="6370167" y="4250436"/>
+            <a:ext cx="5227167" cy="274320"/>
+          </a:xfrm>
+          <a:prstGeom prst="rect">
+            <a:avLst/>
+          </a:prstGeom>
+          <a:noFill/>
+        </p:spPr>
+        <p:txBody>
+          <a:bodyPr wrap="square" lIns="45720" rIns="45720">
+            <a:spAutoFit/>
+          </a:bodyPr>
+          <a:lstStyle/>
+          <a:p>
+            <a:pPr>
+              <a:defRPr>
+                <a:latin typeface="Roboto"/>
+              </a:defRPr>
+            </a:pPr>
+            <a:r>
+              <a:rPr sz="1000" b="1">
+                <a:solidFill>
+                  <a:srgbClr val="5F6F63"/>
+                </a:solidFill>
+                <a:latin typeface="Roboto"/>
+              </a:rPr>
+              <a:t>WHAT YOU'D DO ABOUT IT</a:t>
+            </a:r>
+          </a:p>
+        </p:txBody>
+      </p:sp>
+      <p:sp>
+        <p:nvSpPr>
+          <p:cNvPr id="20" name="TextBox 19"/>
+          <p:cNvSpPr txBox="1"/>
+          <p:nvPr/>
+        </p:nvSpPr>
+        <p:spPr>
+          <a:xfrm>
+            <a:off x="6370167" y="4524756"/>
+            <a:ext cx="5227167" cy="533400"/>
+          </a:xfrm>
+          <a:prstGeom prst="rect">
+            <a:avLst/>
+          </a:prstGeom>
+          <a:noFill/>
+        </p:spPr>
+        <p:txBody>
+          <a:bodyPr wrap="square" lIns="45720" rIns="45720">
+            <a:spAutoFit/>
+          </a:bodyPr>
+          <a:lstStyle/>
+          <a:p>
+            <a:pPr>
+              <a:defRPr>
+                <a:latin typeface="Roboto"/>
+              </a:defRPr>
+            </a:pPr>
+            <a:r>
+              <a:rPr sz="1200" b="0">
+                <a:solidFill>
+                  <a:srgbClr val="25342A"/>
+                </a:solidFill>
+                <a:latin typeface="Roboto"/>
+              </a:rPr>
+              <a:t>The year-to-date figure is steadier than single months: events make some months jump. Pick a source above to see which one moves it.</a:t>
+            </a:r>
+          </a:p>
+        </p:txBody>
+      </p:sp>
+      <p:sp>
+        <p:nvSpPr>
+          <p:cNvPr id="21" name="TextBox 20"/>
+          <p:cNvSpPr txBox="1"/>
+          <p:nvPr/>
+        </p:nvSpPr>
+        <p:spPr>
+          <a:xfrm>
+            <a:off x="457200" y="6492240"/>
+            <a:ext cx="2926080" cy="274320"/>
+          </a:xfrm>
+          <a:prstGeom prst="rect">
+            <a:avLst/>
+          </a:prstGeom>
+          <a:noFill/>
+        </p:spPr>
+        <p:txBody>
+          <a:bodyPr wrap="square" lIns="45720" rIns="45720">
+            <a:spAutoFit/>
+          </a:bodyPr>
+          <a:lstStyle/>
+          <a:p>
+            <a:pPr>
+              <a:defRPr>
+                <a:latin typeface="Roboto"/>
+              </a:defRPr>
+            </a:pPr>
+            <a:r>
               <a:rPr sz="900" b="0">
                 <a:solidFill>
                   <a:srgbClr val="5F6F63"/>
@@ -5330,14 +6002,14 @@
       </p:sp>
       <p:sp>
         <p:nvSpPr>
-          <p:cNvPr id="14" name="TextBox 13"/>
+          <p:cNvPr id="22" name="TextBox 21"/>
           <p:cNvSpPr txBox="1"/>
           <p:nvPr/>
         </p:nvSpPr>
         <p:spPr>
           <a:xfrm>
-            <a:off x="4297680" y="6492240"/>
-            <a:ext cx="3657600" cy="274320"/>
+            <a:off x="3108960" y="6492240"/>
+            <a:ext cx="5943600" cy="274320"/>
           </a:xfrm>
           <a:prstGeom prst="rect">
             <a:avLst/>
@@ -5345,7 +6017,7 @@
           <a:noFill/>
         </p:spPr>
         <p:txBody>
-          <a:bodyPr wrap="square">
+          <a:bodyPr wrap="square" lIns="45720" rIns="45720">
             <a:spAutoFit/>
           </a:bodyPr>
           <a:lstStyle/>
@@ -5362,14 +6034,14 @@
                 </a:solidFill>
                 <a:latin typeface="Roboto"/>
               </a:rPr>
-              <a:t>Data retrieved 2pm, Tue 6 Oct 2026 · Sample data</a:t>
-            </a:r>
-          </a:p>
-        </p:txBody>
-      </p:sp>
-      <p:sp>
-        <p:nvSpPr>
-          <p:cNvPr id="15" name="TextBox 14"/>
+              <a:t>Data retrieved 2pm, Tue 6 Oct 2026 · Generated 8 Oct 2026, 9:35am · Sample data · Made with Python (python-pptx)</a:t>
+            </a:r>
+          </a:p>
+        </p:txBody>
+      </p:sp>
+      <p:sp>
+        <p:nvSpPr>
+          <p:cNvPr id="23" name="TextBox 22"/>
           <p:cNvSpPr txBox="1"/>
           <p:nvPr/>
         </p:nvSpPr>
@@ -5384,7 +6056,7 @@
           <a:noFill/>
         </p:spPr>
         <p:txBody>
-          <a:bodyPr wrap="square">
+          <a:bodyPr wrap="square" lIns="45720" rIns="45720">
             <a:spAutoFit/>
           </a:bodyPr>
           <a:lstStyle/>
@@ -5401,7 +6073,7 @@
                 </a:solidFill>
                 <a:latin typeface="Roboto"/>
               </a:rPr>
-              <a:t>Slide 2 of 11</a:t>
+              <a:t>Slide 2 of 5</a:t>
             </a:r>
           </a:p>
         </p:txBody>
@@ -5426,7 +6098,44 @@
       <p:grpSpPr/>
       <p:sp>
         <p:nvSpPr>
-          <p:cNvPr id="2" name="Rectangle 1"/>
+          <p:cNvPr id="2" name="Title 1"/>
+          <p:cNvSpPr>
+            <a:spLocks noGrp="1"/>
+          </p:cNvSpPr>
+          <p:nvPr>
+            <p:ph type="title"/>
+          </p:nvPr>
+        </p:nvSpPr>
+        <p:spPr>
+          <a:xfrm>
+            <a:off x="457200" y="384048"/>
+            <a:ext cx="11277295" cy="475488"/>
+          </a:xfrm>
+        </p:spPr>
+        <p:txBody>
+          <a:bodyPr wrap="square" lIns="45720" rIns="45720" tIns="0" bIns="0" anchor="t"/>
+          <a:lstStyle/>
+          <a:p>
+            <a:pPr algn="l">
+              <a:defRPr>
+                <a:latin typeface="Roboto"/>
+              </a:defRPr>
+            </a:pPr>
+            <a:r>
+              <a:rPr sz="2400" b="1">
+                <a:solidFill>
+                  <a:srgbClr val="25342A"/>
+                </a:solidFill>
+                <a:latin typeface="Roboto"/>
+              </a:rPr>
+              <a:t>Grants</a:t>
+            </a:r>
+          </a:p>
+        </p:txBody>
+      </p:sp>
+      <p:sp>
+        <p:nvSpPr>
+          <p:cNvPr id="3" name="Rectangle 2"/>
           <p:cNvSpPr/>
           <p:nvPr/>
         </p:nvSpPr>
@@ -5473,53 +6182,14 @@
       </p:sp>
       <p:sp>
         <p:nvSpPr>
-          <p:cNvPr id="3" name="TextBox 2"/>
-          <p:cNvSpPr txBox="1"/>
-          <p:nvPr/>
-        </p:nvSpPr>
-        <p:spPr>
-          <a:xfrm>
-            <a:off x="457200" y="164592"/>
-            <a:ext cx="7315200" cy="274320"/>
-          </a:xfrm>
-          <a:prstGeom prst="rect">
-            <a:avLst/>
-          </a:prstGeom>
-          <a:noFill/>
-        </p:spPr>
-        <p:txBody>
-          <a:bodyPr wrap="square">
-            <a:spAutoFit/>
-          </a:bodyPr>
-          <a:lstStyle/>
-          <a:p>
-            <a:pPr>
-              <a:defRPr>
-                <a:latin typeface="Roboto"/>
-              </a:defRPr>
-            </a:pPr>
-            <a:r>
-              <a:rPr sz="1000" b="0">
-                <a:solidFill>
-                  <a:srgbClr val="5F6F63"/>
-                </a:solidFill>
-                <a:latin typeface="Roboto"/>
-              </a:rPr>
-              <a:t>Sample Community Services Ltd · What does it cost to raise a dollar?</a:t>
-            </a:r>
-          </a:p>
-        </p:txBody>
-      </p:sp>
-      <p:sp>
-        <p:nvSpPr>
           <p:cNvPr id="4" name="TextBox 3"/>
           <p:cNvSpPr txBox="1"/>
           <p:nvPr/>
         </p:nvSpPr>
         <p:spPr>
           <a:xfrm>
-            <a:off x="457200" y="411480"/>
-            <a:ext cx="11247120" cy="548640"/>
+            <a:off x="457200" y="146304"/>
+            <a:ext cx="8229600" cy="256032"/>
           </a:xfrm>
           <a:prstGeom prst="rect">
             <a:avLst/>
@@ -5527,7 +6197,7 @@
           <a:noFill/>
         </p:spPr>
         <p:txBody>
-          <a:bodyPr wrap="square">
+          <a:bodyPr wrap="square" lIns="45720" rIns="45720">
             <a:spAutoFit/>
           </a:bodyPr>
           <a:lstStyle/>
@@ -5538,45 +6208,465 @@
               </a:defRPr>
             </a:pPr>
             <a:r>
-              <a:rPr sz="2400" b="1">
-                <a:solidFill>
-                  <a:srgbClr val="25342A"/>
+              <a:rPr sz="1000" b="0">
+                <a:solidFill>
+                  <a:srgbClr val="5F6F63"/>
                 </a:solidFill>
                 <a:latin typeface="Roboto"/>
               </a:rPr>
-              <a:t>Cost to raise a dollar, by source, May 2026 (cents) · Source: All fundraising</a:t>
+              <a:t>Sample Community Services Ltd · What does it cost to raise a dollar?</a:t>
+            </a:r>
+          </a:p>
+        </p:txBody>
+      </p:sp>
+      <p:sp>
+        <p:nvSpPr>
+          <p:cNvPr id="5" name="TextBox 4"/>
+          <p:cNvSpPr txBox="1"/>
+          <p:nvPr/>
+        </p:nvSpPr>
+        <p:spPr>
+          <a:xfrm>
+            <a:off x="457200" y="914400"/>
+            <a:ext cx="11277295" cy="263652"/>
+          </a:xfrm>
+          <a:prstGeom prst="rect">
+            <a:avLst/>
+          </a:prstGeom>
+          <a:noFill/>
+        </p:spPr>
+        <p:txBody>
+          <a:bodyPr wrap="square" lIns="45720" rIns="45720">
+            <a:spAutoFit/>
+          </a:bodyPr>
+          <a:lstStyle/>
+          <a:p>
+            <a:pPr>
+              <a:defRPr>
+                <a:latin typeface="Roboto"/>
+              </a:defRPr>
+            </a:pPr>
+            <a:r>
+              <a:rPr sz="1200" b="0">
+                <a:solidFill>
+                  <a:srgbClr val="5F6F63"/>
+                </a:solidFill>
+                <a:latin typeface="Roboto"/>
+              </a:rPr>
+              <a:t>Cost to raise a dollar, by month (cents) · Grants</a:t>
+            </a:r>
+          </a:p>
+        </p:txBody>
+      </p:sp>
+      <p:sp>
+        <p:nvSpPr>
+          <p:cNvPr id="6" name="Rectangle 5"/>
+          <p:cNvSpPr/>
+          <p:nvPr/>
+        </p:nvSpPr>
+        <p:spPr>
+          <a:xfrm>
+            <a:off x="457200" y="1278636"/>
+            <a:ext cx="5524347" cy="1188720"/>
+          </a:xfrm>
+          <a:prstGeom prst="rect">
+            <a:avLst/>
+          </a:prstGeom>
+          <a:solidFill>
+            <a:srgbClr val="F7FAF7"/>
+          </a:solidFill>
+          <a:ln>
+            <a:solidFill>
+              <a:srgbClr val="DCE8DC"/>
+            </a:solidFill>
+          </a:ln>
+        </p:spPr>
+        <p:style>
+          <a:lnRef idx="1">
+            <a:schemeClr val="accent1"/>
+          </a:lnRef>
+          <a:fillRef idx="3">
+            <a:schemeClr val="accent1"/>
+          </a:fillRef>
+          <a:effectRef idx="2">
+            <a:schemeClr val="accent1"/>
+          </a:effectRef>
+          <a:fontRef idx="minor">
+            <a:schemeClr val="lt1"/>
+          </a:fontRef>
+        </p:style>
+        <p:txBody>
+          <a:bodyPr rtlCol="0" anchor="ctr"/>
+          <a:lstStyle/>
+          <a:p>
+            <a:pPr algn="ctr">
+              <a:defRPr>
+                <a:latin typeface="Roboto"/>
+              </a:defRPr>
+            </a:pPr>
+          </a:p>
+        </p:txBody>
+      </p:sp>
+      <p:sp>
+        <p:nvSpPr>
+          <p:cNvPr id="7" name="TextBox 6"/>
+          <p:cNvSpPr txBox="1"/>
+          <p:nvPr/>
+        </p:nvSpPr>
+        <p:spPr>
+          <a:xfrm>
+            <a:off x="594360" y="1351788"/>
+            <a:ext cx="5250027" cy="384048"/>
+          </a:xfrm>
+          <a:prstGeom prst="rect">
+            <a:avLst/>
+          </a:prstGeom>
+          <a:noFill/>
+        </p:spPr>
+        <p:txBody>
+          <a:bodyPr wrap="square" lIns="45720" rIns="45720">
+            <a:spAutoFit/>
+          </a:bodyPr>
+          <a:lstStyle/>
+          <a:p>
+            <a:pPr>
+              <a:defRPr>
+                <a:latin typeface="Roboto"/>
+              </a:defRPr>
+            </a:pPr>
+            <a:r>
+              <a:rPr sz="1100" b="0">
+                <a:solidFill>
+                  <a:srgbClr val="5F6F63"/>
+                </a:solidFill>
+                <a:latin typeface="Roboto"/>
+              </a:rPr>
+              <a:t>May · Grants</a:t>
+            </a:r>
+          </a:p>
+        </p:txBody>
+      </p:sp>
+      <p:sp>
+        <p:nvSpPr>
+          <p:cNvPr id="8" name="TextBox 7"/>
+          <p:cNvSpPr txBox="1"/>
+          <p:nvPr/>
+        </p:nvSpPr>
+        <p:spPr>
+          <a:xfrm>
+            <a:off x="594360" y="1717548"/>
+            <a:ext cx="5250027" cy="502920"/>
+          </a:xfrm>
+          <a:prstGeom prst="rect">
+            <a:avLst/>
+          </a:prstGeom>
+          <a:noFill/>
+        </p:spPr>
+        <p:txBody>
+          <a:bodyPr wrap="square" lIns="45720" rIns="45720">
+            <a:spAutoFit/>
+          </a:bodyPr>
+          <a:lstStyle/>
+          <a:p>
+            <a:pPr>
+              <a:defRPr>
+                <a:latin typeface="Roboto"/>
+              </a:defRPr>
+            </a:pPr>
+            <a:r>
+              <a:rPr sz="2200" b="1">
+                <a:solidFill>
+                  <a:srgbClr val="2F7A5D"/>
+                </a:solidFill>
+                <a:latin typeface="Roboto"/>
+              </a:rPr>
+              <a:t>10¢</a:t>
+            </a:r>
+          </a:p>
+        </p:txBody>
+      </p:sp>
+      <p:sp>
+        <p:nvSpPr>
+          <p:cNvPr id="9" name="TextBox 8"/>
+          <p:cNvSpPr txBox="1"/>
+          <p:nvPr/>
+        </p:nvSpPr>
+        <p:spPr>
+          <a:xfrm>
+            <a:off x="594360" y="2083308"/>
+            <a:ext cx="5250027" cy="329184"/>
+          </a:xfrm>
+          <a:prstGeom prst="rect">
+            <a:avLst/>
+          </a:prstGeom>
+          <a:noFill/>
+        </p:spPr>
+        <p:txBody>
+          <a:bodyPr wrap="square" lIns="45720" rIns="45720">
+            <a:spAutoFit/>
+          </a:bodyPr>
+          <a:lstStyle/>
+          <a:p>
+            <a:pPr>
+              <a:defRPr>
+                <a:latin typeface="Roboto"/>
+              </a:defRPr>
+            </a:pPr>
+            <a:r>
+              <a:rPr sz="1000" b="0">
+                <a:solidFill>
+                  <a:srgbClr val="5F6F63"/>
+                </a:solidFill>
+                <a:latin typeface="Roboto"/>
+              </a:rPr>
+              <a:t>April 11¢</a:t>
+            </a:r>
+          </a:p>
+        </p:txBody>
+      </p:sp>
+      <p:sp>
+        <p:nvSpPr>
+          <p:cNvPr id="10" name="Rectangle 9"/>
+          <p:cNvSpPr/>
+          <p:nvPr/>
+        </p:nvSpPr>
+        <p:spPr>
+          <a:xfrm>
+            <a:off x="6210147" y="1278636"/>
+            <a:ext cx="5524347" cy="1188720"/>
+          </a:xfrm>
+          <a:prstGeom prst="rect">
+            <a:avLst/>
+          </a:prstGeom>
+          <a:solidFill>
+            <a:srgbClr val="F7FAF7"/>
+          </a:solidFill>
+          <a:ln>
+            <a:solidFill>
+              <a:srgbClr val="DCE8DC"/>
+            </a:solidFill>
+          </a:ln>
+        </p:spPr>
+        <p:style>
+          <a:lnRef idx="1">
+            <a:schemeClr val="accent1"/>
+          </a:lnRef>
+          <a:fillRef idx="3">
+            <a:schemeClr val="accent1"/>
+          </a:fillRef>
+          <a:effectRef idx="2">
+            <a:schemeClr val="accent1"/>
+          </a:effectRef>
+          <a:fontRef idx="minor">
+            <a:schemeClr val="lt1"/>
+          </a:fontRef>
+        </p:style>
+        <p:txBody>
+          <a:bodyPr rtlCol="0" anchor="ctr"/>
+          <a:lstStyle/>
+          <a:p>
+            <a:pPr algn="ctr">
+              <a:defRPr>
+                <a:latin typeface="Roboto"/>
+              </a:defRPr>
+            </a:pPr>
+          </a:p>
+        </p:txBody>
+      </p:sp>
+      <p:sp>
+        <p:nvSpPr>
+          <p:cNvPr id="11" name="TextBox 10"/>
+          <p:cNvSpPr txBox="1"/>
+          <p:nvPr/>
+        </p:nvSpPr>
+        <p:spPr>
+          <a:xfrm>
+            <a:off x="6347307" y="1351788"/>
+            <a:ext cx="5250027" cy="384048"/>
+          </a:xfrm>
+          <a:prstGeom prst="rect">
+            <a:avLst/>
+          </a:prstGeom>
+          <a:noFill/>
+        </p:spPr>
+        <p:txBody>
+          <a:bodyPr wrap="square" lIns="45720" rIns="45720">
+            <a:spAutoFit/>
+          </a:bodyPr>
+          <a:lstStyle/>
+          <a:p>
+            <a:pPr>
+              <a:defRPr>
+                <a:latin typeface="Roboto"/>
+              </a:defRPr>
+            </a:pPr>
+            <a:r>
+              <a:rPr sz="1100" b="0">
+                <a:solidFill>
+                  <a:srgbClr val="5F6F63"/>
+                </a:solidFill>
+                <a:latin typeface="Roboto"/>
+              </a:rPr>
+              <a:t>Year to date (Jul to May 2026)</a:t>
+            </a:r>
+          </a:p>
+        </p:txBody>
+      </p:sp>
+      <p:sp>
+        <p:nvSpPr>
+          <p:cNvPr id="12" name="TextBox 11"/>
+          <p:cNvSpPr txBox="1"/>
+          <p:nvPr/>
+        </p:nvSpPr>
+        <p:spPr>
+          <a:xfrm>
+            <a:off x="6347307" y="1717548"/>
+            <a:ext cx="5250027" cy="502920"/>
+          </a:xfrm>
+          <a:prstGeom prst="rect">
+            <a:avLst/>
+          </a:prstGeom>
+          <a:noFill/>
+        </p:spPr>
+        <p:txBody>
+          <a:bodyPr wrap="square" lIns="45720" rIns="45720">
+            <a:spAutoFit/>
+          </a:bodyPr>
+          <a:lstStyle/>
+          <a:p>
+            <a:pPr>
+              <a:defRPr>
+                <a:latin typeface="Roboto"/>
+              </a:defRPr>
+            </a:pPr>
+            <a:r>
+              <a:rPr sz="2200" b="1">
+                <a:solidFill>
+                  <a:srgbClr val="2F7A5D"/>
+                </a:solidFill>
+                <a:latin typeface="Roboto"/>
+              </a:rPr>
+              <a:t>11¢</a:t>
+            </a:r>
+          </a:p>
+        </p:txBody>
+      </p:sp>
+      <p:sp>
+        <p:nvSpPr>
+          <p:cNvPr id="13" name="TextBox 12"/>
+          <p:cNvSpPr txBox="1"/>
+          <p:nvPr/>
+        </p:nvSpPr>
+        <p:spPr>
+          <a:xfrm>
+            <a:off x="6347307" y="2083308"/>
+            <a:ext cx="5250027" cy="329184"/>
+          </a:xfrm>
+          <a:prstGeom prst="rect">
+            <a:avLst/>
+          </a:prstGeom>
+          <a:noFill/>
+        </p:spPr>
+        <p:txBody>
+          <a:bodyPr wrap="square" lIns="45720" rIns="45720">
+            <a:spAutoFit/>
+          </a:bodyPr>
+          <a:lstStyle/>
+          <a:p>
+            <a:pPr>
+              <a:defRPr>
+                <a:latin typeface="Roboto"/>
+              </a:defRPr>
+            </a:pPr>
+            <a:r>
+              <a:rPr sz="1000" b="0">
+                <a:solidFill>
+                  <a:srgbClr val="5F6F63"/>
+                </a:solidFill>
+                <a:latin typeface="Roboto"/>
+              </a:rPr>
+              <a:t>same period last year: not in the data</a:t>
             </a:r>
           </a:p>
         </p:txBody>
       </p:sp>
       <p:graphicFrame>
         <p:nvGraphicFramePr>
-          <p:cNvPr id="5" name="Chart 4"/>
+          <p:cNvPr id="14" name="Chart 13"/>
           <p:cNvGraphicFramePr>
             <a:graphicFrameLocks noGrp="1"/>
           </p:cNvGraphicFramePr>
           <p:nvPr/>
         </p:nvGraphicFramePr>
         <p:xfrm>
-          <a:off x="457200" y="1188720"/>
-          <a:ext cx="11247120" cy="5029200"/>
+          <a:off x="457200" y="2604516"/>
+          <a:ext cx="11277295" cy="2714244"/>
         </p:xfrm>
         <a:graphic>
           <a:graphicData uri="http://schemas.openxmlformats.org/drawingml/2006/chart">
-            <c:chart xmlns:c="http://schemas.openxmlformats.org/drawingml/2006/chart" r:id="rId2"/>
+            <c:chart xmlns:c="http://schemas.openxmlformats.org/drawingml/2006/chart" r:id="rId3"/>
           </a:graphicData>
         </a:graphic>
       </p:graphicFrame>
       <p:sp>
         <p:nvSpPr>
-          <p:cNvPr id="6" name="TextBox 5"/>
+          <p:cNvPr id="15" name="Rectangle 14"/>
+          <p:cNvSpPr/>
+          <p:nvPr/>
+        </p:nvSpPr>
+        <p:spPr>
+          <a:xfrm>
+            <a:off x="457200" y="5410200"/>
+            <a:ext cx="5501487" cy="899160"/>
+          </a:xfrm>
+          <a:prstGeom prst="rect">
+            <a:avLst/>
+          </a:prstGeom>
+          <a:solidFill>
+            <a:srgbClr val="FFFFFF"/>
+          </a:solidFill>
+          <a:ln>
+            <a:solidFill>
+              <a:srgbClr val="DCE8DC"/>
+            </a:solidFill>
+          </a:ln>
+        </p:spPr>
+        <p:style>
+          <a:lnRef idx="1">
+            <a:schemeClr val="accent1"/>
+          </a:lnRef>
+          <a:fillRef idx="3">
+            <a:schemeClr val="accent1"/>
+          </a:fillRef>
+          <a:effectRef idx="2">
+            <a:schemeClr val="accent1"/>
+          </a:effectRef>
+          <a:fontRef idx="minor">
+            <a:schemeClr val="lt1"/>
+          </a:fontRef>
+        </p:style>
+        <p:txBody>
+          <a:bodyPr rtlCol="0" anchor="ctr"/>
+          <a:lstStyle/>
+          <a:p>
+            <a:pPr algn="ctr">
+              <a:defRPr>
+                <a:latin typeface="Roboto"/>
+              </a:defRPr>
+            </a:pPr>
+          </a:p>
+        </p:txBody>
+      </p:sp>
+      <p:sp>
+        <p:nvSpPr>
+          <p:cNvPr id="16" name="TextBox 15"/>
           <p:cNvSpPr txBox="1"/>
           <p:nvPr/>
         </p:nvSpPr>
         <p:spPr>
           <a:xfrm>
-            <a:off x="457200" y="6492240"/>
-            <a:ext cx="3657600" cy="274320"/>
+            <a:off x="594360" y="5465064"/>
+            <a:ext cx="5227167" cy="274320"/>
           </a:xfrm>
           <a:prstGeom prst="rect">
             <a:avLst/>
@@ -5584,7 +6674,7 @@
           <a:noFill/>
         </p:spPr>
         <p:txBody>
-          <a:bodyPr wrap="square">
+          <a:bodyPr wrap="square" lIns="45720" rIns="45720">
             <a:spAutoFit/>
           </a:bodyPr>
           <a:lstStyle/>
@@ -5595,6 +6685,211 @@
               </a:defRPr>
             </a:pPr>
             <a:r>
+              <a:rPr sz="1000" b="1">
+                <a:solidFill>
+                  <a:srgbClr val="5F6F63"/>
+                </a:solidFill>
+                <a:latin typeface="Roboto"/>
+              </a:rPr>
+              <a:t>WHAT IT SHOWS</a:t>
+            </a:r>
+          </a:p>
+        </p:txBody>
+      </p:sp>
+      <p:sp>
+        <p:nvSpPr>
+          <p:cNvPr id="17" name="TextBox 16"/>
+          <p:cNvSpPr txBox="1"/>
+          <p:nvPr/>
+        </p:nvSpPr>
+        <p:spPr>
+          <a:xfrm>
+            <a:off x="594360" y="5739384"/>
+            <a:ext cx="5227167" cy="533400"/>
+          </a:xfrm>
+          <a:prstGeom prst="rect">
+            <a:avLst/>
+          </a:prstGeom>
+          <a:noFill/>
+        </p:spPr>
+        <p:txBody>
+          <a:bodyPr wrap="square" lIns="45720" rIns="45720">
+            <a:spAutoFit/>
+          </a:bodyPr>
+          <a:lstStyle/>
+          <a:p>
+            <a:pPr>
+              <a:defRPr>
+                <a:latin typeface="Roboto"/>
+              </a:defRPr>
+            </a:pPr>
+            <a:r>
+              <a:rPr sz="1200" b="0">
+                <a:solidFill>
+                  <a:srgbClr val="25342A"/>
+                </a:solidFill>
+                <a:latin typeface="Roboto"/>
+              </a:rPr>
+              <a:t>Grants cost 11¢ to raise each dollar this financial year to date ($78,100 of grant writing and reporting for $699,210).</a:t>
+            </a:r>
+          </a:p>
+        </p:txBody>
+      </p:sp>
+      <p:sp>
+        <p:nvSpPr>
+          <p:cNvPr id="18" name="Rectangle 17"/>
+          <p:cNvSpPr/>
+          <p:nvPr/>
+        </p:nvSpPr>
+        <p:spPr>
+          <a:xfrm>
+            <a:off x="6233007" y="5410200"/>
+            <a:ext cx="5501487" cy="899160"/>
+          </a:xfrm>
+          <a:prstGeom prst="rect">
+            <a:avLst/>
+          </a:prstGeom>
+          <a:solidFill>
+            <a:srgbClr val="EEF5F0"/>
+          </a:solidFill>
+          <a:ln>
+            <a:solidFill>
+              <a:srgbClr val="DCE8DC"/>
+            </a:solidFill>
+          </a:ln>
+        </p:spPr>
+        <p:style>
+          <a:lnRef idx="1">
+            <a:schemeClr val="accent1"/>
+          </a:lnRef>
+          <a:fillRef idx="3">
+            <a:schemeClr val="accent1"/>
+          </a:fillRef>
+          <a:effectRef idx="2">
+            <a:schemeClr val="accent1"/>
+          </a:effectRef>
+          <a:fontRef idx="minor">
+            <a:schemeClr val="lt1"/>
+          </a:fontRef>
+        </p:style>
+        <p:txBody>
+          <a:bodyPr rtlCol="0" anchor="ctr"/>
+          <a:lstStyle/>
+          <a:p>
+            <a:pPr algn="ctr">
+              <a:defRPr>
+                <a:latin typeface="Roboto"/>
+              </a:defRPr>
+            </a:pPr>
+          </a:p>
+        </p:txBody>
+      </p:sp>
+      <p:sp>
+        <p:nvSpPr>
+          <p:cNvPr id="19" name="TextBox 18"/>
+          <p:cNvSpPr txBox="1"/>
+          <p:nvPr/>
+        </p:nvSpPr>
+        <p:spPr>
+          <a:xfrm>
+            <a:off x="6370167" y="5465064"/>
+            <a:ext cx="5227167" cy="274320"/>
+          </a:xfrm>
+          <a:prstGeom prst="rect">
+            <a:avLst/>
+          </a:prstGeom>
+          <a:noFill/>
+        </p:spPr>
+        <p:txBody>
+          <a:bodyPr wrap="square" lIns="45720" rIns="45720">
+            <a:spAutoFit/>
+          </a:bodyPr>
+          <a:lstStyle/>
+          <a:p>
+            <a:pPr>
+              <a:defRPr>
+                <a:latin typeface="Roboto"/>
+              </a:defRPr>
+            </a:pPr>
+            <a:r>
+              <a:rPr sz="1000" b="1">
+                <a:solidFill>
+                  <a:srgbClr val="5F6F63"/>
+                </a:solidFill>
+                <a:latin typeface="Roboto"/>
+              </a:rPr>
+              <a:t>WHAT YOU'D DO ABOUT IT</a:t>
+            </a:r>
+          </a:p>
+        </p:txBody>
+      </p:sp>
+      <p:sp>
+        <p:nvSpPr>
+          <p:cNvPr id="20" name="TextBox 19"/>
+          <p:cNvSpPr txBox="1"/>
+          <p:nvPr/>
+        </p:nvSpPr>
+        <p:spPr>
+          <a:xfrm>
+            <a:off x="6370167" y="5739384"/>
+            <a:ext cx="5227167" cy="533400"/>
+          </a:xfrm>
+          <a:prstGeom prst="rect">
+            <a:avLst/>
+          </a:prstGeom>
+          <a:noFill/>
+        </p:spPr>
+        <p:txBody>
+          <a:bodyPr wrap="square" lIns="45720" rIns="45720">
+            <a:spAutoFit/>
+          </a:bodyPr>
+          <a:lstStyle/>
+          <a:p>
+            <a:pPr>
+              <a:defRPr>
+                <a:latin typeface="Roboto"/>
+              </a:defRPr>
+            </a:pPr>
+            <a:r>
+              <a:rPr sz="1200" b="0">
+                <a:solidFill>
+                  <a:srgbClr val="25342A"/>
+                </a:solidFill>
+                <a:latin typeface="Roboto"/>
+              </a:rPr>
+              <a:t>Usually the cheapest money to raise, as long as the time that goes into applications and acquittals is protected.</a:t>
+            </a:r>
+          </a:p>
+        </p:txBody>
+      </p:sp>
+      <p:sp>
+        <p:nvSpPr>
+          <p:cNvPr id="21" name="TextBox 20"/>
+          <p:cNvSpPr txBox="1"/>
+          <p:nvPr/>
+        </p:nvSpPr>
+        <p:spPr>
+          <a:xfrm>
+            <a:off x="457200" y="6492240"/>
+            <a:ext cx="2926080" cy="274320"/>
+          </a:xfrm>
+          <a:prstGeom prst="rect">
+            <a:avLst/>
+          </a:prstGeom>
+          <a:noFill/>
+        </p:spPr>
+        <p:txBody>
+          <a:bodyPr wrap="square" lIns="45720" rIns="45720">
+            <a:spAutoFit/>
+          </a:bodyPr>
+          <a:lstStyle/>
+          <a:p>
+            <a:pPr>
+              <a:defRPr>
+                <a:latin typeface="Roboto"/>
+              </a:defRPr>
+            </a:pPr>
+            <a:r>
               <a:rPr sz="900" b="0">
                 <a:solidFill>
                   <a:srgbClr val="5F6F63"/>
@@ -5608,14 +6903,14 @@
       </p:sp>
       <p:sp>
         <p:nvSpPr>
-          <p:cNvPr id="7" name="TextBox 6"/>
+          <p:cNvPr id="22" name="TextBox 21"/>
           <p:cNvSpPr txBox="1"/>
           <p:nvPr/>
         </p:nvSpPr>
         <p:spPr>
           <a:xfrm>
-            <a:off x="4297680" y="6492240"/>
-            <a:ext cx="3657600" cy="274320"/>
+            <a:off x="3108960" y="6492240"/>
+            <a:ext cx="5943600" cy="274320"/>
           </a:xfrm>
           <a:prstGeom prst="rect">
             <a:avLst/>
@@ -5623,7 +6918,7 @@
           <a:noFill/>
         </p:spPr>
         <p:txBody>
-          <a:bodyPr wrap="square">
+          <a:bodyPr wrap="square" lIns="45720" rIns="45720">
             <a:spAutoFit/>
           </a:bodyPr>
           <a:lstStyle/>
@@ -5640,14 +6935,14 @@
                 </a:solidFill>
                 <a:latin typeface="Roboto"/>
               </a:rPr>
-              <a:t>Data retrieved 2pm, Tue 6 Oct 2026 · Sample data</a:t>
-            </a:r>
-          </a:p>
-        </p:txBody>
-      </p:sp>
-      <p:sp>
-        <p:nvSpPr>
-          <p:cNvPr id="8" name="TextBox 7"/>
+              <a:t>Data retrieved 2pm, Tue 6 Oct 2026 · Generated 8 Oct 2026, 9:35am · Sample data · Made with Python (python-pptx)</a:t>
+            </a:r>
+          </a:p>
+        </p:txBody>
+      </p:sp>
+      <p:sp>
+        <p:nvSpPr>
+          <p:cNvPr id="23" name="TextBox 22"/>
           <p:cNvSpPr txBox="1"/>
           <p:nvPr/>
         </p:nvSpPr>
@@ -5662,7 +6957,7 @@
           <a:noFill/>
         </p:spPr>
         <p:txBody>
-          <a:bodyPr wrap="square">
+          <a:bodyPr wrap="square" lIns="45720" rIns="45720">
             <a:spAutoFit/>
           </a:bodyPr>
           <a:lstStyle/>
@@ -5679,7 +6974,7 @@
                 </a:solidFill>
                 <a:latin typeface="Roboto"/>
               </a:rPr>
-              <a:t>Slide 3 of 11</a:t>
+              <a:t>Slide 3 of 5</a:t>
             </a:r>
           </a:p>
         </p:txBody>
@@ -5704,7 +6999,44 @@
       <p:grpSpPr/>
       <p:sp>
         <p:nvSpPr>
-          <p:cNvPr id="2" name="Rectangle 1"/>
+          <p:cNvPr id="2" name="Title 1"/>
+          <p:cNvSpPr>
+            <a:spLocks noGrp="1"/>
+          </p:cNvSpPr>
+          <p:nvPr>
+            <p:ph type="title"/>
+          </p:nvPr>
+        </p:nvSpPr>
+        <p:spPr>
+          <a:xfrm>
+            <a:off x="457200" y="384048"/>
+            <a:ext cx="11277295" cy="475488"/>
+          </a:xfrm>
+        </p:spPr>
+        <p:txBody>
+          <a:bodyPr wrap="square" lIns="45720" rIns="45720" tIns="0" bIns="0" anchor="t"/>
+          <a:lstStyle/>
+          <a:p>
+            <a:pPr algn="l">
+              <a:defRPr>
+                <a:latin typeface="Roboto"/>
+              </a:defRPr>
+            </a:pPr>
+            <a:r>
+              <a:rPr sz="2400" b="1">
+                <a:solidFill>
+                  <a:srgbClr val="25342A"/>
+                </a:solidFill>
+                <a:latin typeface="Roboto"/>
+              </a:rPr>
+              <a:t>Donations</a:t>
+            </a:r>
+          </a:p>
+        </p:txBody>
+      </p:sp>
+      <p:sp>
+        <p:nvSpPr>
+          <p:cNvPr id="3" name="Rectangle 2"/>
           <p:cNvSpPr/>
           <p:nvPr/>
         </p:nvSpPr>
@@ -5751,53 +7083,14 @@
       </p:sp>
       <p:sp>
         <p:nvSpPr>
-          <p:cNvPr id="3" name="TextBox 2"/>
-          <p:cNvSpPr txBox="1"/>
-          <p:nvPr/>
-        </p:nvSpPr>
-        <p:spPr>
-          <a:xfrm>
-            <a:off x="457200" y="164592"/>
-            <a:ext cx="7315200" cy="274320"/>
-          </a:xfrm>
-          <a:prstGeom prst="rect">
-            <a:avLst/>
-          </a:prstGeom>
-          <a:noFill/>
-        </p:spPr>
-        <p:txBody>
-          <a:bodyPr wrap="square">
-            <a:spAutoFit/>
-          </a:bodyPr>
-          <a:lstStyle/>
-          <a:p>
-            <a:pPr>
-              <a:defRPr>
-                <a:latin typeface="Roboto"/>
-              </a:defRPr>
-            </a:pPr>
-            <a:r>
-              <a:rPr sz="1000" b="0">
-                <a:solidFill>
-                  <a:srgbClr val="5F6F63"/>
-                </a:solidFill>
-                <a:latin typeface="Roboto"/>
-              </a:rPr>
-              <a:t>Sample Community Services Ltd · What does it cost to raise a dollar?</a:t>
-            </a:r>
-          </a:p>
-        </p:txBody>
-      </p:sp>
-      <p:sp>
-        <p:nvSpPr>
           <p:cNvPr id="4" name="TextBox 3"/>
           <p:cNvSpPr txBox="1"/>
           <p:nvPr/>
         </p:nvSpPr>
         <p:spPr>
           <a:xfrm>
-            <a:off x="457200" y="411480"/>
-            <a:ext cx="11247120" cy="548640"/>
+            <a:off x="457200" y="146304"/>
+            <a:ext cx="8229600" cy="256032"/>
           </a:xfrm>
           <a:prstGeom prst="rect">
             <a:avLst/>
@@ -5805,7 +7098,7 @@
           <a:noFill/>
         </p:spPr>
         <p:txBody>
-          <a:bodyPr wrap="square">
+          <a:bodyPr wrap="square" lIns="45720" rIns="45720">
             <a:spAutoFit/>
           </a:bodyPr>
           <a:lstStyle/>
@@ -5816,33 +7109,72 @@
               </a:defRPr>
             </a:pPr>
             <a:r>
-              <a:rPr sz="2400" b="1">
-                <a:solidFill>
-                  <a:srgbClr val="25342A"/>
+              <a:rPr sz="1000" b="0">
+                <a:solidFill>
+                  <a:srgbClr val="5F6F63"/>
                 </a:solidFill>
                 <a:latin typeface="Roboto"/>
               </a:rPr>
-              <a:t>What it shows · Source: All fundraising</a:t>
-            </a:r>
-          </a:p>
-        </p:txBody>
-      </p:sp>
-      <p:sp>
-        <p:nvSpPr>
-          <p:cNvPr id="5" name="Rectangle 4"/>
+              <a:t>Sample Community Services Ltd · What does it cost to raise a dollar?</a:t>
+            </a:r>
+          </a:p>
+        </p:txBody>
+      </p:sp>
+      <p:sp>
+        <p:nvSpPr>
+          <p:cNvPr id="5" name="TextBox 4"/>
+          <p:cNvSpPr txBox="1"/>
+          <p:nvPr/>
+        </p:nvSpPr>
+        <p:spPr>
+          <a:xfrm>
+            <a:off x="457200" y="914400"/>
+            <a:ext cx="11277295" cy="263652"/>
+          </a:xfrm>
+          <a:prstGeom prst="rect">
+            <a:avLst/>
+          </a:prstGeom>
+          <a:noFill/>
+        </p:spPr>
+        <p:txBody>
+          <a:bodyPr wrap="square" lIns="45720" rIns="45720">
+            <a:spAutoFit/>
+          </a:bodyPr>
+          <a:lstStyle/>
+          <a:p>
+            <a:pPr>
+              <a:defRPr>
+                <a:latin typeface="Roboto"/>
+              </a:defRPr>
+            </a:pPr>
+            <a:r>
+              <a:rPr sz="1200" b="0">
+                <a:solidFill>
+                  <a:srgbClr val="5F6F63"/>
+                </a:solidFill>
+                <a:latin typeface="Roboto"/>
+              </a:rPr>
+              <a:t>Cost to raise a dollar, by month (cents) · Donations</a:t>
+            </a:r>
+          </a:p>
+        </p:txBody>
+      </p:sp>
+      <p:sp>
+        <p:nvSpPr>
+          <p:cNvPr id="6" name="Rectangle 5"/>
           <p:cNvSpPr/>
           <p:nvPr/>
         </p:nvSpPr>
         <p:spPr>
           <a:xfrm>
-            <a:off x="457200" y="1554480"/>
-            <a:ext cx="5501487" cy="4389120"/>
+            <a:off x="457200" y="1278636"/>
+            <a:ext cx="5524347" cy="1188720"/>
           </a:xfrm>
           <a:prstGeom prst="rect">
             <a:avLst/>
           </a:prstGeom>
           <a:solidFill>
-            <a:srgbClr val="FFFFFF"/>
+            <a:srgbClr val="F7FAF7"/>
           </a:solidFill>
           <a:ln>
             <a:solidFill>
@@ -5878,53 +7210,14 @@
       </p:sp>
       <p:sp>
         <p:nvSpPr>
-          <p:cNvPr id="6" name="TextBox 5"/>
-          <p:cNvSpPr txBox="1"/>
-          <p:nvPr/>
-        </p:nvSpPr>
-        <p:spPr>
-          <a:xfrm>
-            <a:off x="685800" y="1691640"/>
-            <a:ext cx="5044287" cy="365760"/>
-          </a:xfrm>
-          <a:prstGeom prst="rect">
-            <a:avLst/>
-          </a:prstGeom>
-          <a:noFill/>
-        </p:spPr>
-        <p:txBody>
-          <a:bodyPr wrap="square">
-            <a:spAutoFit/>
-          </a:bodyPr>
-          <a:lstStyle/>
-          <a:p>
-            <a:pPr>
-              <a:defRPr>
-                <a:latin typeface="Roboto"/>
-              </a:defRPr>
-            </a:pPr>
-            <a:r>
-              <a:rPr sz="1100" b="1">
-                <a:solidFill>
-                  <a:srgbClr val="5F6F63"/>
-                </a:solidFill>
-                <a:latin typeface="Roboto"/>
-              </a:rPr>
-              <a:t>WHAT IT SHOWS</a:t>
-            </a:r>
-          </a:p>
-        </p:txBody>
-      </p:sp>
-      <p:sp>
-        <p:nvSpPr>
           <p:cNvPr id="7" name="TextBox 6"/>
           <p:cNvSpPr txBox="1"/>
           <p:nvPr/>
         </p:nvSpPr>
         <p:spPr>
           <a:xfrm>
-            <a:off x="685800" y="2103120"/>
-            <a:ext cx="5044287" cy="3749039"/>
+            <a:off x="594360" y="1351788"/>
+            <a:ext cx="5250027" cy="384048"/>
           </a:xfrm>
           <a:prstGeom prst="rect">
             <a:avLst/>
@@ -5932,7 +7225,7 @@
           <a:noFill/>
         </p:spPr>
         <p:txBody>
-          <a:bodyPr wrap="square">
+          <a:bodyPr wrap="square" lIns="45720" rIns="45720">
             <a:spAutoFit/>
           </a:bodyPr>
           <a:lstStyle/>
@@ -5943,33 +7236,111 @@
               </a:defRPr>
             </a:pPr>
             <a:r>
-              <a:rPr sz="1600" b="0">
-                <a:solidFill>
-                  <a:srgbClr val="25342A"/>
+              <a:rPr sz="1100" b="0">
+                <a:solidFill>
+                  <a:srgbClr val="5F6F63"/>
                 </a:solidFill>
                 <a:latin typeface="Roboto"/>
               </a:rPr>
-              <a:t>May cost 10¢ to raise each dollar, against 11¢ in April. This financial year to date it has cost 13¢ a dollar.</a:t>
-            </a:r>
-          </a:p>
-        </p:txBody>
-      </p:sp>
-      <p:sp>
-        <p:nvSpPr>
-          <p:cNvPr id="8" name="Rectangle 7"/>
+              <a:t>May · Donations</a:t>
+            </a:r>
+          </a:p>
+        </p:txBody>
+      </p:sp>
+      <p:sp>
+        <p:nvSpPr>
+          <p:cNvPr id="8" name="TextBox 7"/>
+          <p:cNvSpPr txBox="1"/>
+          <p:nvPr/>
+        </p:nvSpPr>
+        <p:spPr>
+          <a:xfrm>
+            <a:off x="594360" y="1717548"/>
+            <a:ext cx="5250027" cy="502920"/>
+          </a:xfrm>
+          <a:prstGeom prst="rect">
+            <a:avLst/>
+          </a:prstGeom>
+          <a:noFill/>
+        </p:spPr>
+        <p:txBody>
+          <a:bodyPr wrap="square" lIns="45720" rIns="45720">
+            <a:spAutoFit/>
+          </a:bodyPr>
+          <a:lstStyle/>
+          <a:p>
+            <a:pPr>
+              <a:defRPr>
+                <a:latin typeface="Roboto"/>
+              </a:defRPr>
+            </a:pPr>
+            <a:r>
+              <a:rPr sz="2200" b="1">
+                <a:solidFill>
+                  <a:srgbClr val="2F7A5D"/>
+                </a:solidFill>
+                <a:latin typeface="Roboto"/>
+              </a:rPr>
+              <a:t>13¢</a:t>
+            </a:r>
+          </a:p>
+        </p:txBody>
+      </p:sp>
+      <p:sp>
+        <p:nvSpPr>
+          <p:cNvPr id="9" name="TextBox 8"/>
+          <p:cNvSpPr txBox="1"/>
+          <p:nvPr/>
+        </p:nvSpPr>
+        <p:spPr>
+          <a:xfrm>
+            <a:off x="594360" y="2083308"/>
+            <a:ext cx="5250027" cy="329184"/>
+          </a:xfrm>
+          <a:prstGeom prst="rect">
+            <a:avLst/>
+          </a:prstGeom>
+          <a:noFill/>
+        </p:spPr>
+        <p:txBody>
+          <a:bodyPr wrap="square" lIns="45720" rIns="45720">
+            <a:spAutoFit/>
+          </a:bodyPr>
+          <a:lstStyle/>
+          <a:p>
+            <a:pPr>
+              <a:defRPr>
+                <a:latin typeface="Roboto"/>
+              </a:defRPr>
+            </a:pPr>
+            <a:r>
+              <a:rPr sz="1000" b="0">
+                <a:solidFill>
+                  <a:srgbClr val="5F6F63"/>
+                </a:solidFill>
+                <a:latin typeface="Roboto"/>
+              </a:rPr>
+              <a:t>April 13¢</a:t>
+            </a:r>
+          </a:p>
+        </p:txBody>
+      </p:sp>
+      <p:sp>
+        <p:nvSpPr>
+          <p:cNvPr id="10" name="Rectangle 9"/>
           <p:cNvSpPr/>
           <p:nvPr/>
         </p:nvSpPr>
         <p:spPr>
           <a:xfrm>
-            <a:off x="6233007" y="1554480"/>
-            <a:ext cx="5501487" cy="4389120"/>
+            <a:off x="6210147" y="1278636"/>
+            <a:ext cx="5524347" cy="1188720"/>
           </a:xfrm>
           <a:prstGeom prst="rect">
             <a:avLst/>
           </a:prstGeom>
           <a:solidFill>
-            <a:srgbClr val="EEF5F0"/>
+            <a:srgbClr val="F7FAF7"/>
           </a:solidFill>
           <a:ln>
             <a:solidFill>
@@ -6005,92 +7376,14 @@
       </p:sp>
       <p:sp>
         <p:nvSpPr>
-          <p:cNvPr id="9" name="TextBox 8"/>
-          <p:cNvSpPr txBox="1"/>
-          <p:nvPr/>
-        </p:nvSpPr>
-        <p:spPr>
-          <a:xfrm>
-            <a:off x="6461607" y="1691640"/>
-            <a:ext cx="5044287" cy="365760"/>
-          </a:xfrm>
-          <a:prstGeom prst="rect">
-            <a:avLst/>
-          </a:prstGeom>
-          <a:noFill/>
-        </p:spPr>
-        <p:txBody>
-          <a:bodyPr wrap="square">
-            <a:spAutoFit/>
-          </a:bodyPr>
-          <a:lstStyle/>
-          <a:p>
-            <a:pPr>
-              <a:defRPr>
-                <a:latin typeface="Roboto"/>
-              </a:defRPr>
-            </a:pPr>
-            <a:r>
-              <a:rPr sz="1100" b="1">
-                <a:solidFill>
-                  <a:srgbClr val="5F6F63"/>
-                </a:solidFill>
-                <a:latin typeface="Roboto"/>
-              </a:rPr>
-              <a:t>WHAT YOU'D DO ABOUT IT</a:t>
-            </a:r>
-          </a:p>
-        </p:txBody>
-      </p:sp>
-      <p:sp>
-        <p:nvSpPr>
-          <p:cNvPr id="10" name="TextBox 9"/>
-          <p:cNvSpPr txBox="1"/>
-          <p:nvPr/>
-        </p:nvSpPr>
-        <p:spPr>
-          <a:xfrm>
-            <a:off x="6461607" y="2103120"/>
-            <a:ext cx="5044287" cy="3749039"/>
-          </a:xfrm>
-          <a:prstGeom prst="rect">
-            <a:avLst/>
-          </a:prstGeom>
-          <a:noFill/>
-        </p:spPr>
-        <p:txBody>
-          <a:bodyPr wrap="square">
-            <a:spAutoFit/>
-          </a:bodyPr>
-          <a:lstStyle/>
-          <a:p>
-            <a:pPr>
-              <a:defRPr>
-                <a:latin typeface="Roboto"/>
-              </a:defRPr>
-            </a:pPr>
-            <a:r>
-              <a:rPr sz="1600" b="0">
-                <a:solidFill>
-                  <a:srgbClr val="25342A"/>
-                </a:solidFill>
-                <a:latin typeface="Roboto"/>
-              </a:rPr>
-              <a:t>The year-to-date figure is steadier than single months: events make some months jump. Pick a source above to see which one moves it.</a:t>
-            </a:r>
-          </a:p>
-        </p:txBody>
-      </p:sp>
-      <p:sp>
-        <p:nvSpPr>
           <p:cNvPr id="11" name="TextBox 10"/>
           <p:cNvSpPr txBox="1"/>
           <p:nvPr/>
         </p:nvSpPr>
         <p:spPr>
           <a:xfrm>
-            <a:off x="457200" y="6492240"/>
-            <a:ext cx="3657600" cy="274320"/>
+            <a:off x="6347307" y="1351788"/>
+            <a:ext cx="5250027" cy="384048"/>
           </a:xfrm>
           <a:prstGeom prst="rect">
             <a:avLst/>
@@ -6098,7 +7391,7 @@
           <a:noFill/>
         </p:spPr>
         <p:txBody>
-          <a:bodyPr wrap="square">
+          <a:bodyPr wrap="square" lIns="45720" rIns="45720">
             <a:spAutoFit/>
           </a:bodyPr>
           <a:lstStyle/>
@@ -6109,13 +7402,13 @@
               </a:defRPr>
             </a:pPr>
             <a:r>
-              <a:rPr sz="900" b="0">
+              <a:rPr sz="1100" b="0">
                 <a:solidFill>
                   <a:srgbClr val="5F6F63"/>
                 </a:solidFill>
                 <a:latin typeface="Roboto"/>
               </a:rPr>
-              <a:t>cost-to-raise.pptx</a:t>
+              <a:t>Year to date (Jul to May 2026)</a:t>
             </a:r>
           </a:p>
         </p:txBody>
@@ -6128,8 +7421,8 @@
         </p:nvSpPr>
         <p:spPr>
           <a:xfrm>
-            <a:off x="4297680" y="6492240"/>
-            <a:ext cx="3657600" cy="274320"/>
+            <a:off x="6347307" y="1717548"/>
+            <a:ext cx="5250027" cy="502920"/>
           </a:xfrm>
           <a:prstGeom prst="rect">
             <a:avLst/>
@@ -6137,24 +7430,24 @@
           <a:noFill/>
         </p:spPr>
         <p:txBody>
-          <a:bodyPr wrap="square">
+          <a:bodyPr wrap="square" lIns="45720" rIns="45720">
             <a:spAutoFit/>
           </a:bodyPr>
           <a:lstStyle/>
           <a:p>
-            <a:pPr algn="ctr">
-              <a:defRPr>
-                <a:latin typeface="Roboto"/>
-              </a:defRPr>
-            </a:pPr>
-            <a:r>
-              <a:rPr sz="900" b="0">
-                <a:solidFill>
-                  <a:srgbClr val="5F6F63"/>
+            <a:pPr>
+              <a:defRPr>
+                <a:latin typeface="Roboto"/>
+              </a:defRPr>
+            </a:pPr>
+            <a:r>
+              <a:rPr sz="2200" b="1">
+                <a:solidFill>
+                  <a:srgbClr val="2F7A5D"/>
                 </a:solidFill>
                 <a:latin typeface="Roboto"/>
               </a:rPr>
-              <a:t>Data retrieved 2pm, Tue 6 Oct 2026 · Sample data</a:t>
+              <a:t>15¢</a:t>
             </a:r>
           </a:p>
         </p:txBody>
@@ -6167,6 +7460,395 @@
         </p:nvSpPr>
         <p:spPr>
           <a:xfrm>
+            <a:off x="6347307" y="2083308"/>
+            <a:ext cx="5250027" cy="329184"/>
+          </a:xfrm>
+          <a:prstGeom prst="rect">
+            <a:avLst/>
+          </a:prstGeom>
+          <a:noFill/>
+        </p:spPr>
+        <p:txBody>
+          <a:bodyPr wrap="square" lIns="45720" rIns="45720">
+            <a:spAutoFit/>
+          </a:bodyPr>
+          <a:lstStyle/>
+          <a:p>
+            <a:pPr>
+              <a:defRPr>
+                <a:latin typeface="Roboto"/>
+              </a:defRPr>
+            </a:pPr>
+            <a:r>
+              <a:rPr sz="1000" b="0">
+                <a:solidFill>
+                  <a:srgbClr val="5F6F63"/>
+                </a:solidFill>
+                <a:latin typeface="Roboto"/>
+              </a:rPr>
+              <a:t>same period last year: not in the data</a:t>
+            </a:r>
+          </a:p>
+        </p:txBody>
+      </p:sp>
+      <p:graphicFrame>
+        <p:nvGraphicFramePr>
+          <p:cNvPr id="14" name="Chart 13"/>
+          <p:cNvGraphicFramePr>
+            <a:graphicFrameLocks noGrp="1"/>
+          </p:cNvGraphicFramePr>
+          <p:nvPr/>
+        </p:nvGraphicFramePr>
+        <p:xfrm>
+          <a:off x="457200" y="2604516"/>
+          <a:ext cx="11277295" cy="2714244"/>
+        </p:xfrm>
+        <a:graphic>
+          <a:graphicData uri="http://schemas.openxmlformats.org/drawingml/2006/chart">
+            <c:chart xmlns:c="http://schemas.openxmlformats.org/drawingml/2006/chart" r:id="rId3"/>
+          </a:graphicData>
+        </a:graphic>
+      </p:graphicFrame>
+      <p:sp>
+        <p:nvSpPr>
+          <p:cNvPr id="15" name="Rectangle 14"/>
+          <p:cNvSpPr/>
+          <p:nvPr/>
+        </p:nvSpPr>
+        <p:spPr>
+          <a:xfrm>
+            <a:off x="457200" y="5410200"/>
+            <a:ext cx="5501487" cy="899160"/>
+          </a:xfrm>
+          <a:prstGeom prst="rect">
+            <a:avLst/>
+          </a:prstGeom>
+          <a:solidFill>
+            <a:srgbClr val="FFFFFF"/>
+          </a:solidFill>
+          <a:ln>
+            <a:solidFill>
+              <a:srgbClr val="DCE8DC"/>
+            </a:solidFill>
+          </a:ln>
+        </p:spPr>
+        <p:style>
+          <a:lnRef idx="1">
+            <a:schemeClr val="accent1"/>
+          </a:lnRef>
+          <a:fillRef idx="3">
+            <a:schemeClr val="accent1"/>
+          </a:fillRef>
+          <a:effectRef idx="2">
+            <a:schemeClr val="accent1"/>
+          </a:effectRef>
+          <a:fontRef idx="minor">
+            <a:schemeClr val="lt1"/>
+          </a:fontRef>
+        </p:style>
+        <p:txBody>
+          <a:bodyPr rtlCol="0" anchor="ctr"/>
+          <a:lstStyle/>
+          <a:p>
+            <a:pPr algn="ctr">
+              <a:defRPr>
+                <a:latin typeface="Roboto"/>
+              </a:defRPr>
+            </a:pPr>
+          </a:p>
+        </p:txBody>
+      </p:sp>
+      <p:sp>
+        <p:nvSpPr>
+          <p:cNvPr id="16" name="TextBox 15"/>
+          <p:cNvSpPr txBox="1"/>
+          <p:nvPr/>
+        </p:nvSpPr>
+        <p:spPr>
+          <a:xfrm>
+            <a:off x="594360" y="5465064"/>
+            <a:ext cx="5227167" cy="274320"/>
+          </a:xfrm>
+          <a:prstGeom prst="rect">
+            <a:avLst/>
+          </a:prstGeom>
+          <a:noFill/>
+        </p:spPr>
+        <p:txBody>
+          <a:bodyPr wrap="square" lIns="45720" rIns="45720">
+            <a:spAutoFit/>
+          </a:bodyPr>
+          <a:lstStyle/>
+          <a:p>
+            <a:pPr>
+              <a:defRPr>
+                <a:latin typeface="Roboto"/>
+              </a:defRPr>
+            </a:pPr>
+            <a:r>
+              <a:rPr sz="1000" b="1">
+                <a:solidFill>
+                  <a:srgbClr val="5F6F63"/>
+                </a:solidFill>
+                <a:latin typeface="Roboto"/>
+              </a:rPr>
+              <a:t>WHAT IT SHOWS</a:t>
+            </a:r>
+          </a:p>
+        </p:txBody>
+      </p:sp>
+      <p:sp>
+        <p:nvSpPr>
+          <p:cNvPr id="17" name="TextBox 16"/>
+          <p:cNvSpPr txBox="1"/>
+          <p:nvPr/>
+        </p:nvSpPr>
+        <p:spPr>
+          <a:xfrm>
+            <a:off x="594360" y="5739384"/>
+            <a:ext cx="5227167" cy="533400"/>
+          </a:xfrm>
+          <a:prstGeom prst="rect">
+            <a:avLst/>
+          </a:prstGeom>
+          <a:noFill/>
+        </p:spPr>
+        <p:txBody>
+          <a:bodyPr wrap="square" lIns="45720" rIns="45720">
+            <a:spAutoFit/>
+          </a:bodyPr>
+          <a:lstStyle/>
+          <a:p>
+            <a:pPr>
+              <a:defRPr>
+                <a:latin typeface="Roboto"/>
+              </a:defRPr>
+            </a:pPr>
+            <a:r>
+              <a:rPr sz="1200" b="0">
+                <a:solidFill>
+                  <a:srgbClr val="25342A"/>
+                </a:solidFill>
+                <a:latin typeface="Roboto"/>
+              </a:rPr>
+              <a:t>Donations cost 15¢ to raise each dollar this financial year to date ($27,300 of donor campaigns for $185,800).</a:t>
+            </a:r>
+          </a:p>
+        </p:txBody>
+      </p:sp>
+      <p:sp>
+        <p:nvSpPr>
+          <p:cNvPr id="18" name="Rectangle 17"/>
+          <p:cNvSpPr/>
+          <p:nvPr/>
+        </p:nvSpPr>
+        <p:spPr>
+          <a:xfrm>
+            <a:off x="6233007" y="5410200"/>
+            <a:ext cx="5501487" cy="899160"/>
+          </a:xfrm>
+          <a:prstGeom prst="rect">
+            <a:avLst/>
+          </a:prstGeom>
+          <a:solidFill>
+            <a:srgbClr val="EEF5F0"/>
+          </a:solidFill>
+          <a:ln>
+            <a:solidFill>
+              <a:srgbClr val="DCE8DC"/>
+            </a:solidFill>
+          </a:ln>
+        </p:spPr>
+        <p:style>
+          <a:lnRef idx="1">
+            <a:schemeClr val="accent1"/>
+          </a:lnRef>
+          <a:fillRef idx="3">
+            <a:schemeClr val="accent1"/>
+          </a:fillRef>
+          <a:effectRef idx="2">
+            <a:schemeClr val="accent1"/>
+          </a:effectRef>
+          <a:fontRef idx="minor">
+            <a:schemeClr val="lt1"/>
+          </a:fontRef>
+        </p:style>
+        <p:txBody>
+          <a:bodyPr rtlCol="0" anchor="ctr"/>
+          <a:lstStyle/>
+          <a:p>
+            <a:pPr algn="ctr">
+              <a:defRPr>
+                <a:latin typeface="Roboto"/>
+              </a:defRPr>
+            </a:pPr>
+          </a:p>
+        </p:txBody>
+      </p:sp>
+      <p:sp>
+        <p:nvSpPr>
+          <p:cNvPr id="19" name="TextBox 18"/>
+          <p:cNvSpPr txBox="1"/>
+          <p:nvPr/>
+        </p:nvSpPr>
+        <p:spPr>
+          <a:xfrm>
+            <a:off x="6370167" y="5465064"/>
+            <a:ext cx="5227167" cy="274320"/>
+          </a:xfrm>
+          <a:prstGeom prst="rect">
+            <a:avLst/>
+          </a:prstGeom>
+          <a:noFill/>
+        </p:spPr>
+        <p:txBody>
+          <a:bodyPr wrap="square" lIns="45720" rIns="45720">
+            <a:spAutoFit/>
+          </a:bodyPr>
+          <a:lstStyle/>
+          <a:p>
+            <a:pPr>
+              <a:defRPr>
+                <a:latin typeface="Roboto"/>
+              </a:defRPr>
+            </a:pPr>
+            <a:r>
+              <a:rPr sz="1000" b="1">
+                <a:solidFill>
+                  <a:srgbClr val="5F6F63"/>
+                </a:solidFill>
+                <a:latin typeface="Roboto"/>
+              </a:rPr>
+              <a:t>WHAT YOU'D DO ABOUT IT</a:t>
+            </a:r>
+          </a:p>
+        </p:txBody>
+      </p:sp>
+      <p:sp>
+        <p:nvSpPr>
+          <p:cNvPr id="20" name="TextBox 19"/>
+          <p:cNvSpPr txBox="1"/>
+          <p:nvPr/>
+        </p:nvSpPr>
+        <p:spPr>
+          <a:xfrm>
+            <a:off x="6370167" y="5739384"/>
+            <a:ext cx="5227167" cy="533400"/>
+          </a:xfrm>
+          <a:prstGeom prst="rect">
+            <a:avLst/>
+          </a:prstGeom>
+          <a:noFill/>
+        </p:spPr>
+        <p:txBody>
+          <a:bodyPr wrap="square" lIns="45720" rIns="45720">
+            <a:spAutoFit/>
+          </a:bodyPr>
+          <a:lstStyle/>
+          <a:p>
+            <a:pPr>
+              <a:defRPr>
+                <a:latin typeface="Roboto"/>
+              </a:defRPr>
+            </a:pPr>
+            <a:r>
+              <a:rPr sz="1200" b="0">
+                <a:solidFill>
+                  <a:srgbClr val="25342A"/>
+                </a:solidFill>
+                <a:latin typeface="Roboto"/>
+              </a:rPr>
+              <a:t>Steady and cheap, and untied: the money that builds reserves.</a:t>
+            </a:r>
+          </a:p>
+        </p:txBody>
+      </p:sp>
+      <p:sp>
+        <p:nvSpPr>
+          <p:cNvPr id="21" name="TextBox 20"/>
+          <p:cNvSpPr txBox="1"/>
+          <p:nvPr/>
+        </p:nvSpPr>
+        <p:spPr>
+          <a:xfrm>
+            <a:off x="457200" y="6492240"/>
+            <a:ext cx="2926080" cy="274320"/>
+          </a:xfrm>
+          <a:prstGeom prst="rect">
+            <a:avLst/>
+          </a:prstGeom>
+          <a:noFill/>
+        </p:spPr>
+        <p:txBody>
+          <a:bodyPr wrap="square" lIns="45720" rIns="45720">
+            <a:spAutoFit/>
+          </a:bodyPr>
+          <a:lstStyle/>
+          <a:p>
+            <a:pPr>
+              <a:defRPr>
+                <a:latin typeface="Roboto"/>
+              </a:defRPr>
+            </a:pPr>
+            <a:r>
+              <a:rPr sz="900" b="0">
+                <a:solidFill>
+                  <a:srgbClr val="5F6F63"/>
+                </a:solidFill>
+                <a:latin typeface="Roboto"/>
+              </a:rPr>
+              <a:t>cost-to-raise.pptx</a:t>
+            </a:r>
+          </a:p>
+        </p:txBody>
+      </p:sp>
+      <p:sp>
+        <p:nvSpPr>
+          <p:cNvPr id="22" name="TextBox 21"/>
+          <p:cNvSpPr txBox="1"/>
+          <p:nvPr/>
+        </p:nvSpPr>
+        <p:spPr>
+          <a:xfrm>
+            <a:off x="3108960" y="6492240"/>
+            <a:ext cx="5943600" cy="274320"/>
+          </a:xfrm>
+          <a:prstGeom prst="rect">
+            <a:avLst/>
+          </a:prstGeom>
+          <a:noFill/>
+        </p:spPr>
+        <p:txBody>
+          <a:bodyPr wrap="square" lIns="45720" rIns="45720">
+            <a:spAutoFit/>
+          </a:bodyPr>
+          <a:lstStyle/>
+          <a:p>
+            <a:pPr algn="ctr">
+              <a:defRPr>
+                <a:latin typeface="Roboto"/>
+              </a:defRPr>
+            </a:pPr>
+            <a:r>
+              <a:rPr sz="900" b="0">
+                <a:solidFill>
+                  <a:srgbClr val="5F6F63"/>
+                </a:solidFill>
+                <a:latin typeface="Roboto"/>
+              </a:rPr>
+              <a:t>Data retrieved 2pm, Tue 6 Oct 2026 · Generated 8 Oct 2026, 9:35am · Sample data · Made with Python (python-pptx)</a:t>
+            </a:r>
+          </a:p>
+        </p:txBody>
+      </p:sp>
+      <p:sp>
+        <p:nvSpPr>
+          <p:cNvPr id="23" name="TextBox 22"/>
+          <p:cNvSpPr txBox="1"/>
+          <p:nvPr/>
+        </p:nvSpPr>
+        <p:spPr>
+          <a:xfrm>
             <a:off x="8503920" y="6492240"/>
             <a:ext cx="3200400" cy="274320"/>
           </a:xfrm>
@@ -6176,7 +7858,7 @@
           <a:noFill/>
         </p:spPr>
         <p:txBody>
-          <a:bodyPr wrap="square">
+          <a:bodyPr wrap="square" lIns="45720" rIns="45720">
             <a:spAutoFit/>
           </a:bodyPr>
           <a:lstStyle/>
@@ -6193,7 +7875,7 @@
                 </a:solidFill>
                 <a:latin typeface="Roboto"/>
               </a:rPr>
-              <a:t>Slide 4 of 11</a:t>
+              <a:t>Slide 4 of 5</a:t>
             </a:r>
           </a:p>
         </p:txBody>
@@ -6218,7 +7900,44 @@
       <p:grpSpPr/>
       <p:sp>
         <p:nvSpPr>
-          <p:cNvPr id="2" name="Rectangle 1"/>
+          <p:cNvPr id="2" name="Title 1"/>
+          <p:cNvSpPr>
+            <a:spLocks noGrp="1"/>
+          </p:cNvSpPr>
+          <p:nvPr>
+            <p:ph type="title"/>
+          </p:nvPr>
+        </p:nvSpPr>
+        <p:spPr>
+          <a:xfrm>
+            <a:off x="457200" y="384048"/>
+            <a:ext cx="11277295" cy="475488"/>
+          </a:xfrm>
+        </p:spPr>
+        <p:txBody>
+          <a:bodyPr wrap="square" lIns="45720" rIns="45720" tIns="0" bIns="0" anchor="t"/>
+          <a:lstStyle/>
+          <a:p>
+            <a:pPr algn="l">
+              <a:defRPr>
+                <a:latin typeface="Roboto"/>
+              </a:defRPr>
+            </a:pPr>
+            <a:r>
+              <a:rPr sz="2400" b="1">
+                <a:solidFill>
+                  <a:srgbClr val="25342A"/>
+                </a:solidFill>
+                <a:latin typeface="Roboto"/>
+              </a:rPr>
+              <a:t>Fundraising events</a:t>
+            </a:r>
+          </a:p>
+        </p:txBody>
+      </p:sp>
+      <p:sp>
+        <p:nvSpPr>
+          <p:cNvPr id="3" name="Rectangle 2"/>
           <p:cNvSpPr/>
           <p:nvPr/>
         </p:nvSpPr>
@@ -6265,53 +7984,14 @@
       </p:sp>
       <p:sp>
         <p:nvSpPr>
-          <p:cNvPr id="3" name="TextBox 2"/>
-          <p:cNvSpPr txBox="1"/>
-          <p:nvPr/>
-        </p:nvSpPr>
-        <p:spPr>
-          <a:xfrm>
-            <a:off x="457200" y="164592"/>
-            <a:ext cx="7315200" cy="274320"/>
-          </a:xfrm>
-          <a:prstGeom prst="rect">
-            <a:avLst/>
-          </a:prstGeom>
-          <a:noFill/>
-        </p:spPr>
-        <p:txBody>
-          <a:bodyPr wrap="square">
-            <a:spAutoFit/>
-          </a:bodyPr>
-          <a:lstStyle/>
-          <a:p>
-            <a:pPr>
-              <a:defRPr>
-                <a:latin typeface="Roboto"/>
-              </a:defRPr>
-            </a:pPr>
-            <a:r>
-              <a:rPr sz="1000" b="0">
-                <a:solidFill>
-                  <a:srgbClr val="5F6F63"/>
-                </a:solidFill>
-                <a:latin typeface="Roboto"/>
-              </a:rPr>
-              <a:t>Sample Community Services Ltd · What does it cost to raise a dollar?</a:t>
-            </a:r>
-          </a:p>
-        </p:txBody>
-      </p:sp>
-      <p:sp>
-        <p:nvSpPr>
           <p:cNvPr id="4" name="TextBox 3"/>
           <p:cNvSpPr txBox="1"/>
           <p:nvPr/>
         </p:nvSpPr>
         <p:spPr>
           <a:xfrm>
-            <a:off x="457200" y="411480"/>
-            <a:ext cx="11247120" cy="548640"/>
+            <a:off x="457200" y="146304"/>
+            <a:ext cx="8229600" cy="256032"/>
           </a:xfrm>
           <a:prstGeom prst="rect">
             <a:avLst/>
@@ -6319,7 +7999,7 @@
           <a:noFill/>
         </p:spPr>
         <p:txBody>
-          <a:bodyPr wrap="square">
+          <a:bodyPr wrap="square" lIns="45720" rIns="45720">
             <a:spAutoFit/>
           </a:bodyPr>
           <a:lstStyle/>
@@ -6330,27 +8010,66 @@
               </a:defRPr>
             </a:pPr>
             <a:r>
-              <a:rPr sz="2400" b="1">
-                <a:solidFill>
-                  <a:srgbClr val="25342A"/>
+              <a:rPr sz="1000" b="0">
+                <a:solidFill>
+                  <a:srgbClr val="5F6F63"/>
                 </a:solidFill>
                 <a:latin typeface="Roboto"/>
               </a:rPr>
-              <a:t>Headline numbers · Source: Grants</a:t>
-            </a:r>
-          </a:p>
-        </p:txBody>
-      </p:sp>
-      <p:sp>
-        <p:nvSpPr>
-          <p:cNvPr id="5" name="Rectangle 4"/>
+              <a:t>Sample Community Services Ltd · What does it cost to raise a dollar?</a:t>
+            </a:r>
+          </a:p>
+        </p:txBody>
+      </p:sp>
+      <p:sp>
+        <p:nvSpPr>
+          <p:cNvPr id="5" name="TextBox 4"/>
+          <p:cNvSpPr txBox="1"/>
+          <p:nvPr/>
+        </p:nvSpPr>
+        <p:spPr>
+          <a:xfrm>
+            <a:off x="457200" y="914400"/>
+            <a:ext cx="11277295" cy="263652"/>
+          </a:xfrm>
+          <a:prstGeom prst="rect">
+            <a:avLst/>
+          </a:prstGeom>
+          <a:noFill/>
+        </p:spPr>
+        <p:txBody>
+          <a:bodyPr wrap="square" lIns="45720" rIns="45720">
+            <a:spAutoFit/>
+          </a:bodyPr>
+          <a:lstStyle/>
+          <a:p>
+            <a:pPr>
+              <a:defRPr>
+                <a:latin typeface="Roboto"/>
+              </a:defRPr>
+            </a:pPr>
+            <a:r>
+              <a:rPr sz="1200" b="0">
+                <a:solidFill>
+                  <a:srgbClr val="5F6F63"/>
+                </a:solidFill>
+                <a:latin typeface="Roboto"/>
+              </a:rPr>
+              <a:t>Cost to raise a dollar, by month (cents) · Fundraising events</a:t>
+            </a:r>
+          </a:p>
+        </p:txBody>
+      </p:sp>
+      <p:sp>
+        <p:nvSpPr>
+          <p:cNvPr id="6" name="Rectangle 5"/>
           <p:cNvSpPr/>
           <p:nvPr/>
         </p:nvSpPr>
         <p:spPr>
           <a:xfrm>
-            <a:off x="457200" y="1645920"/>
-            <a:ext cx="5501487" cy="2011680"/>
+            <a:off x="457200" y="1278636"/>
+            <a:ext cx="5524347" cy="1188720"/>
           </a:xfrm>
           <a:prstGeom prst="rect">
             <a:avLst/>
@@ -6392,53 +8111,14 @@
       </p:sp>
       <p:sp>
         <p:nvSpPr>
-          <p:cNvPr id="6" name="TextBox 5"/>
-          <p:cNvSpPr txBox="1"/>
-          <p:nvPr/>
-        </p:nvSpPr>
-        <p:spPr>
-          <a:xfrm>
-            <a:off x="640080" y="1783080"/>
-            <a:ext cx="5135727" cy="457200"/>
-          </a:xfrm>
-          <a:prstGeom prst="rect">
-            <a:avLst/>
-          </a:prstGeom>
-          <a:noFill/>
-        </p:spPr>
-        <p:txBody>
-          <a:bodyPr wrap="square">
-            <a:spAutoFit/>
-          </a:bodyPr>
-          <a:lstStyle/>
-          <a:p>
-            <a:pPr>
-              <a:defRPr>
-                <a:latin typeface="Roboto"/>
-              </a:defRPr>
-            </a:pPr>
-            <a:r>
-              <a:rPr sz="1200" b="0">
-                <a:solidFill>
-                  <a:srgbClr val="5F6F63"/>
-                </a:solidFill>
-                <a:latin typeface="Roboto"/>
-              </a:rPr>
-              <a:t>May · Grants</a:t>
-            </a:r>
-          </a:p>
-        </p:txBody>
-      </p:sp>
-      <p:sp>
-        <p:nvSpPr>
           <p:cNvPr id="7" name="TextBox 6"/>
           <p:cNvSpPr txBox="1"/>
           <p:nvPr/>
         </p:nvSpPr>
         <p:spPr>
           <a:xfrm>
-            <a:off x="640080" y="2240280"/>
-            <a:ext cx="5135727" cy="731520"/>
+            <a:off x="594360" y="1351788"/>
+            <a:ext cx="5250027" cy="384048"/>
           </a:xfrm>
           <a:prstGeom prst="rect">
             <a:avLst/>
@@ -6446,7 +8126,7 @@
           <a:noFill/>
         </p:spPr>
         <p:txBody>
-          <a:bodyPr wrap="square">
+          <a:bodyPr wrap="square" lIns="45720" rIns="45720">
             <a:spAutoFit/>
           </a:bodyPr>
           <a:lstStyle/>
@@ -6457,13 +8137,13 @@
               </a:defRPr>
             </a:pPr>
             <a:r>
-              <a:rPr sz="3000" b="1">
-                <a:solidFill>
-                  <a:srgbClr val="2F7A5D"/>
+              <a:rPr sz="1100" b="0">
+                <a:solidFill>
+                  <a:srgbClr val="5F6F63"/>
                 </a:solidFill>
                 <a:latin typeface="Roboto"/>
               </a:rPr>
-              <a:t>10¢</a:t>
+              <a:t>May · Fundraising events</a:t>
             </a:r>
           </a:p>
         </p:txBody>
@@ -6476,8 +8156,8 @@
         </p:nvSpPr>
         <p:spPr>
           <a:xfrm>
-            <a:off x="640080" y="3017520"/>
-            <a:ext cx="5135727" cy="548640"/>
+            <a:off x="594360" y="1717548"/>
+            <a:ext cx="5250027" cy="502920"/>
           </a:xfrm>
           <a:prstGeom prst="rect">
             <a:avLst/>
@@ -6485,7 +8165,7 @@
           <a:noFill/>
         </p:spPr>
         <p:txBody>
-          <a:bodyPr wrap="square">
+          <a:bodyPr wrap="square" lIns="45720" rIns="45720">
             <a:spAutoFit/>
           </a:bodyPr>
           <a:lstStyle/>
@@ -6496,27 +8176,66 @@
               </a:defRPr>
             </a:pPr>
             <a:r>
-              <a:rPr sz="1100" b="0">
+              <a:rPr sz="2200" b="1">
+                <a:solidFill>
+                  <a:srgbClr val="2F7A5D"/>
+                </a:solidFill>
+                <a:latin typeface="Roboto"/>
+              </a:rPr>
+              <a:t>–</a:t>
+            </a:r>
+          </a:p>
+        </p:txBody>
+      </p:sp>
+      <p:sp>
+        <p:nvSpPr>
+          <p:cNvPr id="9" name="TextBox 8"/>
+          <p:cNvSpPr txBox="1"/>
+          <p:nvPr/>
+        </p:nvSpPr>
+        <p:spPr>
+          <a:xfrm>
+            <a:off x="594360" y="2083308"/>
+            <a:ext cx="5250027" cy="329184"/>
+          </a:xfrm>
+          <a:prstGeom prst="rect">
+            <a:avLst/>
+          </a:prstGeom>
+          <a:noFill/>
+        </p:spPr>
+        <p:txBody>
+          <a:bodyPr wrap="square" lIns="45720" rIns="45720">
+            <a:spAutoFit/>
+          </a:bodyPr>
+          <a:lstStyle/>
+          <a:p>
+            <a:pPr>
+              <a:defRPr>
+                <a:latin typeface="Roboto"/>
+              </a:defRPr>
+            </a:pPr>
+            <a:r>
+              <a:rPr sz="1000" b="0">
                 <a:solidFill>
                   <a:srgbClr val="5F6F63"/>
                 </a:solidFill>
                 <a:latin typeface="Roboto"/>
               </a:rPr>
-              <a:t>April 11¢</a:t>
-            </a:r>
-          </a:p>
-        </p:txBody>
-      </p:sp>
-      <p:sp>
-        <p:nvSpPr>
-          <p:cNvPr id="9" name="Rectangle 8"/>
+              <a:t>April none raised</a:t>
+            </a:r>
+          </a:p>
+        </p:txBody>
+      </p:sp>
+      <p:sp>
+        <p:nvSpPr>
+          <p:cNvPr id="10" name="Rectangle 9"/>
           <p:cNvSpPr/>
           <p:nvPr/>
         </p:nvSpPr>
         <p:spPr>
           <a:xfrm>
-            <a:off x="6233007" y="1645920"/>
-            <a:ext cx="5501487" cy="2011680"/>
+            <a:off x="6210147" y="1278636"/>
+            <a:ext cx="5524347" cy="1188720"/>
           </a:xfrm>
           <a:prstGeom prst="rect">
             <a:avLst/>
@@ -6558,53 +8277,14 @@
       </p:sp>
       <p:sp>
         <p:nvSpPr>
-          <p:cNvPr id="10" name="TextBox 9"/>
-          <p:cNvSpPr txBox="1"/>
-          <p:nvPr/>
-        </p:nvSpPr>
-        <p:spPr>
-          <a:xfrm>
-            <a:off x="6415887" y="1783080"/>
-            <a:ext cx="5135727" cy="457200"/>
-          </a:xfrm>
-          <a:prstGeom prst="rect">
-            <a:avLst/>
-          </a:prstGeom>
-          <a:noFill/>
-        </p:spPr>
-        <p:txBody>
-          <a:bodyPr wrap="square">
-            <a:spAutoFit/>
-          </a:bodyPr>
-          <a:lstStyle/>
-          <a:p>
-            <a:pPr>
-              <a:defRPr>
-                <a:latin typeface="Roboto"/>
-              </a:defRPr>
-            </a:pPr>
-            <a:r>
-              <a:rPr sz="1200" b="0">
-                <a:solidFill>
-                  <a:srgbClr val="5F6F63"/>
-                </a:solidFill>
-                <a:latin typeface="Roboto"/>
-              </a:rPr>
-              <a:t>Year to date (Jul to May 2026)</a:t>
-            </a:r>
-          </a:p>
-        </p:txBody>
-      </p:sp>
-      <p:sp>
-        <p:nvSpPr>
           <p:cNvPr id="11" name="TextBox 10"/>
           <p:cNvSpPr txBox="1"/>
           <p:nvPr/>
         </p:nvSpPr>
         <p:spPr>
           <a:xfrm>
-            <a:off x="6415887" y="2240280"/>
-            <a:ext cx="5135727" cy="731520"/>
+            <a:off x="6347307" y="1351788"/>
+            <a:ext cx="5250027" cy="384048"/>
           </a:xfrm>
           <a:prstGeom prst="rect">
             <a:avLst/>
@@ -6612,7 +8292,7 @@
           <a:noFill/>
         </p:spPr>
         <p:txBody>
-          <a:bodyPr wrap="square">
+          <a:bodyPr wrap="square" lIns="45720" rIns="45720">
             <a:spAutoFit/>
           </a:bodyPr>
           <a:lstStyle/>
@@ -6623,13 +8303,13 @@
               </a:defRPr>
             </a:pPr>
             <a:r>
-              <a:rPr sz="3000" b="1">
-                <a:solidFill>
-                  <a:srgbClr val="2F7A5D"/>
+              <a:rPr sz="1100" b="0">
+                <a:solidFill>
+                  <a:srgbClr val="5F6F63"/>
                 </a:solidFill>
                 <a:latin typeface="Roboto"/>
               </a:rPr>
-              <a:t>11¢</a:t>
+              <a:t>Year to date (Jul to May 2026)</a:t>
             </a:r>
           </a:p>
         </p:txBody>
@@ -6642,8 +8322,8 @@
         </p:nvSpPr>
         <p:spPr>
           <a:xfrm>
-            <a:off x="6415887" y="3017520"/>
-            <a:ext cx="5135727" cy="548640"/>
+            <a:off x="6347307" y="1717548"/>
+            <a:ext cx="5250027" cy="502920"/>
           </a:xfrm>
           <a:prstGeom prst="rect">
             <a:avLst/>
@@ -6651,7 +8331,7 @@
           <a:noFill/>
         </p:spPr>
         <p:txBody>
-          <a:bodyPr wrap="square">
+          <a:bodyPr wrap="square" lIns="45720" rIns="45720">
             <a:spAutoFit/>
           </a:bodyPr>
           <a:lstStyle/>
@@ -6662,13 +8342,13 @@
               </a:defRPr>
             </a:pPr>
             <a:r>
-              <a:rPr sz="1100" b="0">
-                <a:solidFill>
-                  <a:srgbClr val="5F6F63"/>
+              <a:rPr sz="2200" b="1">
+                <a:solidFill>
+                  <a:srgbClr val="2F7A5D"/>
                 </a:solidFill>
                 <a:latin typeface="Roboto"/>
               </a:rPr>
-              <a:t>same period last year: not in the data</a:t>
+              <a:t>41¢</a:t>
             </a:r>
           </a:p>
         </p:txBody>
@@ -6681,8 +8361,8 @@
         </p:nvSpPr>
         <p:spPr>
           <a:xfrm>
-            <a:off x="457200" y="6492240"/>
-            <a:ext cx="3657600" cy="274320"/>
+            <a:off x="6347307" y="2083308"/>
+            <a:ext cx="5250027" cy="329184"/>
           </a:xfrm>
           <a:prstGeom prst="rect">
             <a:avLst/>
@@ -6690,7 +8370,7 @@
           <a:noFill/>
         </p:spPr>
         <p:txBody>
-          <a:bodyPr wrap="square">
+          <a:bodyPr wrap="square" lIns="45720" rIns="45720">
             <a:spAutoFit/>
           </a:bodyPr>
           <a:lstStyle/>
@@ -6701,132 +8381,56 @@
               </a:defRPr>
             </a:pPr>
             <a:r>
-              <a:rPr sz="900" b="0">
+              <a:rPr sz="1000" b="0">
                 <a:solidFill>
                   <a:srgbClr val="5F6F63"/>
                 </a:solidFill>
                 <a:latin typeface="Roboto"/>
               </a:rPr>
-              <a:t>cost-to-raise.pptx</a:t>
-            </a:r>
-          </a:p>
-        </p:txBody>
-      </p:sp>
-      <p:sp>
-        <p:nvSpPr>
-          <p:cNvPr id="14" name="TextBox 13"/>
-          <p:cNvSpPr txBox="1"/>
+              <a:t>same period last year: not in the data</a:t>
+            </a:r>
+          </a:p>
+        </p:txBody>
+      </p:sp>
+      <p:graphicFrame>
+        <p:nvGraphicFramePr>
+          <p:cNvPr id="14" name="Chart 13"/>
+          <p:cNvGraphicFramePr>
+            <a:graphicFrameLocks noGrp="1"/>
+          </p:cNvGraphicFramePr>
           <p:nvPr/>
-        </p:nvSpPr>
-        <p:spPr>
-          <a:xfrm>
-            <a:off x="4297680" y="6492240"/>
-            <a:ext cx="3657600" cy="274320"/>
-          </a:xfrm>
-          <a:prstGeom prst="rect">
-            <a:avLst/>
-          </a:prstGeom>
-          <a:noFill/>
-        </p:spPr>
-        <p:txBody>
-          <a:bodyPr wrap="square">
-            <a:spAutoFit/>
-          </a:bodyPr>
-          <a:lstStyle/>
-          <a:p>
-            <a:pPr algn="ctr">
-              <a:defRPr>
-                <a:latin typeface="Roboto"/>
-              </a:defRPr>
-            </a:pPr>
-            <a:r>
-              <a:rPr sz="900" b="0">
-                <a:solidFill>
-                  <a:srgbClr val="5F6F63"/>
-                </a:solidFill>
-                <a:latin typeface="Roboto"/>
-              </a:rPr>
-              <a:t>Data retrieved 2pm, Tue 6 Oct 2026 · Sample data</a:t>
-            </a:r>
-          </a:p>
-        </p:txBody>
-      </p:sp>
-      <p:sp>
-        <p:nvSpPr>
-          <p:cNvPr id="15" name="TextBox 14"/>
-          <p:cNvSpPr txBox="1"/>
-          <p:nvPr/>
-        </p:nvSpPr>
-        <p:spPr>
-          <a:xfrm>
-            <a:off x="8503920" y="6492240"/>
-            <a:ext cx="3200400" cy="274320"/>
-          </a:xfrm>
-          <a:prstGeom prst="rect">
-            <a:avLst/>
-          </a:prstGeom>
-          <a:noFill/>
-        </p:spPr>
-        <p:txBody>
-          <a:bodyPr wrap="square">
-            <a:spAutoFit/>
-          </a:bodyPr>
-          <a:lstStyle/>
-          <a:p>
-            <a:pPr algn="r">
-              <a:defRPr>
-                <a:latin typeface="Roboto"/>
-              </a:defRPr>
-            </a:pPr>
-            <a:r>
-              <a:rPr sz="900" b="0">
-                <a:solidFill>
-                  <a:srgbClr val="5F6F63"/>
-                </a:solidFill>
-                <a:latin typeface="Roboto"/>
-              </a:rPr>
-              <a:t>Slide 5 of 11</a:t>
-            </a:r>
-          </a:p>
-        </p:txBody>
-      </p:sp>
-    </p:spTree>
-  </p:cSld>
-  <p:clrMapOvr>
-    <a:masterClrMapping/>
-  </p:clrMapOvr>
-</p:sld>
-</file>
-
-<file path=ppt/slides/slide6.xml><?xml version="1.0" encoding="utf-8"?>
-<p:sld xmlns:a="http://schemas.openxmlformats.org/drawingml/2006/main" xmlns:p="http://schemas.openxmlformats.org/presentationml/2006/main" xmlns:r="http://schemas.openxmlformats.org/officeDocument/2006/relationships">
-  <p:cSld>
-    <p:spTree>
-      <p:nvGrpSpPr>
-        <p:cNvPr id="1" name=""/>
-        <p:cNvGrpSpPr/>
-        <p:nvPr/>
-      </p:nvGrpSpPr>
-      <p:grpSpPr/>
-      <p:sp>
-        <p:nvSpPr>
-          <p:cNvPr id="2" name="Rectangle 1"/>
+        </p:nvGraphicFramePr>
+        <p:xfrm>
+          <a:off x="457200" y="2604516"/>
+          <a:ext cx="11277295" cy="2714244"/>
+        </p:xfrm>
+        <a:graphic>
+          <a:graphicData uri="http://schemas.openxmlformats.org/drawingml/2006/chart">
+            <c:chart xmlns:c="http://schemas.openxmlformats.org/drawingml/2006/chart" r:id="rId3"/>
+          </a:graphicData>
+        </a:graphic>
+      </p:graphicFrame>
+      <p:sp>
+        <p:nvSpPr>
+          <p:cNvPr id="15" name="Rectangle 14"/>
           <p:cNvSpPr/>
           <p:nvPr/>
         </p:nvSpPr>
         <p:spPr>
           <a:xfrm>
-            <a:off x="0" y="0"/>
-            <a:ext cx="12191695" cy="73152"/>
+            <a:off x="457200" y="5410200"/>
+            <a:ext cx="5501487" cy="899160"/>
           </a:xfrm>
           <a:prstGeom prst="rect">
             <a:avLst/>
           </a:prstGeom>
           <a:solidFill>
-            <a:srgbClr val="2F7A5D"/>
+            <a:srgbClr val="FFFFFF"/>
           </a:solidFill>
           <a:ln>
-            <a:noFill/>
+            <a:solidFill>
+              <a:srgbClr val="DCE8DC"/>
+            </a:solidFill>
           </a:ln>
         </p:spPr>
         <p:style>
@@ -6857,14 +8461,14 @@
       </p:sp>
       <p:sp>
         <p:nvSpPr>
-          <p:cNvPr id="3" name="TextBox 2"/>
+          <p:cNvPr id="16" name="TextBox 15"/>
           <p:cNvSpPr txBox="1"/>
           <p:nvPr/>
         </p:nvSpPr>
         <p:spPr>
           <a:xfrm>
-            <a:off x="457200" y="164592"/>
-            <a:ext cx="7315200" cy="274320"/>
+            <a:off x="594360" y="5465064"/>
+            <a:ext cx="5227167" cy="274320"/>
           </a:xfrm>
           <a:prstGeom prst="rect">
             <a:avLst/>
@@ -6872,7 +8476,7 @@
           <a:noFill/>
         </p:spPr>
         <p:txBody>
-          <a:bodyPr wrap="square">
+          <a:bodyPr wrap="square" lIns="45720" rIns="45720">
             <a:spAutoFit/>
           </a:bodyPr>
           <a:lstStyle/>
@@ -6883,27 +8487,27 @@
               </a:defRPr>
             </a:pPr>
             <a:r>
-              <a:rPr sz="1000" b="0">
+              <a:rPr sz="1000" b="1">
                 <a:solidFill>
                   <a:srgbClr val="5F6F63"/>
                 </a:solidFill>
                 <a:latin typeface="Roboto"/>
               </a:rPr>
-              <a:t>Sample Community Services Ltd · What does it cost to raise a dollar?</a:t>
-            </a:r>
-          </a:p>
-        </p:txBody>
-      </p:sp>
-      <p:sp>
-        <p:nvSpPr>
-          <p:cNvPr id="4" name="TextBox 3"/>
+              <a:t>WHAT IT SHOWS</a:t>
+            </a:r>
+          </a:p>
+        </p:txBody>
+      </p:sp>
+      <p:sp>
+        <p:nvSpPr>
+          <p:cNvPr id="17" name="TextBox 16"/>
           <p:cNvSpPr txBox="1"/>
           <p:nvPr/>
         </p:nvSpPr>
         <p:spPr>
           <a:xfrm>
-            <a:off x="457200" y="411480"/>
-            <a:ext cx="11247120" cy="548640"/>
+            <a:off x="594360" y="5739384"/>
+            <a:ext cx="5227167" cy="533400"/>
           </a:xfrm>
           <a:prstGeom prst="rect">
             <a:avLst/>
@@ -6911,7 +8515,7 @@
           <a:noFill/>
         </p:spPr>
         <p:txBody>
-          <a:bodyPr wrap="square">
+          <a:bodyPr wrap="square" lIns="45720" rIns="45720">
             <a:spAutoFit/>
           </a:bodyPr>
           <a:lstStyle/>
@@ -6922,33 +8526,33 @@
               </a:defRPr>
             </a:pPr>
             <a:r>
-              <a:rPr sz="2400" b="1">
+              <a:rPr sz="1200" b="0">
                 <a:solidFill>
                   <a:srgbClr val="25342A"/>
                 </a:solidFill>
                 <a:latin typeface="Roboto"/>
               </a:rPr>
-              <a:t>What it shows · Source: Grants</a:t>
-            </a:r>
-          </a:p>
-        </p:txBody>
-      </p:sp>
-      <p:sp>
-        <p:nvSpPr>
-          <p:cNvPr id="5" name="Rectangle 4"/>
+              <a:t>Fundraising events cost 41¢ to raise each dollar this financial year to date ($17,800 of event costs for $43,000).</a:t>
+            </a:r>
+          </a:p>
+        </p:txBody>
+      </p:sp>
+      <p:sp>
+        <p:nvSpPr>
+          <p:cNvPr id="18" name="Rectangle 17"/>
           <p:cNvSpPr/>
           <p:nvPr/>
         </p:nvSpPr>
         <p:spPr>
           <a:xfrm>
-            <a:off x="457200" y="1554480"/>
-            <a:ext cx="5501487" cy="4389120"/>
+            <a:off x="6233007" y="5410200"/>
+            <a:ext cx="5501487" cy="899160"/>
           </a:xfrm>
           <a:prstGeom prst="rect">
             <a:avLst/>
           </a:prstGeom>
           <a:solidFill>
-            <a:srgbClr val="FFFFFF"/>
+            <a:srgbClr val="EEF5F0"/>
           </a:solidFill>
           <a:ln>
             <a:solidFill>
@@ -6984,14 +8588,14 @@
       </p:sp>
       <p:sp>
         <p:nvSpPr>
-          <p:cNvPr id="6" name="TextBox 5"/>
+          <p:cNvPr id="19" name="TextBox 18"/>
           <p:cNvSpPr txBox="1"/>
           <p:nvPr/>
         </p:nvSpPr>
         <p:spPr>
           <a:xfrm>
-            <a:off x="685800" y="1691640"/>
-            <a:ext cx="5044287" cy="365760"/>
+            <a:off x="6370167" y="5465064"/>
+            <a:ext cx="5227167" cy="274320"/>
           </a:xfrm>
           <a:prstGeom prst="rect">
             <a:avLst/>
@@ -6999,7 +8603,7 @@
           <a:noFill/>
         </p:spPr>
         <p:txBody>
-          <a:bodyPr wrap="square">
+          <a:bodyPr wrap="square" lIns="45720" rIns="45720">
             <a:spAutoFit/>
           </a:bodyPr>
           <a:lstStyle/>
@@ -7010,27 +8614,27 @@
               </a:defRPr>
             </a:pPr>
             <a:r>
-              <a:rPr sz="1100" b="1">
+              <a:rPr sz="1000" b="1">
                 <a:solidFill>
                   <a:srgbClr val="5F6F63"/>
                 </a:solidFill>
                 <a:latin typeface="Roboto"/>
               </a:rPr>
-              <a:t>WHAT IT SHOWS</a:t>
-            </a:r>
-          </a:p>
-        </p:txBody>
-      </p:sp>
-      <p:sp>
-        <p:nvSpPr>
-          <p:cNvPr id="7" name="TextBox 6"/>
+              <a:t>WHAT YOU'D DO ABOUT IT</a:t>
+            </a:r>
+          </a:p>
+        </p:txBody>
+      </p:sp>
+      <p:sp>
+        <p:nvSpPr>
+          <p:cNvPr id="20" name="TextBox 19"/>
           <p:cNvSpPr txBox="1"/>
           <p:nvPr/>
         </p:nvSpPr>
         <p:spPr>
           <a:xfrm>
-            <a:off x="685800" y="2103120"/>
-            <a:ext cx="5044287" cy="3749039"/>
+            <a:off x="6370167" y="5739384"/>
+            <a:ext cx="5227167" cy="533400"/>
           </a:xfrm>
           <a:prstGeom prst="rect">
             <a:avLst/>
@@ -7038,7 +8642,7 @@
           <a:noFill/>
         </p:spPr>
         <p:txBody>
-          <a:bodyPr wrap="square">
+          <a:bodyPr wrap="square" lIns="45720" rIns="45720">
             <a:spAutoFit/>
           </a:bodyPr>
           <a:lstStyle/>
@@ -7049,76 +8653,27 @@
               </a:defRPr>
             </a:pPr>
             <a:r>
-              <a:rPr sz="1600" b="0">
+              <a:rPr sz="1200" b="0">
                 <a:solidFill>
                   <a:srgbClr val="25342A"/>
                 </a:solidFill>
                 <a:latin typeface="Roboto"/>
               </a:rPr>
-              <a:t>Grants cost 11¢ to raise each dollar this financial year to date ($78,100 of grant writing and reporting for $699,210).</a:t>
-            </a:r>
-          </a:p>
-        </p:txBody>
-      </p:sp>
-      <p:sp>
-        <p:nvSpPr>
-          <p:cNvPr id="8" name="Rectangle 7"/>
-          <p:cNvSpPr/>
-          <p:nvPr/>
-        </p:nvSpPr>
-        <p:spPr>
-          <a:xfrm>
-            <a:off x="6233007" y="1554480"/>
-            <a:ext cx="5501487" cy="4389120"/>
-          </a:xfrm>
-          <a:prstGeom prst="rect">
-            <a:avLst/>
-          </a:prstGeom>
-          <a:solidFill>
-            <a:srgbClr val="EEF5F0"/>
-          </a:solidFill>
-          <a:ln>
-            <a:solidFill>
-              <a:srgbClr val="DCE8DC"/>
-            </a:solidFill>
-          </a:ln>
-        </p:spPr>
-        <p:style>
-          <a:lnRef idx="1">
-            <a:schemeClr val="accent1"/>
-          </a:lnRef>
-          <a:fillRef idx="3">
-            <a:schemeClr val="accent1"/>
-          </a:fillRef>
-          <a:effectRef idx="2">
-            <a:schemeClr val="accent1"/>
-          </a:effectRef>
-          <a:fontRef idx="minor">
-            <a:schemeClr val="lt1"/>
-          </a:fontRef>
-        </p:style>
-        <p:txBody>
-          <a:bodyPr rtlCol="0" anchor="ctr"/>
-          <a:lstStyle/>
-          <a:p>
-            <a:pPr algn="ctr">
-              <a:defRPr>
-                <a:latin typeface="Roboto"/>
-              </a:defRPr>
-            </a:pPr>
-          </a:p>
-        </p:txBody>
-      </p:sp>
-      <p:sp>
-        <p:nvSpPr>
-          <p:cNvPr id="9" name="TextBox 8"/>
+              <a:t>Usually the dearest money to raise: events are worth counting for what else they bring too (new donors, profile).</a:t>
+            </a:r>
+          </a:p>
+        </p:txBody>
+      </p:sp>
+      <p:sp>
+        <p:nvSpPr>
+          <p:cNvPr id="21" name="TextBox 20"/>
           <p:cNvSpPr txBox="1"/>
           <p:nvPr/>
         </p:nvSpPr>
         <p:spPr>
           <a:xfrm>
-            <a:off x="6461607" y="1691640"/>
-            <a:ext cx="5044287" cy="365760"/>
+            <a:off x="457200" y="6492240"/>
+            <a:ext cx="2926080" cy="274320"/>
           </a:xfrm>
           <a:prstGeom prst="rect">
             <a:avLst/>
@@ -7126,7 +8681,7 @@
           <a:noFill/>
         </p:spPr>
         <p:txBody>
-          <a:bodyPr wrap="square">
+          <a:bodyPr wrap="square" lIns="45720" rIns="45720">
             <a:spAutoFit/>
           </a:bodyPr>
           <a:lstStyle/>
@@ -7137,27 +8692,27 @@
               </a:defRPr>
             </a:pPr>
             <a:r>
-              <a:rPr sz="1100" b="1">
+              <a:rPr sz="900" b="0">
                 <a:solidFill>
                   <a:srgbClr val="5F6F63"/>
                 </a:solidFill>
                 <a:latin typeface="Roboto"/>
               </a:rPr>
-              <a:t>WHAT YOU'D DO ABOUT IT</a:t>
-            </a:r>
-          </a:p>
-        </p:txBody>
-      </p:sp>
-      <p:sp>
-        <p:nvSpPr>
-          <p:cNvPr id="10" name="TextBox 9"/>
+              <a:t>cost-to-raise.pptx</a:t>
+            </a:r>
+          </a:p>
+        </p:txBody>
+      </p:sp>
+      <p:sp>
+        <p:nvSpPr>
+          <p:cNvPr id="22" name="TextBox 21"/>
           <p:cNvSpPr txBox="1"/>
           <p:nvPr/>
         </p:nvSpPr>
         <p:spPr>
           <a:xfrm>
-            <a:off x="6461607" y="2103120"/>
-            <a:ext cx="5044287" cy="3749039"/>
+            <a:off x="3108960" y="6492240"/>
+            <a:ext cx="5943600" cy="274320"/>
           </a:xfrm>
           <a:prstGeom prst="rect">
             <a:avLst/>
@@ -7165,38 +8720,38 @@
           <a:noFill/>
         </p:spPr>
         <p:txBody>
-          <a:bodyPr wrap="square">
+          <a:bodyPr wrap="square" lIns="45720" rIns="45720">
             <a:spAutoFit/>
           </a:bodyPr>
           <a:lstStyle/>
           <a:p>
-            <a:pPr>
-              <a:defRPr>
-                <a:latin typeface="Roboto"/>
-              </a:defRPr>
-            </a:pPr>
-            <a:r>
-              <a:rPr sz="1600" b="0">
-                <a:solidFill>
-                  <a:srgbClr val="25342A"/>
+            <a:pPr algn="ctr">
+              <a:defRPr>
+                <a:latin typeface="Roboto"/>
+              </a:defRPr>
+            </a:pPr>
+            <a:r>
+              <a:rPr sz="900" b="0">
+                <a:solidFill>
+                  <a:srgbClr val="5F6F63"/>
                 </a:solidFill>
                 <a:latin typeface="Roboto"/>
               </a:rPr>
-              <a:t>Usually the cheapest money to raise, as long as the time that goes into applications and acquittals is protected.</a:t>
-            </a:r>
-          </a:p>
-        </p:txBody>
-      </p:sp>
-      <p:sp>
-        <p:nvSpPr>
-          <p:cNvPr id="11" name="TextBox 10"/>
+              <a:t>Data retrieved 2pm, Tue 6 Oct 2026 · Generated 8 Oct 2026, 9:35am · Sample data · Made with Python (python-pptx)</a:t>
+            </a:r>
+          </a:p>
+        </p:txBody>
+      </p:sp>
+      <p:sp>
+        <p:nvSpPr>
+          <p:cNvPr id="23" name="TextBox 22"/>
           <p:cNvSpPr txBox="1"/>
           <p:nvPr/>
         </p:nvSpPr>
         <p:spPr>
           <a:xfrm>
-            <a:off x="457200" y="6492240"/>
-            <a:ext cx="3657600" cy="274320"/>
+            <a:off x="8503920" y="6492240"/>
+            <a:ext cx="3200400" cy="274320"/>
           </a:xfrm>
           <a:prstGeom prst="rect">
             <a:avLst/>
@@ -7204,12 +8759,12 @@
           <a:noFill/>
         </p:spPr>
         <p:txBody>
-          <a:bodyPr wrap="square">
+          <a:bodyPr wrap="square" lIns="45720" rIns="45720">
             <a:spAutoFit/>
           </a:bodyPr>
           <a:lstStyle/>
           <a:p>
-            <a:pPr>
+            <a:pPr algn="r">
               <a:defRPr>
                 <a:latin typeface="Roboto"/>
               </a:defRPr>
@@ -7221,1783 +8776,7 @@
                 </a:solidFill>
                 <a:latin typeface="Roboto"/>
               </a:rPr>
-              <a:t>cost-to-raise.pptx</a:t>
-            </a:r>
-          </a:p>
-        </p:txBody>
-      </p:sp>
-      <p:sp>
-        <p:nvSpPr>
-          <p:cNvPr id="12" name="TextBox 11"/>
-          <p:cNvSpPr txBox="1"/>
-          <p:nvPr/>
-        </p:nvSpPr>
-        <p:spPr>
-          <a:xfrm>
-            <a:off x="4297680" y="6492240"/>
-            <a:ext cx="3657600" cy="274320"/>
-          </a:xfrm>
-          <a:prstGeom prst="rect">
-            <a:avLst/>
-          </a:prstGeom>
-          <a:noFill/>
-        </p:spPr>
-        <p:txBody>
-          <a:bodyPr wrap="square">
-            <a:spAutoFit/>
-          </a:bodyPr>
-          <a:lstStyle/>
-          <a:p>
-            <a:pPr algn="ctr">
-              <a:defRPr>
-                <a:latin typeface="Roboto"/>
-              </a:defRPr>
-            </a:pPr>
-            <a:r>
-              <a:rPr sz="900" b="0">
-                <a:solidFill>
-                  <a:srgbClr val="5F6F63"/>
-                </a:solidFill>
-                <a:latin typeface="Roboto"/>
-              </a:rPr>
-              <a:t>Data retrieved 2pm, Tue 6 Oct 2026 · Sample data</a:t>
-            </a:r>
-          </a:p>
-        </p:txBody>
-      </p:sp>
-      <p:sp>
-        <p:nvSpPr>
-          <p:cNvPr id="13" name="TextBox 12"/>
-          <p:cNvSpPr txBox="1"/>
-          <p:nvPr/>
-        </p:nvSpPr>
-        <p:spPr>
-          <a:xfrm>
-            <a:off x="8503920" y="6492240"/>
-            <a:ext cx="3200400" cy="274320"/>
-          </a:xfrm>
-          <a:prstGeom prst="rect">
-            <a:avLst/>
-          </a:prstGeom>
-          <a:noFill/>
-        </p:spPr>
-        <p:txBody>
-          <a:bodyPr wrap="square">
-            <a:spAutoFit/>
-          </a:bodyPr>
-          <a:lstStyle/>
-          <a:p>
-            <a:pPr algn="r">
-              <a:defRPr>
-                <a:latin typeface="Roboto"/>
-              </a:defRPr>
-            </a:pPr>
-            <a:r>
-              <a:rPr sz="900" b="0">
-                <a:solidFill>
-                  <a:srgbClr val="5F6F63"/>
-                </a:solidFill>
-                <a:latin typeface="Roboto"/>
-              </a:rPr>
-              <a:t>Slide 6 of 11</a:t>
-            </a:r>
-          </a:p>
-        </p:txBody>
-      </p:sp>
-    </p:spTree>
-  </p:cSld>
-  <p:clrMapOvr>
-    <a:masterClrMapping/>
-  </p:clrMapOvr>
-</p:sld>
-</file>
-
-<file path=ppt/slides/slide7.xml><?xml version="1.0" encoding="utf-8"?>
-<p:sld xmlns:a="http://schemas.openxmlformats.org/drawingml/2006/main" xmlns:p="http://schemas.openxmlformats.org/presentationml/2006/main" xmlns:r="http://schemas.openxmlformats.org/officeDocument/2006/relationships">
-  <p:cSld>
-    <p:spTree>
-      <p:nvGrpSpPr>
-        <p:cNvPr id="1" name=""/>
-        <p:cNvGrpSpPr/>
-        <p:nvPr/>
-      </p:nvGrpSpPr>
-      <p:grpSpPr/>
-      <p:sp>
-        <p:nvSpPr>
-          <p:cNvPr id="2" name="Rectangle 1"/>
-          <p:cNvSpPr/>
-          <p:nvPr/>
-        </p:nvSpPr>
-        <p:spPr>
-          <a:xfrm>
-            <a:off x="0" y="0"/>
-            <a:ext cx="12191695" cy="73152"/>
-          </a:xfrm>
-          <a:prstGeom prst="rect">
-            <a:avLst/>
-          </a:prstGeom>
-          <a:solidFill>
-            <a:srgbClr val="2F7A5D"/>
-          </a:solidFill>
-          <a:ln>
-            <a:noFill/>
-          </a:ln>
-        </p:spPr>
-        <p:style>
-          <a:lnRef idx="1">
-            <a:schemeClr val="accent1"/>
-          </a:lnRef>
-          <a:fillRef idx="3">
-            <a:schemeClr val="accent1"/>
-          </a:fillRef>
-          <a:effectRef idx="2">
-            <a:schemeClr val="accent1"/>
-          </a:effectRef>
-          <a:fontRef idx="minor">
-            <a:schemeClr val="lt1"/>
-          </a:fontRef>
-        </p:style>
-        <p:txBody>
-          <a:bodyPr rtlCol="0" anchor="ctr"/>
-          <a:lstStyle/>
-          <a:p>
-            <a:pPr algn="ctr">
-              <a:defRPr>
-                <a:latin typeface="Roboto"/>
-              </a:defRPr>
-            </a:pPr>
-          </a:p>
-        </p:txBody>
-      </p:sp>
-      <p:sp>
-        <p:nvSpPr>
-          <p:cNvPr id="3" name="TextBox 2"/>
-          <p:cNvSpPr txBox="1"/>
-          <p:nvPr/>
-        </p:nvSpPr>
-        <p:spPr>
-          <a:xfrm>
-            <a:off x="457200" y="164592"/>
-            <a:ext cx="7315200" cy="274320"/>
-          </a:xfrm>
-          <a:prstGeom prst="rect">
-            <a:avLst/>
-          </a:prstGeom>
-          <a:noFill/>
-        </p:spPr>
-        <p:txBody>
-          <a:bodyPr wrap="square">
-            <a:spAutoFit/>
-          </a:bodyPr>
-          <a:lstStyle/>
-          <a:p>
-            <a:pPr>
-              <a:defRPr>
-                <a:latin typeface="Roboto"/>
-              </a:defRPr>
-            </a:pPr>
-            <a:r>
-              <a:rPr sz="1000" b="0">
-                <a:solidFill>
-                  <a:srgbClr val="5F6F63"/>
-                </a:solidFill>
-                <a:latin typeface="Roboto"/>
-              </a:rPr>
-              <a:t>Sample Community Services Ltd · What does it cost to raise a dollar?</a:t>
-            </a:r>
-          </a:p>
-        </p:txBody>
-      </p:sp>
-      <p:sp>
-        <p:nvSpPr>
-          <p:cNvPr id="4" name="TextBox 3"/>
-          <p:cNvSpPr txBox="1"/>
-          <p:nvPr/>
-        </p:nvSpPr>
-        <p:spPr>
-          <a:xfrm>
-            <a:off x="457200" y="411480"/>
-            <a:ext cx="11247120" cy="548640"/>
-          </a:xfrm>
-          <a:prstGeom prst="rect">
-            <a:avLst/>
-          </a:prstGeom>
-          <a:noFill/>
-        </p:spPr>
-        <p:txBody>
-          <a:bodyPr wrap="square">
-            <a:spAutoFit/>
-          </a:bodyPr>
-          <a:lstStyle/>
-          <a:p>
-            <a:pPr>
-              <a:defRPr>
-                <a:latin typeface="Roboto"/>
-              </a:defRPr>
-            </a:pPr>
-            <a:r>
-              <a:rPr sz="2400" b="1">
-                <a:solidFill>
-                  <a:srgbClr val="25342A"/>
-                </a:solidFill>
-                <a:latin typeface="Roboto"/>
-              </a:rPr>
-              <a:t>Headline numbers · Source: Donations</a:t>
-            </a:r>
-          </a:p>
-        </p:txBody>
-      </p:sp>
-      <p:sp>
-        <p:nvSpPr>
-          <p:cNvPr id="5" name="Rectangle 4"/>
-          <p:cNvSpPr/>
-          <p:nvPr/>
-        </p:nvSpPr>
-        <p:spPr>
-          <a:xfrm>
-            <a:off x="457200" y="1645920"/>
-            <a:ext cx="5501487" cy="2011680"/>
-          </a:xfrm>
-          <a:prstGeom prst="rect">
-            <a:avLst/>
-          </a:prstGeom>
-          <a:solidFill>
-            <a:srgbClr val="F7FAF7"/>
-          </a:solidFill>
-          <a:ln>
-            <a:solidFill>
-              <a:srgbClr val="DCE8DC"/>
-            </a:solidFill>
-          </a:ln>
-        </p:spPr>
-        <p:style>
-          <a:lnRef idx="1">
-            <a:schemeClr val="accent1"/>
-          </a:lnRef>
-          <a:fillRef idx="3">
-            <a:schemeClr val="accent1"/>
-          </a:fillRef>
-          <a:effectRef idx="2">
-            <a:schemeClr val="accent1"/>
-          </a:effectRef>
-          <a:fontRef idx="minor">
-            <a:schemeClr val="lt1"/>
-          </a:fontRef>
-        </p:style>
-        <p:txBody>
-          <a:bodyPr rtlCol="0" anchor="ctr"/>
-          <a:lstStyle/>
-          <a:p>
-            <a:pPr algn="ctr">
-              <a:defRPr>
-                <a:latin typeface="Roboto"/>
-              </a:defRPr>
-            </a:pPr>
-          </a:p>
-        </p:txBody>
-      </p:sp>
-      <p:sp>
-        <p:nvSpPr>
-          <p:cNvPr id="6" name="TextBox 5"/>
-          <p:cNvSpPr txBox="1"/>
-          <p:nvPr/>
-        </p:nvSpPr>
-        <p:spPr>
-          <a:xfrm>
-            <a:off x="640080" y="1783080"/>
-            <a:ext cx="5135727" cy="457200"/>
-          </a:xfrm>
-          <a:prstGeom prst="rect">
-            <a:avLst/>
-          </a:prstGeom>
-          <a:noFill/>
-        </p:spPr>
-        <p:txBody>
-          <a:bodyPr wrap="square">
-            <a:spAutoFit/>
-          </a:bodyPr>
-          <a:lstStyle/>
-          <a:p>
-            <a:pPr>
-              <a:defRPr>
-                <a:latin typeface="Roboto"/>
-              </a:defRPr>
-            </a:pPr>
-            <a:r>
-              <a:rPr sz="1200" b="0">
-                <a:solidFill>
-                  <a:srgbClr val="5F6F63"/>
-                </a:solidFill>
-                <a:latin typeface="Roboto"/>
-              </a:rPr>
-              <a:t>May · Donations</a:t>
-            </a:r>
-          </a:p>
-        </p:txBody>
-      </p:sp>
-      <p:sp>
-        <p:nvSpPr>
-          <p:cNvPr id="7" name="TextBox 6"/>
-          <p:cNvSpPr txBox="1"/>
-          <p:nvPr/>
-        </p:nvSpPr>
-        <p:spPr>
-          <a:xfrm>
-            <a:off x="640080" y="2240280"/>
-            <a:ext cx="5135727" cy="731520"/>
-          </a:xfrm>
-          <a:prstGeom prst="rect">
-            <a:avLst/>
-          </a:prstGeom>
-          <a:noFill/>
-        </p:spPr>
-        <p:txBody>
-          <a:bodyPr wrap="square">
-            <a:spAutoFit/>
-          </a:bodyPr>
-          <a:lstStyle/>
-          <a:p>
-            <a:pPr>
-              <a:defRPr>
-                <a:latin typeface="Roboto"/>
-              </a:defRPr>
-            </a:pPr>
-            <a:r>
-              <a:rPr sz="3000" b="1">
-                <a:solidFill>
-                  <a:srgbClr val="2F7A5D"/>
-                </a:solidFill>
-                <a:latin typeface="Roboto"/>
-              </a:rPr>
-              <a:t>13¢</a:t>
-            </a:r>
-          </a:p>
-        </p:txBody>
-      </p:sp>
-      <p:sp>
-        <p:nvSpPr>
-          <p:cNvPr id="8" name="TextBox 7"/>
-          <p:cNvSpPr txBox="1"/>
-          <p:nvPr/>
-        </p:nvSpPr>
-        <p:spPr>
-          <a:xfrm>
-            <a:off x="640080" y="3017520"/>
-            <a:ext cx="5135727" cy="548640"/>
-          </a:xfrm>
-          <a:prstGeom prst="rect">
-            <a:avLst/>
-          </a:prstGeom>
-          <a:noFill/>
-        </p:spPr>
-        <p:txBody>
-          <a:bodyPr wrap="square">
-            <a:spAutoFit/>
-          </a:bodyPr>
-          <a:lstStyle/>
-          <a:p>
-            <a:pPr>
-              <a:defRPr>
-                <a:latin typeface="Roboto"/>
-              </a:defRPr>
-            </a:pPr>
-            <a:r>
-              <a:rPr sz="1100" b="0">
-                <a:solidFill>
-                  <a:srgbClr val="5F6F63"/>
-                </a:solidFill>
-                <a:latin typeface="Roboto"/>
-              </a:rPr>
-              <a:t>April 13¢</a:t>
-            </a:r>
-          </a:p>
-        </p:txBody>
-      </p:sp>
-      <p:sp>
-        <p:nvSpPr>
-          <p:cNvPr id="9" name="Rectangle 8"/>
-          <p:cNvSpPr/>
-          <p:nvPr/>
-        </p:nvSpPr>
-        <p:spPr>
-          <a:xfrm>
-            <a:off x="6233007" y="1645920"/>
-            <a:ext cx="5501487" cy="2011680"/>
-          </a:xfrm>
-          <a:prstGeom prst="rect">
-            <a:avLst/>
-          </a:prstGeom>
-          <a:solidFill>
-            <a:srgbClr val="F7FAF7"/>
-          </a:solidFill>
-          <a:ln>
-            <a:solidFill>
-              <a:srgbClr val="DCE8DC"/>
-            </a:solidFill>
-          </a:ln>
-        </p:spPr>
-        <p:style>
-          <a:lnRef idx="1">
-            <a:schemeClr val="accent1"/>
-          </a:lnRef>
-          <a:fillRef idx="3">
-            <a:schemeClr val="accent1"/>
-          </a:fillRef>
-          <a:effectRef idx="2">
-            <a:schemeClr val="accent1"/>
-          </a:effectRef>
-          <a:fontRef idx="minor">
-            <a:schemeClr val="lt1"/>
-          </a:fontRef>
-        </p:style>
-        <p:txBody>
-          <a:bodyPr rtlCol="0" anchor="ctr"/>
-          <a:lstStyle/>
-          <a:p>
-            <a:pPr algn="ctr">
-              <a:defRPr>
-                <a:latin typeface="Roboto"/>
-              </a:defRPr>
-            </a:pPr>
-          </a:p>
-        </p:txBody>
-      </p:sp>
-      <p:sp>
-        <p:nvSpPr>
-          <p:cNvPr id="10" name="TextBox 9"/>
-          <p:cNvSpPr txBox="1"/>
-          <p:nvPr/>
-        </p:nvSpPr>
-        <p:spPr>
-          <a:xfrm>
-            <a:off x="6415887" y="1783080"/>
-            <a:ext cx="5135727" cy="457200"/>
-          </a:xfrm>
-          <a:prstGeom prst="rect">
-            <a:avLst/>
-          </a:prstGeom>
-          <a:noFill/>
-        </p:spPr>
-        <p:txBody>
-          <a:bodyPr wrap="square">
-            <a:spAutoFit/>
-          </a:bodyPr>
-          <a:lstStyle/>
-          <a:p>
-            <a:pPr>
-              <a:defRPr>
-                <a:latin typeface="Roboto"/>
-              </a:defRPr>
-            </a:pPr>
-            <a:r>
-              <a:rPr sz="1200" b="0">
-                <a:solidFill>
-                  <a:srgbClr val="5F6F63"/>
-                </a:solidFill>
-                <a:latin typeface="Roboto"/>
-              </a:rPr>
-              <a:t>Year to date (Jul to May 2026)</a:t>
-            </a:r>
-          </a:p>
-        </p:txBody>
-      </p:sp>
-      <p:sp>
-        <p:nvSpPr>
-          <p:cNvPr id="11" name="TextBox 10"/>
-          <p:cNvSpPr txBox="1"/>
-          <p:nvPr/>
-        </p:nvSpPr>
-        <p:spPr>
-          <a:xfrm>
-            <a:off x="6415887" y="2240280"/>
-            <a:ext cx="5135727" cy="731520"/>
-          </a:xfrm>
-          <a:prstGeom prst="rect">
-            <a:avLst/>
-          </a:prstGeom>
-          <a:noFill/>
-        </p:spPr>
-        <p:txBody>
-          <a:bodyPr wrap="square">
-            <a:spAutoFit/>
-          </a:bodyPr>
-          <a:lstStyle/>
-          <a:p>
-            <a:pPr>
-              <a:defRPr>
-                <a:latin typeface="Roboto"/>
-              </a:defRPr>
-            </a:pPr>
-            <a:r>
-              <a:rPr sz="3000" b="1">
-                <a:solidFill>
-                  <a:srgbClr val="2F7A5D"/>
-                </a:solidFill>
-                <a:latin typeface="Roboto"/>
-              </a:rPr>
-              <a:t>15¢</a:t>
-            </a:r>
-          </a:p>
-        </p:txBody>
-      </p:sp>
-      <p:sp>
-        <p:nvSpPr>
-          <p:cNvPr id="12" name="TextBox 11"/>
-          <p:cNvSpPr txBox="1"/>
-          <p:nvPr/>
-        </p:nvSpPr>
-        <p:spPr>
-          <a:xfrm>
-            <a:off x="6415887" y="3017520"/>
-            <a:ext cx="5135727" cy="548640"/>
-          </a:xfrm>
-          <a:prstGeom prst="rect">
-            <a:avLst/>
-          </a:prstGeom>
-          <a:noFill/>
-        </p:spPr>
-        <p:txBody>
-          <a:bodyPr wrap="square">
-            <a:spAutoFit/>
-          </a:bodyPr>
-          <a:lstStyle/>
-          <a:p>
-            <a:pPr>
-              <a:defRPr>
-                <a:latin typeface="Roboto"/>
-              </a:defRPr>
-            </a:pPr>
-            <a:r>
-              <a:rPr sz="1100" b="0">
-                <a:solidFill>
-                  <a:srgbClr val="5F6F63"/>
-                </a:solidFill>
-                <a:latin typeface="Roboto"/>
-              </a:rPr>
-              <a:t>same period last year: not in the data</a:t>
-            </a:r>
-          </a:p>
-        </p:txBody>
-      </p:sp>
-      <p:sp>
-        <p:nvSpPr>
-          <p:cNvPr id="13" name="TextBox 12"/>
-          <p:cNvSpPr txBox="1"/>
-          <p:nvPr/>
-        </p:nvSpPr>
-        <p:spPr>
-          <a:xfrm>
-            <a:off x="457200" y="6492240"/>
-            <a:ext cx="3657600" cy="274320"/>
-          </a:xfrm>
-          <a:prstGeom prst="rect">
-            <a:avLst/>
-          </a:prstGeom>
-          <a:noFill/>
-        </p:spPr>
-        <p:txBody>
-          <a:bodyPr wrap="square">
-            <a:spAutoFit/>
-          </a:bodyPr>
-          <a:lstStyle/>
-          <a:p>
-            <a:pPr>
-              <a:defRPr>
-                <a:latin typeface="Roboto"/>
-              </a:defRPr>
-            </a:pPr>
-            <a:r>
-              <a:rPr sz="900" b="0">
-                <a:solidFill>
-                  <a:srgbClr val="5F6F63"/>
-                </a:solidFill>
-                <a:latin typeface="Roboto"/>
-              </a:rPr>
-              <a:t>cost-to-raise.pptx</a:t>
-            </a:r>
-          </a:p>
-        </p:txBody>
-      </p:sp>
-      <p:sp>
-        <p:nvSpPr>
-          <p:cNvPr id="14" name="TextBox 13"/>
-          <p:cNvSpPr txBox="1"/>
-          <p:nvPr/>
-        </p:nvSpPr>
-        <p:spPr>
-          <a:xfrm>
-            <a:off x="4297680" y="6492240"/>
-            <a:ext cx="3657600" cy="274320"/>
-          </a:xfrm>
-          <a:prstGeom prst="rect">
-            <a:avLst/>
-          </a:prstGeom>
-          <a:noFill/>
-        </p:spPr>
-        <p:txBody>
-          <a:bodyPr wrap="square">
-            <a:spAutoFit/>
-          </a:bodyPr>
-          <a:lstStyle/>
-          <a:p>
-            <a:pPr algn="ctr">
-              <a:defRPr>
-                <a:latin typeface="Roboto"/>
-              </a:defRPr>
-            </a:pPr>
-            <a:r>
-              <a:rPr sz="900" b="0">
-                <a:solidFill>
-                  <a:srgbClr val="5F6F63"/>
-                </a:solidFill>
-                <a:latin typeface="Roboto"/>
-              </a:rPr>
-              <a:t>Data retrieved 2pm, Tue 6 Oct 2026 · Sample data</a:t>
-            </a:r>
-          </a:p>
-        </p:txBody>
-      </p:sp>
-      <p:sp>
-        <p:nvSpPr>
-          <p:cNvPr id="15" name="TextBox 14"/>
-          <p:cNvSpPr txBox="1"/>
-          <p:nvPr/>
-        </p:nvSpPr>
-        <p:spPr>
-          <a:xfrm>
-            <a:off x="8503920" y="6492240"/>
-            <a:ext cx="3200400" cy="274320"/>
-          </a:xfrm>
-          <a:prstGeom prst="rect">
-            <a:avLst/>
-          </a:prstGeom>
-          <a:noFill/>
-        </p:spPr>
-        <p:txBody>
-          <a:bodyPr wrap="square">
-            <a:spAutoFit/>
-          </a:bodyPr>
-          <a:lstStyle/>
-          <a:p>
-            <a:pPr algn="r">
-              <a:defRPr>
-                <a:latin typeface="Roboto"/>
-              </a:defRPr>
-            </a:pPr>
-            <a:r>
-              <a:rPr sz="900" b="0">
-                <a:solidFill>
-                  <a:srgbClr val="5F6F63"/>
-                </a:solidFill>
-                <a:latin typeface="Roboto"/>
-              </a:rPr>
-              <a:t>Slide 7 of 11</a:t>
-            </a:r>
-          </a:p>
-        </p:txBody>
-      </p:sp>
-    </p:spTree>
-  </p:cSld>
-  <p:clrMapOvr>
-    <a:masterClrMapping/>
-  </p:clrMapOvr>
-</p:sld>
-</file>
-
-<file path=ppt/slides/slide8.xml><?xml version="1.0" encoding="utf-8"?>
-<p:sld xmlns:a="http://schemas.openxmlformats.org/drawingml/2006/main" xmlns:p="http://schemas.openxmlformats.org/presentationml/2006/main" xmlns:r="http://schemas.openxmlformats.org/officeDocument/2006/relationships">
-  <p:cSld>
-    <p:spTree>
-      <p:nvGrpSpPr>
-        <p:cNvPr id="1" name=""/>
-        <p:cNvGrpSpPr/>
-        <p:nvPr/>
-      </p:nvGrpSpPr>
-      <p:grpSpPr/>
-      <p:sp>
-        <p:nvSpPr>
-          <p:cNvPr id="2" name="Rectangle 1"/>
-          <p:cNvSpPr/>
-          <p:nvPr/>
-        </p:nvSpPr>
-        <p:spPr>
-          <a:xfrm>
-            <a:off x="0" y="0"/>
-            <a:ext cx="12191695" cy="73152"/>
-          </a:xfrm>
-          <a:prstGeom prst="rect">
-            <a:avLst/>
-          </a:prstGeom>
-          <a:solidFill>
-            <a:srgbClr val="2F7A5D"/>
-          </a:solidFill>
-          <a:ln>
-            <a:noFill/>
-          </a:ln>
-        </p:spPr>
-        <p:style>
-          <a:lnRef idx="1">
-            <a:schemeClr val="accent1"/>
-          </a:lnRef>
-          <a:fillRef idx="3">
-            <a:schemeClr val="accent1"/>
-          </a:fillRef>
-          <a:effectRef idx="2">
-            <a:schemeClr val="accent1"/>
-          </a:effectRef>
-          <a:fontRef idx="minor">
-            <a:schemeClr val="lt1"/>
-          </a:fontRef>
-        </p:style>
-        <p:txBody>
-          <a:bodyPr rtlCol="0" anchor="ctr"/>
-          <a:lstStyle/>
-          <a:p>
-            <a:pPr algn="ctr">
-              <a:defRPr>
-                <a:latin typeface="Roboto"/>
-              </a:defRPr>
-            </a:pPr>
-          </a:p>
-        </p:txBody>
-      </p:sp>
-      <p:sp>
-        <p:nvSpPr>
-          <p:cNvPr id="3" name="TextBox 2"/>
-          <p:cNvSpPr txBox="1"/>
-          <p:nvPr/>
-        </p:nvSpPr>
-        <p:spPr>
-          <a:xfrm>
-            <a:off x="457200" y="164592"/>
-            <a:ext cx="7315200" cy="274320"/>
-          </a:xfrm>
-          <a:prstGeom prst="rect">
-            <a:avLst/>
-          </a:prstGeom>
-          <a:noFill/>
-        </p:spPr>
-        <p:txBody>
-          <a:bodyPr wrap="square">
-            <a:spAutoFit/>
-          </a:bodyPr>
-          <a:lstStyle/>
-          <a:p>
-            <a:pPr>
-              <a:defRPr>
-                <a:latin typeface="Roboto"/>
-              </a:defRPr>
-            </a:pPr>
-            <a:r>
-              <a:rPr sz="1000" b="0">
-                <a:solidFill>
-                  <a:srgbClr val="5F6F63"/>
-                </a:solidFill>
-                <a:latin typeface="Roboto"/>
-              </a:rPr>
-              <a:t>Sample Community Services Ltd · What does it cost to raise a dollar?</a:t>
-            </a:r>
-          </a:p>
-        </p:txBody>
-      </p:sp>
-      <p:sp>
-        <p:nvSpPr>
-          <p:cNvPr id="4" name="TextBox 3"/>
-          <p:cNvSpPr txBox="1"/>
-          <p:nvPr/>
-        </p:nvSpPr>
-        <p:spPr>
-          <a:xfrm>
-            <a:off x="457200" y="411480"/>
-            <a:ext cx="11247120" cy="548640"/>
-          </a:xfrm>
-          <a:prstGeom prst="rect">
-            <a:avLst/>
-          </a:prstGeom>
-          <a:noFill/>
-        </p:spPr>
-        <p:txBody>
-          <a:bodyPr wrap="square">
-            <a:spAutoFit/>
-          </a:bodyPr>
-          <a:lstStyle/>
-          <a:p>
-            <a:pPr>
-              <a:defRPr>
-                <a:latin typeface="Roboto"/>
-              </a:defRPr>
-            </a:pPr>
-            <a:r>
-              <a:rPr sz="2400" b="1">
-                <a:solidFill>
-                  <a:srgbClr val="25342A"/>
-                </a:solidFill>
-                <a:latin typeface="Roboto"/>
-              </a:rPr>
-              <a:t>What it shows · Source: Donations</a:t>
-            </a:r>
-          </a:p>
-        </p:txBody>
-      </p:sp>
-      <p:sp>
-        <p:nvSpPr>
-          <p:cNvPr id="5" name="Rectangle 4"/>
-          <p:cNvSpPr/>
-          <p:nvPr/>
-        </p:nvSpPr>
-        <p:spPr>
-          <a:xfrm>
-            <a:off x="457200" y="1554480"/>
-            <a:ext cx="5501487" cy="4389120"/>
-          </a:xfrm>
-          <a:prstGeom prst="rect">
-            <a:avLst/>
-          </a:prstGeom>
-          <a:solidFill>
-            <a:srgbClr val="FFFFFF"/>
-          </a:solidFill>
-          <a:ln>
-            <a:solidFill>
-              <a:srgbClr val="DCE8DC"/>
-            </a:solidFill>
-          </a:ln>
-        </p:spPr>
-        <p:style>
-          <a:lnRef idx="1">
-            <a:schemeClr val="accent1"/>
-          </a:lnRef>
-          <a:fillRef idx="3">
-            <a:schemeClr val="accent1"/>
-          </a:fillRef>
-          <a:effectRef idx="2">
-            <a:schemeClr val="accent1"/>
-          </a:effectRef>
-          <a:fontRef idx="minor">
-            <a:schemeClr val="lt1"/>
-          </a:fontRef>
-        </p:style>
-        <p:txBody>
-          <a:bodyPr rtlCol="0" anchor="ctr"/>
-          <a:lstStyle/>
-          <a:p>
-            <a:pPr algn="ctr">
-              <a:defRPr>
-                <a:latin typeface="Roboto"/>
-              </a:defRPr>
-            </a:pPr>
-          </a:p>
-        </p:txBody>
-      </p:sp>
-      <p:sp>
-        <p:nvSpPr>
-          <p:cNvPr id="6" name="TextBox 5"/>
-          <p:cNvSpPr txBox="1"/>
-          <p:nvPr/>
-        </p:nvSpPr>
-        <p:spPr>
-          <a:xfrm>
-            <a:off x="685800" y="1691640"/>
-            <a:ext cx="5044287" cy="365760"/>
-          </a:xfrm>
-          <a:prstGeom prst="rect">
-            <a:avLst/>
-          </a:prstGeom>
-          <a:noFill/>
-        </p:spPr>
-        <p:txBody>
-          <a:bodyPr wrap="square">
-            <a:spAutoFit/>
-          </a:bodyPr>
-          <a:lstStyle/>
-          <a:p>
-            <a:pPr>
-              <a:defRPr>
-                <a:latin typeface="Roboto"/>
-              </a:defRPr>
-            </a:pPr>
-            <a:r>
-              <a:rPr sz="1100" b="1">
-                <a:solidFill>
-                  <a:srgbClr val="5F6F63"/>
-                </a:solidFill>
-                <a:latin typeface="Roboto"/>
-              </a:rPr>
-              <a:t>WHAT IT SHOWS</a:t>
-            </a:r>
-          </a:p>
-        </p:txBody>
-      </p:sp>
-      <p:sp>
-        <p:nvSpPr>
-          <p:cNvPr id="7" name="TextBox 6"/>
-          <p:cNvSpPr txBox="1"/>
-          <p:nvPr/>
-        </p:nvSpPr>
-        <p:spPr>
-          <a:xfrm>
-            <a:off x="685800" y="2103120"/>
-            <a:ext cx="5044287" cy="3749039"/>
-          </a:xfrm>
-          <a:prstGeom prst="rect">
-            <a:avLst/>
-          </a:prstGeom>
-          <a:noFill/>
-        </p:spPr>
-        <p:txBody>
-          <a:bodyPr wrap="square">
-            <a:spAutoFit/>
-          </a:bodyPr>
-          <a:lstStyle/>
-          <a:p>
-            <a:pPr>
-              <a:defRPr>
-                <a:latin typeface="Roboto"/>
-              </a:defRPr>
-            </a:pPr>
-            <a:r>
-              <a:rPr sz="1600" b="0">
-                <a:solidFill>
-                  <a:srgbClr val="25342A"/>
-                </a:solidFill>
-                <a:latin typeface="Roboto"/>
-              </a:rPr>
-              <a:t>Donations cost 15¢ to raise each dollar this financial year to date ($27,300 of donor campaigns for $185,800).</a:t>
-            </a:r>
-          </a:p>
-        </p:txBody>
-      </p:sp>
-      <p:sp>
-        <p:nvSpPr>
-          <p:cNvPr id="8" name="Rectangle 7"/>
-          <p:cNvSpPr/>
-          <p:nvPr/>
-        </p:nvSpPr>
-        <p:spPr>
-          <a:xfrm>
-            <a:off x="6233007" y="1554480"/>
-            <a:ext cx="5501487" cy="4389120"/>
-          </a:xfrm>
-          <a:prstGeom prst="rect">
-            <a:avLst/>
-          </a:prstGeom>
-          <a:solidFill>
-            <a:srgbClr val="EEF5F0"/>
-          </a:solidFill>
-          <a:ln>
-            <a:solidFill>
-              <a:srgbClr val="DCE8DC"/>
-            </a:solidFill>
-          </a:ln>
-        </p:spPr>
-        <p:style>
-          <a:lnRef idx="1">
-            <a:schemeClr val="accent1"/>
-          </a:lnRef>
-          <a:fillRef idx="3">
-            <a:schemeClr val="accent1"/>
-          </a:fillRef>
-          <a:effectRef idx="2">
-            <a:schemeClr val="accent1"/>
-          </a:effectRef>
-          <a:fontRef idx="minor">
-            <a:schemeClr val="lt1"/>
-          </a:fontRef>
-        </p:style>
-        <p:txBody>
-          <a:bodyPr rtlCol="0" anchor="ctr"/>
-          <a:lstStyle/>
-          <a:p>
-            <a:pPr algn="ctr">
-              <a:defRPr>
-                <a:latin typeface="Roboto"/>
-              </a:defRPr>
-            </a:pPr>
-          </a:p>
-        </p:txBody>
-      </p:sp>
-      <p:sp>
-        <p:nvSpPr>
-          <p:cNvPr id="9" name="TextBox 8"/>
-          <p:cNvSpPr txBox="1"/>
-          <p:nvPr/>
-        </p:nvSpPr>
-        <p:spPr>
-          <a:xfrm>
-            <a:off x="6461607" y="1691640"/>
-            <a:ext cx="5044287" cy="365760"/>
-          </a:xfrm>
-          <a:prstGeom prst="rect">
-            <a:avLst/>
-          </a:prstGeom>
-          <a:noFill/>
-        </p:spPr>
-        <p:txBody>
-          <a:bodyPr wrap="square">
-            <a:spAutoFit/>
-          </a:bodyPr>
-          <a:lstStyle/>
-          <a:p>
-            <a:pPr>
-              <a:defRPr>
-                <a:latin typeface="Roboto"/>
-              </a:defRPr>
-            </a:pPr>
-            <a:r>
-              <a:rPr sz="1100" b="1">
-                <a:solidFill>
-                  <a:srgbClr val="5F6F63"/>
-                </a:solidFill>
-                <a:latin typeface="Roboto"/>
-              </a:rPr>
-              <a:t>WHAT YOU'D DO ABOUT IT</a:t>
-            </a:r>
-          </a:p>
-        </p:txBody>
-      </p:sp>
-      <p:sp>
-        <p:nvSpPr>
-          <p:cNvPr id="10" name="TextBox 9"/>
-          <p:cNvSpPr txBox="1"/>
-          <p:nvPr/>
-        </p:nvSpPr>
-        <p:spPr>
-          <a:xfrm>
-            <a:off x="6461607" y="2103120"/>
-            <a:ext cx="5044287" cy="3749039"/>
-          </a:xfrm>
-          <a:prstGeom prst="rect">
-            <a:avLst/>
-          </a:prstGeom>
-          <a:noFill/>
-        </p:spPr>
-        <p:txBody>
-          <a:bodyPr wrap="square">
-            <a:spAutoFit/>
-          </a:bodyPr>
-          <a:lstStyle/>
-          <a:p>
-            <a:pPr>
-              <a:defRPr>
-                <a:latin typeface="Roboto"/>
-              </a:defRPr>
-            </a:pPr>
-            <a:r>
-              <a:rPr sz="1600" b="0">
-                <a:solidFill>
-                  <a:srgbClr val="25342A"/>
-                </a:solidFill>
-                <a:latin typeface="Roboto"/>
-              </a:rPr>
-              <a:t>Steady and cheap, and untied: the money that builds reserves.</a:t>
-            </a:r>
-          </a:p>
-        </p:txBody>
-      </p:sp>
-      <p:sp>
-        <p:nvSpPr>
-          <p:cNvPr id="11" name="TextBox 10"/>
-          <p:cNvSpPr txBox="1"/>
-          <p:nvPr/>
-        </p:nvSpPr>
-        <p:spPr>
-          <a:xfrm>
-            <a:off x="457200" y="6492240"/>
-            <a:ext cx="3657600" cy="274320"/>
-          </a:xfrm>
-          <a:prstGeom prst="rect">
-            <a:avLst/>
-          </a:prstGeom>
-          <a:noFill/>
-        </p:spPr>
-        <p:txBody>
-          <a:bodyPr wrap="square">
-            <a:spAutoFit/>
-          </a:bodyPr>
-          <a:lstStyle/>
-          <a:p>
-            <a:pPr>
-              <a:defRPr>
-                <a:latin typeface="Roboto"/>
-              </a:defRPr>
-            </a:pPr>
-            <a:r>
-              <a:rPr sz="900" b="0">
-                <a:solidFill>
-                  <a:srgbClr val="5F6F63"/>
-                </a:solidFill>
-                <a:latin typeface="Roboto"/>
-              </a:rPr>
-              <a:t>cost-to-raise.pptx</a:t>
-            </a:r>
-          </a:p>
-        </p:txBody>
-      </p:sp>
-      <p:sp>
-        <p:nvSpPr>
-          <p:cNvPr id="12" name="TextBox 11"/>
-          <p:cNvSpPr txBox="1"/>
-          <p:nvPr/>
-        </p:nvSpPr>
-        <p:spPr>
-          <a:xfrm>
-            <a:off x="4297680" y="6492240"/>
-            <a:ext cx="3657600" cy="274320"/>
-          </a:xfrm>
-          <a:prstGeom prst="rect">
-            <a:avLst/>
-          </a:prstGeom>
-          <a:noFill/>
-        </p:spPr>
-        <p:txBody>
-          <a:bodyPr wrap="square">
-            <a:spAutoFit/>
-          </a:bodyPr>
-          <a:lstStyle/>
-          <a:p>
-            <a:pPr algn="ctr">
-              <a:defRPr>
-                <a:latin typeface="Roboto"/>
-              </a:defRPr>
-            </a:pPr>
-            <a:r>
-              <a:rPr sz="900" b="0">
-                <a:solidFill>
-                  <a:srgbClr val="5F6F63"/>
-                </a:solidFill>
-                <a:latin typeface="Roboto"/>
-              </a:rPr>
-              <a:t>Data retrieved 2pm, Tue 6 Oct 2026 · Sample data</a:t>
-            </a:r>
-          </a:p>
-        </p:txBody>
-      </p:sp>
-      <p:sp>
-        <p:nvSpPr>
-          <p:cNvPr id="13" name="TextBox 12"/>
-          <p:cNvSpPr txBox="1"/>
-          <p:nvPr/>
-        </p:nvSpPr>
-        <p:spPr>
-          <a:xfrm>
-            <a:off x="8503920" y="6492240"/>
-            <a:ext cx="3200400" cy="274320"/>
-          </a:xfrm>
-          <a:prstGeom prst="rect">
-            <a:avLst/>
-          </a:prstGeom>
-          <a:noFill/>
-        </p:spPr>
-        <p:txBody>
-          <a:bodyPr wrap="square">
-            <a:spAutoFit/>
-          </a:bodyPr>
-          <a:lstStyle/>
-          <a:p>
-            <a:pPr algn="r">
-              <a:defRPr>
-                <a:latin typeface="Roboto"/>
-              </a:defRPr>
-            </a:pPr>
-            <a:r>
-              <a:rPr sz="900" b="0">
-                <a:solidFill>
-                  <a:srgbClr val="5F6F63"/>
-                </a:solidFill>
-                <a:latin typeface="Roboto"/>
-              </a:rPr>
-              <a:t>Slide 8 of 11</a:t>
-            </a:r>
-          </a:p>
-        </p:txBody>
-      </p:sp>
-    </p:spTree>
-  </p:cSld>
-  <p:clrMapOvr>
-    <a:masterClrMapping/>
-  </p:clrMapOvr>
-</p:sld>
-</file>
-
-<file path=ppt/slides/slide9.xml><?xml version="1.0" encoding="utf-8"?>
-<p:sld xmlns:a="http://schemas.openxmlformats.org/drawingml/2006/main" xmlns:p="http://schemas.openxmlformats.org/presentationml/2006/main" xmlns:r="http://schemas.openxmlformats.org/officeDocument/2006/relationships">
-  <p:cSld>
-    <p:spTree>
-      <p:nvGrpSpPr>
-        <p:cNvPr id="1" name=""/>
-        <p:cNvGrpSpPr/>
-        <p:nvPr/>
-      </p:nvGrpSpPr>
-      <p:grpSpPr/>
-      <p:sp>
-        <p:nvSpPr>
-          <p:cNvPr id="2" name="Rectangle 1"/>
-          <p:cNvSpPr/>
-          <p:nvPr/>
-        </p:nvSpPr>
-        <p:spPr>
-          <a:xfrm>
-            <a:off x="0" y="0"/>
-            <a:ext cx="12191695" cy="73152"/>
-          </a:xfrm>
-          <a:prstGeom prst="rect">
-            <a:avLst/>
-          </a:prstGeom>
-          <a:solidFill>
-            <a:srgbClr val="2F7A5D"/>
-          </a:solidFill>
-          <a:ln>
-            <a:noFill/>
-          </a:ln>
-        </p:spPr>
-        <p:style>
-          <a:lnRef idx="1">
-            <a:schemeClr val="accent1"/>
-          </a:lnRef>
-          <a:fillRef idx="3">
-            <a:schemeClr val="accent1"/>
-          </a:fillRef>
-          <a:effectRef idx="2">
-            <a:schemeClr val="accent1"/>
-          </a:effectRef>
-          <a:fontRef idx="minor">
-            <a:schemeClr val="lt1"/>
-          </a:fontRef>
-        </p:style>
-        <p:txBody>
-          <a:bodyPr rtlCol="0" anchor="ctr"/>
-          <a:lstStyle/>
-          <a:p>
-            <a:pPr algn="ctr">
-              <a:defRPr>
-                <a:latin typeface="Roboto"/>
-              </a:defRPr>
-            </a:pPr>
-          </a:p>
-        </p:txBody>
-      </p:sp>
-      <p:sp>
-        <p:nvSpPr>
-          <p:cNvPr id="3" name="TextBox 2"/>
-          <p:cNvSpPr txBox="1"/>
-          <p:nvPr/>
-        </p:nvSpPr>
-        <p:spPr>
-          <a:xfrm>
-            <a:off x="457200" y="164592"/>
-            <a:ext cx="7315200" cy="274320"/>
-          </a:xfrm>
-          <a:prstGeom prst="rect">
-            <a:avLst/>
-          </a:prstGeom>
-          <a:noFill/>
-        </p:spPr>
-        <p:txBody>
-          <a:bodyPr wrap="square">
-            <a:spAutoFit/>
-          </a:bodyPr>
-          <a:lstStyle/>
-          <a:p>
-            <a:pPr>
-              <a:defRPr>
-                <a:latin typeface="Roboto"/>
-              </a:defRPr>
-            </a:pPr>
-            <a:r>
-              <a:rPr sz="1000" b="0">
-                <a:solidFill>
-                  <a:srgbClr val="5F6F63"/>
-                </a:solidFill>
-                <a:latin typeface="Roboto"/>
-              </a:rPr>
-              <a:t>Sample Community Services Ltd · What does it cost to raise a dollar?</a:t>
-            </a:r>
-          </a:p>
-        </p:txBody>
-      </p:sp>
-      <p:sp>
-        <p:nvSpPr>
-          <p:cNvPr id="4" name="TextBox 3"/>
-          <p:cNvSpPr txBox="1"/>
-          <p:nvPr/>
-        </p:nvSpPr>
-        <p:spPr>
-          <a:xfrm>
-            <a:off x="457200" y="411480"/>
-            <a:ext cx="11247120" cy="548640"/>
-          </a:xfrm>
-          <a:prstGeom prst="rect">
-            <a:avLst/>
-          </a:prstGeom>
-          <a:noFill/>
-        </p:spPr>
-        <p:txBody>
-          <a:bodyPr wrap="square">
-            <a:spAutoFit/>
-          </a:bodyPr>
-          <a:lstStyle/>
-          <a:p>
-            <a:pPr>
-              <a:defRPr>
-                <a:latin typeface="Roboto"/>
-              </a:defRPr>
-            </a:pPr>
-            <a:r>
-              <a:rPr sz="2400" b="1">
-                <a:solidFill>
-                  <a:srgbClr val="25342A"/>
-                </a:solidFill>
-                <a:latin typeface="Roboto"/>
-              </a:rPr>
-              <a:t>Headline numbers · Source: Fundraising events</a:t>
-            </a:r>
-          </a:p>
-        </p:txBody>
-      </p:sp>
-      <p:sp>
-        <p:nvSpPr>
-          <p:cNvPr id="5" name="Rectangle 4"/>
-          <p:cNvSpPr/>
-          <p:nvPr/>
-        </p:nvSpPr>
-        <p:spPr>
-          <a:xfrm>
-            <a:off x="457200" y="1645920"/>
-            <a:ext cx="5501487" cy="2011680"/>
-          </a:xfrm>
-          <a:prstGeom prst="rect">
-            <a:avLst/>
-          </a:prstGeom>
-          <a:solidFill>
-            <a:srgbClr val="F7FAF7"/>
-          </a:solidFill>
-          <a:ln>
-            <a:solidFill>
-              <a:srgbClr val="DCE8DC"/>
-            </a:solidFill>
-          </a:ln>
-        </p:spPr>
-        <p:style>
-          <a:lnRef idx="1">
-            <a:schemeClr val="accent1"/>
-          </a:lnRef>
-          <a:fillRef idx="3">
-            <a:schemeClr val="accent1"/>
-          </a:fillRef>
-          <a:effectRef idx="2">
-            <a:schemeClr val="accent1"/>
-          </a:effectRef>
-          <a:fontRef idx="minor">
-            <a:schemeClr val="lt1"/>
-          </a:fontRef>
-        </p:style>
-        <p:txBody>
-          <a:bodyPr rtlCol="0" anchor="ctr"/>
-          <a:lstStyle/>
-          <a:p>
-            <a:pPr algn="ctr">
-              <a:defRPr>
-                <a:latin typeface="Roboto"/>
-              </a:defRPr>
-            </a:pPr>
-          </a:p>
-        </p:txBody>
-      </p:sp>
-      <p:sp>
-        <p:nvSpPr>
-          <p:cNvPr id="6" name="TextBox 5"/>
-          <p:cNvSpPr txBox="1"/>
-          <p:nvPr/>
-        </p:nvSpPr>
-        <p:spPr>
-          <a:xfrm>
-            <a:off x="640080" y="1783080"/>
-            <a:ext cx="5135727" cy="457200"/>
-          </a:xfrm>
-          <a:prstGeom prst="rect">
-            <a:avLst/>
-          </a:prstGeom>
-          <a:noFill/>
-        </p:spPr>
-        <p:txBody>
-          <a:bodyPr wrap="square">
-            <a:spAutoFit/>
-          </a:bodyPr>
-          <a:lstStyle/>
-          <a:p>
-            <a:pPr>
-              <a:defRPr>
-                <a:latin typeface="Roboto"/>
-              </a:defRPr>
-            </a:pPr>
-            <a:r>
-              <a:rPr sz="1200" b="0">
-                <a:solidFill>
-                  <a:srgbClr val="5F6F63"/>
-                </a:solidFill>
-                <a:latin typeface="Roboto"/>
-              </a:rPr>
-              <a:t>May · Fundraising events</a:t>
-            </a:r>
-          </a:p>
-        </p:txBody>
-      </p:sp>
-      <p:sp>
-        <p:nvSpPr>
-          <p:cNvPr id="7" name="TextBox 6"/>
-          <p:cNvSpPr txBox="1"/>
-          <p:nvPr/>
-        </p:nvSpPr>
-        <p:spPr>
-          <a:xfrm>
-            <a:off x="640080" y="2240280"/>
-            <a:ext cx="5135727" cy="731520"/>
-          </a:xfrm>
-          <a:prstGeom prst="rect">
-            <a:avLst/>
-          </a:prstGeom>
-          <a:noFill/>
-        </p:spPr>
-        <p:txBody>
-          <a:bodyPr wrap="square">
-            <a:spAutoFit/>
-          </a:bodyPr>
-          <a:lstStyle/>
-          <a:p>
-            <a:pPr>
-              <a:defRPr>
-                <a:latin typeface="Roboto"/>
-              </a:defRPr>
-            </a:pPr>
-            <a:r>
-              <a:rPr sz="3000" b="1">
-                <a:solidFill>
-                  <a:srgbClr val="2F7A5D"/>
-                </a:solidFill>
-                <a:latin typeface="Roboto"/>
-              </a:rPr>
-              <a:t>–</a:t>
-            </a:r>
-          </a:p>
-        </p:txBody>
-      </p:sp>
-      <p:sp>
-        <p:nvSpPr>
-          <p:cNvPr id="8" name="TextBox 7"/>
-          <p:cNvSpPr txBox="1"/>
-          <p:nvPr/>
-        </p:nvSpPr>
-        <p:spPr>
-          <a:xfrm>
-            <a:off x="640080" y="3017520"/>
-            <a:ext cx="5135727" cy="548640"/>
-          </a:xfrm>
-          <a:prstGeom prst="rect">
-            <a:avLst/>
-          </a:prstGeom>
-          <a:noFill/>
-        </p:spPr>
-        <p:txBody>
-          <a:bodyPr wrap="square">
-            <a:spAutoFit/>
-          </a:bodyPr>
-          <a:lstStyle/>
-          <a:p>
-            <a:pPr>
-              <a:defRPr>
-                <a:latin typeface="Roboto"/>
-              </a:defRPr>
-            </a:pPr>
-            <a:r>
-              <a:rPr sz="1100" b="0">
-                <a:solidFill>
-                  <a:srgbClr val="5F6F63"/>
-                </a:solidFill>
-                <a:latin typeface="Roboto"/>
-              </a:rPr>
-              <a:t>April none raised</a:t>
-            </a:r>
-          </a:p>
-        </p:txBody>
-      </p:sp>
-      <p:sp>
-        <p:nvSpPr>
-          <p:cNvPr id="9" name="Rectangle 8"/>
-          <p:cNvSpPr/>
-          <p:nvPr/>
-        </p:nvSpPr>
-        <p:spPr>
-          <a:xfrm>
-            <a:off x="6233007" y="1645920"/>
-            <a:ext cx="5501487" cy="2011680"/>
-          </a:xfrm>
-          <a:prstGeom prst="rect">
-            <a:avLst/>
-          </a:prstGeom>
-          <a:solidFill>
-            <a:srgbClr val="F7FAF7"/>
-          </a:solidFill>
-          <a:ln>
-            <a:solidFill>
-              <a:srgbClr val="DCE8DC"/>
-            </a:solidFill>
-          </a:ln>
-        </p:spPr>
-        <p:style>
-          <a:lnRef idx="1">
-            <a:schemeClr val="accent1"/>
-          </a:lnRef>
-          <a:fillRef idx="3">
-            <a:schemeClr val="accent1"/>
-          </a:fillRef>
-          <a:effectRef idx="2">
-            <a:schemeClr val="accent1"/>
-          </a:effectRef>
-          <a:fontRef idx="minor">
-            <a:schemeClr val="lt1"/>
-          </a:fontRef>
-        </p:style>
-        <p:txBody>
-          <a:bodyPr rtlCol="0" anchor="ctr"/>
-          <a:lstStyle/>
-          <a:p>
-            <a:pPr algn="ctr">
-              <a:defRPr>
-                <a:latin typeface="Roboto"/>
-              </a:defRPr>
-            </a:pPr>
-          </a:p>
-        </p:txBody>
-      </p:sp>
-      <p:sp>
-        <p:nvSpPr>
-          <p:cNvPr id="10" name="TextBox 9"/>
-          <p:cNvSpPr txBox="1"/>
-          <p:nvPr/>
-        </p:nvSpPr>
-        <p:spPr>
-          <a:xfrm>
-            <a:off x="6415887" y="1783080"/>
-            <a:ext cx="5135727" cy="457200"/>
-          </a:xfrm>
-          <a:prstGeom prst="rect">
-            <a:avLst/>
-          </a:prstGeom>
-          <a:noFill/>
-        </p:spPr>
-        <p:txBody>
-          <a:bodyPr wrap="square">
-            <a:spAutoFit/>
-          </a:bodyPr>
-          <a:lstStyle/>
-          <a:p>
-            <a:pPr>
-              <a:defRPr>
-                <a:latin typeface="Roboto"/>
-              </a:defRPr>
-            </a:pPr>
-            <a:r>
-              <a:rPr sz="1200" b="0">
-                <a:solidFill>
-                  <a:srgbClr val="5F6F63"/>
-                </a:solidFill>
-                <a:latin typeface="Roboto"/>
-              </a:rPr>
-              <a:t>Year to date (Jul to May 2026)</a:t>
-            </a:r>
-          </a:p>
-        </p:txBody>
-      </p:sp>
-      <p:sp>
-        <p:nvSpPr>
-          <p:cNvPr id="11" name="TextBox 10"/>
-          <p:cNvSpPr txBox="1"/>
-          <p:nvPr/>
-        </p:nvSpPr>
-        <p:spPr>
-          <a:xfrm>
-            <a:off x="6415887" y="2240280"/>
-            <a:ext cx="5135727" cy="731520"/>
-          </a:xfrm>
-          <a:prstGeom prst="rect">
-            <a:avLst/>
-          </a:prstGeom>
-          <a:noFill/>
-        </p:spPr>
-        <p:txBody>
-          <a:bodyPr wrap="square">
-            <a:spAutoFit/>
-          </a:bodyPr>
-          <a:lstStyle/>
-          <a:p>
-            <a:pPr>
-              <a:defRPr>
-                <a:latin typeface="Roboto"/>
-              </a:defRPr>
-            </a:pPr>
-            <a:r>
-              <a:rPr sz="3000" b="1">
-                <a:solidFill>
-                  <a:srgbClr val="2F7A5D"/>
-                </a:solidFill>
-                <a:latin typeface="Roboto"/>
-              </a:rPr>
-              <a:t>41¢</a:t>
-            </a:r>
-          </a:p>
-        </p:txBody>
-      </p:sp>
-      <p:sp>
-        <p:nvSpPr>
-          <p:cNvPr id="12" name="TextBox 11"/>
-          <p:cNvSpPr txBox="1"/>
-          <p:nvPr/>
-        </p:nvSpPr>
-        <p:spPr>
-          <a:xfrm>
-            <a:off x="6415887" y="3017520"/>
-            <a:ext cx="5135727" cy="548640"/>
-          </a:xfrm>
-          <a:prstGeom prst="rect">
-            <a:avLst/>
-          </a:prstGeom>
-          <a:noFill/>
-        </p:spPr>
-        <p:txBody>
-          <a:bodyPr wrap="square">
-            <a:spAutoFit/>
-          </a:bodyPr>
-          <a:lstStyle/>
-          <a:p>
-            <a:pPr>
-              <a:defRPr>
-                <a:latin typeface="Roboto"/>
-              </a:defRPr>
-            </a:pPr>
-            <a:r>
-              <a:rPr sz="1100" b="0">
-                <a:solidFill>
-                  <a:srgbClr val="5F6F63"/>
-                </a:solidFill>
-                <a:latin typeface="Roboto"/>
-              </a:rPr>
-              <a:t>same period last year: not in the data</a:t>
-            </a:r>
-          </a:p>
-        </p:txBody>
-      </p:sp>
-      <p:sp>
-        <p:nvSpPr>
-          <p:cNvPr id="13" name="TextBox 12"/>
-          <p:cNvSpPr txBox="1"/>
-          <p:nvPr/>
-        </p:nvSpPr>
-        <p:spPr>
-          <a:xfrm>
-            <a:off x="457200" y="6492240"/>
-            <a:ext cx="3657600" cy="274320"/>
-          </a:xfrm>
-          <a:prstGeom prst="rect">
-            <a:avLst/>
-          </a:prstGeom>
-          <a:noFill/>
-        </p:spPr>
-        <p:txBody>
-          <a:bodyPr wrap="square">
-            <a:spAutoFit/>
-          </a:bodyPr>
-          <a:lstStyle/>
-          <a:p>
-            <a:pPr>
-              <a:defRPr>
-                <a:latin typeface="Roboto"/>
-              </a:defRPr>
-            </a:pPr>
-            <a:r>
-              <a:rPr sz="900" b="0">
-                <a:solidFill>
-                  <a:srgbClr val="5F6F63"/>
-                </a:solidFill>
-                <a:latin typeface="Roboto"/>
-              </a:rPr>
-              <a:t>cost-to-raise.pptx</a:t>
-            </a:r>
-          </a:p>
-        </p:txBody>
-      </p:sp>
-      <p:sp>
-        <p:nvSpPr>
-          <p:cNvPr id="14" name="TextBox 13"/>
-          <p:cNvSpPr txBox="1"/>
-          <p:nvPr/>
-        </p:nvSpPr>
-        <p:spPr>
-          <a:xfrm>
-            <a:off x="4297680" y="6492240"/>
-            <a:ext cx="3657600" cy="274320"/>
-          </a:xfrm>
-          <a:prstGeom prst="rect">
-            <a:avLst/>
-          </a:prstGeom>
-          <a:noFill/>
-        </p:spPr>
-        <p:txBody>
-          <a:bodyPr wrap="square">
-            <a:spAutoFit/>
-          </a:bodyPr>
-          <a:lstStyle/>
-          <a:p>
-            <a:pPr algn="ctr">
-              <a:defRPr>
-                <a:latin typeface="Roboto"/>
-              </a:defRPr>
-            </a:pPr>
-            <a:r>
-              <a:rPr sz="900" b="0">
-                <a:solidFill>
-                  <a:srgbClr val="5F6F63"/>
-                </a:solidFill>
-                <a:latin typeface="Roboto"/>
-              </a:rPr>
-              <a:t>Data retrieved 2pm, Tue 6 Oct 2026 · Sample data</a:t>
-            </a:r>
-          </a:p>
-        </p:txBody>
-      </p:sp>
-      <p:sp>
-        <p:nvSpPr>
-          <p:cNvPr id="15" name="TextBox 14"/>
-          <p:cNvSpPr txBox="1"/>
-          <p:nvPr/>
-        </p:nvSpPr>
-        <p:spPr>
-          <a:xfrm>
-            <a:off x="8503920" y="6492240"/>
-            <a:ext cx="3200400" cy="274320"/>
-          </a:xfrm>
-          <a:prstGeom prst="rect">
-            <a:avLst/>
-          </a:prstGeom>
-          <a:noFill/>
-        </p:spPr>
-        <p:txBody>
-          <a:bodyPr wrap="square">
-            <a:spAutoFit/>
-          </a:bodyPr>
-          <a:lstStyle/>
-          <a:p>
-            <a:pPr algn="r">
-              <a:defRPr>
-                <a:latin typeface="Roboto"/>
-              </a:defRPr>
-            </a:pPr>
-            <a:r>
-              <a:rPr sz="900" b="0">
-                <a:solidFill>
-                  <a:srgbClr val="5F6F63"/>
-                </a:solidFill>
-                <a:latin typeface="Roboto"/>
-              </a:rPr>
-              <a:t>Slide 9 of 11</a:t>
+              <a:t>Slide 5 of 5</a:t>
             </a:r>
           </a:p>
         </p:txBody>
@@ -9011,6 +8790,326 @@
 </file>
 
 <file path=ppt/theme/theme1.xml><?xml version="1.0" encoding="utf-8"?>
+<a:theme xmlns:a="http://schemas.openxmlformats.org/drawingml/2006/main" name="Office Theme">
+  <a:themeElements>
+    <a:clrScheme name="Office">
+      <a:dk1>
+        <a:sysClr val="windowText" lastClr="000000"/>
+      </a:dk1>
+      <a:lt1>
+        <a:sysClr val="window" lastClr="FFFFFF"/>
+      </a:lt1>
+      <a:dk2>
+        <a:srgbClr val="25342A"/>
+      </a:dk2>
+      <a:lt2>
+        <a:srgbClr val="F4F7F2"/>
+      </a:lt2>
+      <a:accent1>
+        <a:srgbClr val="2F7A5D"/>
+      </a:accent1>
+      <a:accent2>
+        <a:srgbClr val="0E9F6E"/>
+      </a:accent2>
+      <a:accent3>
+        <a:srgbClr val="7D8790"/>
+      </a:accent3>
+      <a:accent4>
+        <a:srgbClr val="8A6D3B"/>
+      </a:accent4>
+      <a:accent5>
+        <a:srgbClr val="B42318"/>
+      </a:accent5>
+      <a:accent6>
+        <a:srgbClr val="8E9CAB"/>
+      </a:accent6>
+      <a:hlink>
+        <a:srgbClr val="0000FF"/>
+      </a:hlink>
+      <a:folHlink>
+        <a:srgbClr val="800080"/>
+      </a:folHlink>
+    </a:clrScheme>
+    <a:fontScheme name="Office">
+      <a:majorFont>
+        <a:latin typeface="Roboto"/>
+        <a:ea typeface=""/>
+        <a:cs typeface=""/>
+        <a:font script="Jpan" typeface="ＭＳ Ｐゴシック"/>
+        <a:font script="Hang" typeface="맑은 고딕"/>
+        <a:font script="Hans" typeface="宋体"/>
+        <a:font script="Hant" typeface="新細明體"/>
+        <a:font script="Arab" typeface="Times New Roman"/>
+        <a:font script="Hebr" typeface="Times New Roman"/>
+        <a:font script="Thai" typeface="Angsana New"/>
+        <a:font script="Ethi" typeface="Nyala"/>
+        <a:font script="Beng" typeface="Vrinda"/>
+        <a:font script="Gujr" typeface="Shruti"/>
+        <a:font script="Khmr" typeface="MoolBoran"/>
+        <a:font script="Knda" typeface="Tunga"/>
+        <a:font script="Guru" typeface="Raavi"/>
+        <a:font script="Cans" typeface="Euphemia"/>
+        <a:font script="Cher" typeface="Plantagenet Cherokee"/>
+        <a:font script="Yiii" typeface="Microsoft Yi Baiti"/>
+        <a:font script="Tibt" typeface="Microsoft Himalaya"/>
+        <a:font script="Thaa" typeface="MV Boli"/>
+        <a:font script="Deva" typeface="Mangal"/>
+        <a:font script="Telu" typeface="Gautami"/>
+        <a:font script="Taml" typeface="Latha"/>
+        <a:font script="Syrc" typeface="Estrangelo Edessa"/>
+        <a:font script="Orya" typeface="Kalinga"/>
+        <a:font script="Mlym" typeface="Kartika"/>
+        <a:font script="Laoo" typeface="DokChampa"/>
+        <a:font script="Sinh" typeface="Iskoola Pota"/>
+        <a:font script="Mong" typeface="Mongolian Baiti"/>
+        <a:font script="Viet" typeface="Times New Roman"/>
+        <a:font script="Uigh" typeface="Microsoft Uighur"/>
+        <a:font script="Geor" typeface="Sylfaen"/>
+      </a:majorFont>
+      <a:minorFont>
+        <a:latin typeface="Roboto"/>
+        <a:ea typeface=""/>
+        <a:cs typeface=""/>
+        <a:font script="Jpan" typeface="ＭＳ Ｐゴシック"/>
+        <a:font script="Hang" typeface="맑은 고딕"/>
+        <a:font script="Hans" typeface="宋体"/>
+        <a:font script="Hant" typeface="新細明體"/>
+        <a:font script="Arab" typeface="Arial"/>
+        <a:font script="Hebr" typeface="Arial"/>
+        <a:font script="Thai" typeface="Cordia New"/>
+        <a:font script="Ethi" typeface="Nyala"/>
+        <a:font script="Beng" typeface="Vrinda"/>
+        <a:font script="Gujr" typeface="Shruti"/>
+        <a:font script="Khmr" typeface="DaunPenh"/>
+        <a:font script="Knda" typeface="Tunga"/>
+        <a:font script="Guru" typeface="Raavi"/>
+        <a:font script="Cans" typeface="Euphemia"/>
+        <a:font script="Cher" typeface="Plantagenet Cherokee"/>
+        <a:font script="Yiii" typeface="Microsoft Yi Baiti"/>
+        <a:font script="Tibt" typeface="Microsoft Himalaya"/>
+        <a:font script="Thaa" typeface="MV Boli"/>
+        <a:font script="Deva" typeface="Mangal"/>
+        <a:font script="Telu" typeface="Gautami"/>
+        <a:font script="Taml" typeface="Latha"/>
+        <a:font script="Syrc" typeface="Estrangelo Edessa"/>
+        <a:font script="Orya" typeface="Kalinga"/>
+        <a:font script="Mlym" typeface="Kartika"/>
+        <a:font script="Laoo" typeface="DokChampa"/>
+        <a:font script="Sinh" typeface="Iskoola Pota"/>
+        <a:font script="Mong" typeface="Mongolian Baiti"/>
+        <a:font script="Viet" typeface="Arial"/>
+        <a:font script="Uigh" typeface="Microsoft Uighur"/>
+        <a:font script="Geor" typeface="Sylfaen"/>
+      </a:minorFont>
+    </a:fontScheme>
+    <a:fmtScheme name="Office">
+      <a:fillStyleLst>
+        <a:solidFill>
+          <a:schemeClr val="phClr"/>
+        </a:solidFill>
+        <a:gradFill rotWithShape="1">
+          <a:gsLst>
+            <a:gs pos="0">
+              <a:schemeClr val="phClr">
+                <a:tint val="50000"/>
+                <a:satMod val="300000"/>
+              </a:schemeClr>
+            </a:gs>
+            <a:gs pos="35000">
+              <a:schemeClr val="phClr">
+                <a:tint val="37000"/>
+                <a:satMod val="300000"/>
+              </a:schemeClr>
+            </a:gs>
+            <a:gs pos="100000">
+              <a:schemeClr val="phClr">
+                <a:tint val="15000"/>
+                <a:satMod val="350000"/>
+              </a:schemeClr>
+            </a:gs>
+          </a:gsLst>
+          <a:lin ang="16200000" scaled="1"/>
+        </a:gradFill>
+        <a:gradFill rotWithShape="1">
+          <a:gsLst>
+            <a:gs pos="0">
+              <a:schemeClr val="phClr">
+                <a:tint val="100000"/>
+                <a:shade val="100000"/>
+                <a:satMod val="130000"/>
+              </a:schemeClr>
+            </a:gs>
+            <a:gs pos="100000">
+              <a:schemeClr val="phClr">
+                <a:tint val="50000"/>
+                <a:shade val="100000"/>
+                <a:satMod val="350000"/>
+              </a:schemeClr>
+            </a:gs>
+          </a:gsLst>
+          <a:lin ang="16200000" scaled="0"/>
+        </a:gradFill>
+      </a:fillStyleLst>
+      <a:lnStyleLst>
+        <a:ln w="9525" cap="flat" cmpd="sng" algn="ctr">
+          <a:solidFill>
+            <a:schemeClr val="phClr">
+              <a:shade val="95000"/>
+              <a:satMod val="105000"/>
+            </a:schemeClr>
+          </a:solidFill>
+          <a:prstDash val="solid"/>
+        </a:ln>
+        <a:ln w="25400" cap="flat" cmpd="sng" algn="ctr">
+          <a:solidFill>
+            <a:schemeClr val="phClr"/>
+          </a:solidFill>
+          <a:prstDash val="solid"/>
+        </a:ln>
+        <a:ln w="38100" cap="flat" cmpd="sng" algn="ctr">
+          <a:solidFill>
+            <a:schemeClr val="phClr"/>
+          </a:solidFill>
+          <a:prstDash val="solid"/>
+        </a:ln>
+      </a:lnStyleLst>
+      <a:effectStyleLst>
+        <a:effectStyle>
+          <a:effectLst>
+            <a:outerShdw blurRad="40000" dist="20000" dir="5400000" rotWithShape="0">
+              <a:srgbClr val="000000">
+                <a:alpha val="38000"/>
+              </a:srgbClr>
+            </a:outerShdw>
+          </a:effectLst>
+        </a:effectStyle>
+        <a:effectStyle>
+          <a:effectLst>
+            <a:outerShdw blurRad="40000" dist="23000" dir="5400000" rotWithShape="0">
+              <a:srgbClr val="000000">
+                <a:alpha val="35000"/>
+              </a:srgbClr>
+            </a:outerShdw>
+          </a:effectLst>
+        </a:effectStyle>
+        <a:effectStyle>
+          <a:effectLst>
+            <a:outerShdw blurRad="40000" dist="23000" dir="5400000" rotWithShape="0">
+              <a:srgbClr val="000000">
+                <a:alpha val="35000"/>
+              </a:srgbClr>
+            </a:outerShdw>
+          </a:effectLst>
+          <a:scene3d>
+            <a:camera prst="orthographicFront">
+              <a:rot lat="0" lon="0" rev="0"/>
+            </a:camera>
+            <a:lightRig rig="threePt" dir="t">
+              <a:rot lat="0" lon="0" rev="1200000"/>
+            </a:lightRig>
+          </a:scene3d>
+          <a:sp3d>
+            <a:bevelT w="63500" h="25400"/>
+          </a:sp3d>
+        </a:effectStyle>
+      </a:effectStyleLst>
+      <a:bgFillStyleLst>
+        <a:solidFill>
+          <a:schemeClr val="phClr"/>
+        </a:solidFill>
+        <a:gradFill rotWithShape="1">
+          <a:gsLst>
+            <a:gs pos="0">
+              <a:schemeClr val="phClr">
+                <a:tint val="40000"/>
+                <a:satMod val="350000"/>
+              </a:schemeClr>
+            </a:gs>
+            <a:gs pos="40000">
+              <a:schemeClr val="phClr">
+                <a:tint val="45000"/>
+                <a:shade val="99000"/>
+                <a:satMod val="350000"/>
+              </a:schemeClr>
+            </a:gs>
+            <a:gs pos="100000">
+              <a:schemeClr val="phClr">
+                <a:shade val="20000"/>
+                <a:satMod val="255000"/>
+              </a:schemeClr>
+            </a:gs>
+          </a:gsLst>
+          <a:path path="circle">
+            <a:fillToRect l="50000" t="-80000" r="50000" b="180000"/>
+          </a:path>
+        </a:gradFill>
+        <a:gradFill rotWithShape="1">
+          <a:gsLst>
+            <a:gs pos="0">
+              <a:schemeClr val="phClr">
+                <a:tint val="80000"/>
+                <a:satMod val="300000"/>
+              </a:schemeClr>
+            </a:gs>
+            <a:gs pos="100000">
+              <a:schemeClr val="phClr">
+                <a:shade val="30000"/>
+                <a:satMod val="200000"/>
+              </a:schemeClr>
+            </a:gs>
+          </a:gsLst>
+          <a:path path="circle">
+            <a:fillToRect l="50000" t="50000" r="50000" b="50000"/>
+          </a:path>
+        </a:gradFill>
+      </a:bgFillStyleLst>
+    </a:fmtScheme>
+  </a:themeElements>
+  <a:objectDefaults>
+    <a:spDef>
+      <a:spPr/>
+      <a:bodyPr/>
+      <a:lstStyle/>
+      <a:style>
+        <a:lnRef idx="1">
+          <a:schemeClr val="accent1"/>
+        </a:lnRef>
+        <a:fillRef idx="3">
+          <a:schemeClr val="accent1"/>
+        </a:fillRef>
+        <a:effectRef idx="2">
+          <a:schemeClr val="accent1"/>
+        </a:effectRef>
+        <a:fontRef idx="minor">
+          <a:schemeClr val="lt1"/>
+        </a:fontRef>
+      </a:style>
+    </a:spDef>
+    <a:lnDef>
+      <a:spPr/>
+      <a:bodyPr/>
+      <a:lstStyle/>
+      <a:style>
+        <a:lnRef idx="2">
+          <a:schemeClr val="accent1"/>
+        </a:lnRef>
+        <a:fillRef idx="0">
+          <a:schemeClr val="accent1"/>
+        </a:fillRef>
+        <a:effectRef idx="1">
+          <a:schemeClr val="accent1"/>
+        </a:effectRef>
+        <a:fontRef idx="minor">
+          <a:schemeClr val="tx1"/>
+        </a:fontRef>
+      </a:style>
+    </a:lnDef>
+  </a:objectDefaults>
+  <a:extraClrSchemeLst/>
+</a:theme>
+</file>
+
+<file path=ppt/theme/theme2.xml><?xml version="1.0" encoding="utf-8"?>
 <a:theme xmlns:a="http://schemas.openxmlformats.org/drawingml/2006/main" name="Office Theme">
   <a:themeElements>
     <a:clrScheme name="Office">

--- a/media/exports/reports/2026-05/cost-to-raise.pptx
+++ b/media/exports/reports/2026-05/cost-to-raise.pptx
@@ -1438,7 +1438,7 @@
           <a:lstStyle/>
           <a:p>
             <a:r>
-              <a:t>What does it cost to raise a dollar?. Sample Community Services Ltd. Period: May 2026. What fundraising costs (grant writing, donor campaigns, events) for every dollar it brings in. Pick a source and every number, chart and note follows it.</a:t>
+              <a:t>What does it cost to raise a dollar?. Sample Community Services Ltd. Period: May 2026. In short: Each dollar raised cost 10¢ in May, and 13¢ a dollar this financial year to date. What fundraising costs (grant writing, donor campaigns, events) for every dollar it brings in. Pick a source and every number, chart and note follows it.</a:t>
             </a:r>
           </a:p>
         </p:txBody>
@@ -4943,7 +4943,7 @@
         <p:spPr>
           <a:xfrm>
             <a:off x="457200" y="3703320"/>
-            <a:ext cx="11277295" cy="535940"/>
+            <a:ext cx="11277295" cy="758190"/>
           </a:xfrm>
           <a:prstGeom prst="rect">
             <a:avLst/>
@@ -4968,7 +4968,7 @@
                 </a:solidFill>
                 <a:latin typeface="Roboto"/>
               </a:rPr>
-              <a:t>Period: May 2026. What fundraising costs (grant writing, donor campaigns, events) for every dollar it brings in. Pick a source and every number, chart and note follows it.</a:t>
+              <a:t>Period: May 2026. In short: Each dollar raised cost 10¢ in May, and 13¢ a dollar this financial year to date. What fundraising costs (grant writing, donor campaigns, events) for every dollar it brings in. Pick a source and every number, chart and note follows it.</a:t>
             </a:r>
           </a:p>
         </p:txBody>
@@ -4981,7 +4981,7 @@
         </p:nvSpPr>
         <p:spPr>
           <a:xfrm>
-            <a:off x="457200" y="4330700"/>
+            <a:off x="457200" y="4552950"/>
             <a:ext cx="11277295" cy="1097280"/>
           </a:xfrm>
           <a:prstGeom prst="rect">
@@ -5133,7 +5133,7 @@
                 </a:solidFill>
                 <a:latin typeface="Roboto"/>
               </a:rPr>
-              <a:t>Data retrieved 2pm, Tue 6 Oct 2026 · Generated 8 Oct 2026, 9:35am · Sample data · Made with Python (python-pptx)</a:t>
+              <a:t>Data retrieved 2pm, Tue 6 Oct 2026 · Generated 10 Oct 2026, 9:55pm · Sample data · Made with Python (python-pptx)</a:t>
             </a:r>
           </a:p>
         </p:txBody>
@@ -6034,7 +6034,7 @@
                 </a:solidFill>
                 <a:latin typeface="Roboto"/>
               </a:rPr>
-              <a:t>Data retrieved 2pm, Tue 6 Oct 2026 · Generated 8 Oct 2026, 9:35am · Sample data · Made with Python (python-pptx)</a:t>
+              <a:t>Data retrieved 2pm, Tue 6 Oct 2026 · Generated 10 Oct 2026, 9:55pm · Sample data · Made with Python (python-pptx)</a:t>
             </a:r>
           </a:p>
         </p:txBody>
@@ -6935,7 +6935,7 @@
                 </a:solidFill>
                 <a:latin typeface="Roboto"/>
               </a:rPr>
-              <a:t>Data retrieved 2pm, Tue 6 Oct 2026 · Generated 8 Oct 2026, 9:35am · Sample data · Made with Python (python-pptx)</a:t>
+              <a:t>Data retrieved 2pm, Tue 6 Oct 2026 · Generated 10 Oct 2026, 9:55pm · Sample data · Made with Python (python-pptx)</a:t>
             </a:r>
           </a:p>
         </p:txBody>
@@ -7836,7 +7836,7 @@
                 </a:solidFill>
                 <a:latin typeface="Roboto"/>
               </a:rPr>
-              <a:t>Data retrieved 2pm, Tue 6 Oct 2026 · Generated 8 Oct 2026, 9:35am · Sample data · Made with Python (python-pptx)</a:t>
+              <a:t>Data retrieved 2pm, Tue 6 Oct 2026 · Generated 10 Oct 2026, 9:55pm · Sample data · Made with Python (python-pptx)</a:t>
             </a:r>
           </a:p>
         </p:txBody>
@@ -8737,7 +8737,7 @@
                 </a:solidFill>
                 <a:latin typeface="Roboto"/>
               </a:rPr>
-              <a:t>Data retrieved 2pm, Tue 6 Oct 2026 · Generated 8 Oct 2026, 9:35am · Sample data · Made with Python (python-pptx)</a:t>
+              <a:t>Data retrieved 2pm, Tue 6 Oct 2026 · Generated 10 Oct 2026, 9:55pm · Sample data · Made with Python (python-pptx)</a:t>
             </a:r>
           </a:p>
         </p:txBody>
